--- a/2026.10.16AI与通信融合研究进展调研四.pptx
+++ b/2026.10.16AI与通信融合研究进展调研四.pptx
@@ -597,7 +597,7 @@
             </a:r>
             <a:r>
               <a:rPr lang="zh-CN" altLang="en-US"/>
-              <a:t>功能是否仍然可靠。三篇专利分别对应关联配置验证、部署后监测，以及模型组合验收。</a:t>
+              <a:t>功能是否仍然可靠。找到的三篇专利分别对应关联配置验证、部署后监测，以及模型组合验收。</a:t>
             </a:r>
             <a:endParaRPr lang="zh-CN" altLang="en-US"/>
           </a:p>
@@ -608,7 +608,7 @@
                   <a:schemeClr val="tx1"/>
                 </a:solidFill>
               </a:rPr>
-              <a:t>第二是Radio Map，结合现有外场数据，研究怎样预测未测区域的覆盖情况，再据此寻找弱覆盖候选点、安排后续补测。三篇论文分别关注利用众包测量分析覆盖边界与薄弱区域、利用轨迹上的稀疏测量补全覆盖地图，以及结合仿真和少量实测估计三维覆盖并选择补测位置。</a:t>
+              <a:t>第二是Radio Map，它结合现有测量数据，研究怎样预测未测区域的覆盖情况，再据此寻找弱覆盖候选点、从而来安排后续补测。找到的三篇论文分别关注利用众包测量分析覆盖边界与薄弱区域、利用轨迹上的稀疏测量补全覆盖地图，以及结合仿真和少量实测估计三维覆盖并选择补测位置。</a:t>
             </a:r>
             <a:endParaRPr lang="zh-CN" altLang="en-US"/>
           </a:p>
@@ -685,7 +685,7 @@
             </a:r>
             <a:r>
               <a:rPr lang="zh-CN" altLang="en-US"/>
-              <a:t>的输出是否合理。 例如，</a:t>
+              <a:t>的输出是否合理。 </a:t>
             </a:r>
             <a:r>
               <a:rPr lang="zh-CN" altLang="en-US" sz="1800">
@@ -693,7 +693,7 @@
                   <a:schemeClr val="tx1"/>
                 </a:solidFill>
               </a:rPr>
-              <a:t>终端预测的 RSRP 还受到自身接收增益影响，测试设备难以仅凭发射参数算出准确答案。因此，专利提出利用配置之间的已知关系，检查模型输出的变化是否合理。</a:t>
+              <a:t>专利提出利用配置之间的已知关系，检查模型输出的变化是否合理。</a:t>
             </a:r>
             <a:endParaRPr lang="zh-CN" altLang="en-US"/>
           </a:p>
@@ -711,14 +711,14 @@
           <a:p>
             <a:r>
               <a:rPr lang="zh-CN" altLang="en-US"/>
-              <a:t>右侧流程图展示了这一过程：先保存基准预测，再构造关联配置，获得第二组结果，随后根据预期关系和容差进行判断。满足要求时，可以继续测试其他配置；偏差超限时，则进一步复测，或采取停用、重新训练等措施。</a:t>
+              <a:t>右侧流程图展示了这一过程：先保存基准预测，再构造关联配置，获得第二组结果，随后根据预期关系和容差进行判断。满足要求时，可以继续测试其他配置；偏差超过限制时，则进一步复测，或采取停用、重新训练等措施。</a:t>
             </a:r>
             <a:endParaRPr lang="zh-CN" altLang="en-US"/>
           </a:p>
           <a:p>
             <a:r>
               <a:rPr lang="zh-CN" altLang="en-US"/>
-              <a:t>这种关系检查能够补充模型验证，但完整验收仍需结合预测精度和实际通信效果。</a:t>
+              <a:t>这种关系检查能够补充模型验证，但完整验收仍需结合具体的预测精度和实际通信效果。</a:t>
             </a:r>
             <a:endParaRPr lang="zh-CN" altLang="en-US"/>
           </a:p>
@@ -796,7 +796,7 @@
                   <a:schemeClr val="tx1"/>
                 </a:solidFill>
               </a:rPr>
-              <a:t>它首先为每个模型记录标识、版本和验证状态，再由网络配置监测条件，告诉终端什么时候需要检查。例如，小区变化、信号下降，或者预测值与实测值偏差较大，都可以触发监测。这里要注意，触发监测只是说明需要检查，并不代表模型已经失效。</a:t>
+              <a:t>它首先为每个模型记录标识、版本和验证状态，再由网络配置监测条件，告诉终端什么时候需要检查。例如，小区变化、信号下降，或者预测值与实测值偏差较大，都可以触发监测。这里要注意，触发监测只是说明需要检查，并不代表模型已经失效了。</a:t>
             </a:r>
             <a:endParaRPr lang="zh-CN" altLang="en-US" sz="1800">
               <a:solidFill>
@@ -811,9 +811,13 @@
                   <a:schemeClr val="tx1"/>
                 </a:solidFill>
               </a:rPr>
-              <a:t>结合右侧流程图，终端完成监测后，会反馈评分或测量结果。当前模型表现良好就继续使用；表现不好，则寻找在相近条件下表现合格的候选模型，没有合适候选就回退传统方案。网络也可以直接下发切换指令。对我们的测试研究，可以重点检查这套机制能否及时发现退化，以及切换或回退后能否恢复功能。</a:t>
-            </a:r>
-            <a:endParaRPr lang="zh-CN" altLang="en-US"/>
+              <a:t>结合右侧流程图，终端完成监测后，会反馈评分或测量结果。当前模型表现良好就继续使用；表现不好，则寻找在相近条件下表现合格的候选模型，没有合适候选就回退为传统方案。网络也可以直接下发切换指令。可以借鉴它将监测条件、模型表现和后续处理关联起来的思路，使测试结果能够支持模型继续使用、更换或停用的判断。</a:t>
+            </a:r>
+            <a:endParaRPr lang="zh-CN" altLang="en-US" sz="1800">
+              <a:solidFill>
+                <a:schemeClr val="tx1"/>
+              </a:solidFill>
+            </a:endParaRPr>
           </a:p>
         </p:txBody>
       </p:sp>
@@ -896,7 +900,7 @@
                   <a:schemeClr val="tx1"/>
                 </a:solidFill>
               </a:rPr>
-              <a:t>这篇的价值，就是把模型更新的验收依据，从单模型误差扩展到组合功能和整体资源开销；目前主要还是机制设计，具体指标和门限需要通过实验确定。</a:t>
+              <a:t>这篇的价值，就是把模型更新的验收依据，从单模型误差扩展到组合功能和整体资源开销；目前主要还是机制设计，具体指标和门限需要通过后续实验进一步确定。</a:t>
             </a:r>
             <a:endParaRPr lang="zh-CN" altLang="en-US"/>
           </a:p>
@@ -974,7 +978,7 @@
                   <a:schemeClr val="tx1"/>
                 </a:solidFill>
               </a:rPr>
-              <a:t>研究先按照小区和信号等级对测量进行分组，再根据测量位置学习各等级的覆盖边界。传统凸包法相当于用最外围的点围出一个区域，容易把中间实际没有覆盖的地方也包进去。作者采用单类支持向量机，让边界更贴合测量点的空间分布，能够表达凹陷和局部空洞，最终得到不同信号等级对应的地理范围。</a:t>
+              <a:t>研究先按照小区和信号等级对测量进行分组，再根据测量位置学习各等级的覆盖边界。传统凸包法相当于用最外围的点围出一个区域，容易把中间实际没有覆盖的地方也包进去。这个研究采用单类支持向量机，让边界更贴合测量点的空间分布，能够表达凹陷和局部空洞，最终得到不同信号等级对应的地理范围。</a:t>
             </a:r>
             <a:endParaRPr lang="zh-CN" altLang="en-US" sz="1800">
               <a:solidFill>
@@ -1005,12 +1009,64 @@
                   <a:schemeClr val="tx1"/>
                 </a:solidFill>
               </a:rPr>
-              <a:t>多个小区的平均F1对比，五类信号条件下，单类支持向量机都优于凸包法。不过，绝对分数仍然偏低，说明方法有所改善，但判断结果还需要进一步验证。</a:t>
+              <a:t>多个小区的平均F1对比，五类信号条件下，单类支持向量机的</a:t>
+            </a:r>
+            <a:r>
+              <a:rPr lang="en-US" altLang="zh-CN" sz="1800">
+                <a:solidFill>
+                  <a:schemeClr val="tx1"/>
+                </a:solidFill>
+              </a:rPr>
+              <a:t>F1</a:t>
+            </a:r>
+            <a:r>
+              <a:rPr lang="zh-CN" altLang="en-US" sz="1800">
+                <a:solidFill>
+                  <a:schemeClr val="tx1"/>
+                </a:solidFill>
+              </a:rPr>
+              <a:t>结果都优于凸包法。不过，绝对分数仍然偏低，说明方法有所改善，但判断结果还需要进一步验证。</a:t>
+            </a:r>
+            <a:r>
+              <a:rPr lang="zh-CN" altLang="en-US" sz="1800">
+                <a:solidFill>
+                  <a:schemeClr val="tx1"/>
+                </a:solidFill>
+                <a:highlight>
+                  <a:srgbClr val="FFFF00"/>
+                </a:highlight>
+              </a:rPr>
+              <a:t>（掌握</a:t>
+            </a:r>
+            <a:r>
+              <a:rPr lang="en-US" altLang="zh-CN" sz="1800">
+                <a:solidFill>
+                  <a:schemeClr val="tx1"/>
+                </a:solidFill>
+                <a:highlight>
+                  <a:srgbClr val="FFFF00"/>
+                </a:highlight>
+              </a:rPr>
+              <a:t>F1</a:t>
+            </a:r>
+            <a:r>
+              <a:rPr lang="zh-CN" altLang="en-US" sz="1800">
+                <a:solidFill>
+                  <a:schemeClr val="tx1"/>
+                </a:solidFill>
+                <a:highlight>
+                  <a:srgbClr val="FFFF00"/>
+                </a:highlight>
+              </a:rPr>
+              <a:t>是什么，怎么算的，还有纵轴的五种情况分别是什么）</a:t>
             </a:r>
             <a:endParaRPr lang="zh-CN" altLang="en-US" sz="1800">
               <a:solidFill>
                 <a:schemeClr val="tx1"/>
               </a:solidFill>
+              <a:highlight>
+                <a:srgbClr val="FFFF00"/>
+              </a:highlight>
             </a:endParaRPr>
           </a:p>
           <a:p>
@@ -1020,7 +1076,7 @@
                   <a:schemeClr val="tx1"/>
                 </a:solidFill>
               </a:rPr>
-              <a:t>这个研究的价值是可以将数据库中的场测数据转化为分级覆盖区域，再结合弱信号和失去服务记录，筛选值得复测的位置，为路线设计提供依据。</a:t>
+              <a:t>这个研究的价值是可以将数据库中的测量数据转化为分级覆盖区域，再结合弱信号和失去服务的记录，筛选值得复测的位置，为路线设计提供依据。</a:t>
             </a:r>
             <a:endParaRPr lang="zh-CN" altLang="en-US"/>
           </a:p>
@@ -1100,7 +1156,7 @@
                   <a:schemeClr val="tx1"/>
                 </a:solidFill>
               </a:rPr>
-              <a:t>轨迹条件扩散模型TrajectoryDiff。它针对的问题是：手机测量集中在走过的道路上，没有经过的区域缺少数据，那要怎样利用这些零散测量补出完整覆盖地图。</a:t>
+              <a:t>轨迹条件扩散模型TrajectoryDiff。它针对的问题是：手机测量数据集中在已经走过的道路上，没有经过的区域缺少数据，那要怎样利用这些零散测量补出完整覆盖地图。</a:t>
             </a:r>
             <a:endParaRPr lang="zh-CN" altLang="en-US" sz="1800">
               <a:solidFill>
@@ -1115,7 +1171,7 @@
                   <a:schemeClr val="tx1"/>
                 </a:solidFill>
               </a:rPr>
-              <a:t>论文指出不仅需要输入信号测量值，还需要告诉模型采样位置在哪里、哪些地方采得密、哪些地方完全没采到，并结合建筑分布和发射机位置生成地图。生成过程中，既要求结果符合已有测量，也要加入信号传播趋势的约束，减少不合理的补全。</a:t>
+              <a:t>论文指出不仅需要输入信号测量值，还需要告诉模型采样位置在哪里、哪些地方采得密、哪些地方完全没采到，并结合建筑分布和发射机位置生成地图。生成过程中，既要求结果符合已有测量，也要加入信号传播趋势的约束，以减少不合理的补全。</a:t>
             </a:r>
             <a:endParaRPr lang="zh-CN" altLang="en-US" sz="1800">
               <a:solidFill>
@@ -1130,23 +1186,7 @@
                   <a:schemeClr val="tx1"/>
                 </a:solidFill>
               </a:rPr>
-              <a:t>右侧比较的是不同方案未采样区域的重建误差。基线误差最低的是IDW为8.09，而论文方案TrajectoryDiff单次生成为7.33；使用相同测量生成10张地图后取平均，进一步降到5.68，相对IDW降低近</a:t>
-            </a:r>
-            <a:r>
-              <a:rPr lang="en-US" altLang="zh-CN" sz="1800">
-                <a:solidFill>
-                  <a:schemeClr val="tx1"/>
-                </a:solidFill>
-              </a:rPr>
-              <a:t>30%</a:t>
-            </a:r>
-            <a:r>
-              <a:rPr lang="zh-CN" altLang="en-US" sz="1800">
-                <a:solidFill>
-                  <a:schemeClr val="tx1"/>
-                </a:solidFill>
-              </a:rPr>
-              <a:t>。多次生成之间的差异还能反映哪里估计不稳定。</a:t>
+              <a:t>右侧比较的是不同方案对于未采样区域的重建误差。基线误差最低的是IDW为8.09，而论文方案TrajectoryDiff单次生成的误差为7.33；使用相同测量生成10张地图后取平均，能够将误差进一步降到5.68。多次生成之间的差异还能反映哪里估计不稳定。</a:t>
             </a:r>
             <a:endParaRPr lang="zh-CN" altLang="en-US"/>
           </a:p>
@@ -1210,7 +1250,7 @@
                 </a:solidFill>
                 <a:cs typeface="Arial" panose="020B0604020202020204" pitchFamily="34" charset="0"/>
               </a:rPr>
-              <a:t>最后这篇也是研究怎样利用少量外场测量，补全其他位置的信号覆盖信息。城市中不同位置和高度的信号差异很大，如果逐点测量，采集成本会比较高。</a:t>
+              <a:t>最后这篇也是研究怎样利用少量实测测量，补全其他位置的信号覆盖信息。城市中不同位置和高度的信号差异很大，如果逐点测量，采集成本会比较高。</a:t>
             </a:r>
             <a:endParaRPr lang="zh-CN" altLang="en-US" sz="1800">
               <a:solidFill>
@@ -1261,7 +1301,7 @@
                 </a:solidFill>
                 <a:cs typeface="Arial" panose="020B0604020202020204" pitchFamily="34" charset="0"/>
               </a:rPr>
-              <a:t>对我们而言，可以借鉴它利用已有测量建图、指导后续补测的思路。不过，这套方案需要建筑和仿真信息，而且预测不确定的位置未必就是弱覆盖位置，还需要结合信号强度门限筛选，再通过场测确认。</a:t>
+              <a:t>这个研究可以借鉴它利用已有测量建图、指导后续补测的思路。不过，这套方案需要建筑和仿真信息，而且预测不确定的位置未必就是弱覆盖位置，还需要结合信号强度门限筛选，再通过实际测量进行确认。</a:t>
             </a:r>
             <a:endParaRPr lang="zh-CN" altLang="en-US">
               <a:cs typeface="Arial" panose="020B0604020202020204" pitchFamily="34" charset="0"/>
@@ -1890,7 +1930,7 @@
               <a:uLnTx/>
               <a:uFillTx/>
               <a:latin typeface="Century Gothic" panose="020B0502020202020204"/>
-              <a:ea typeface="微软雅黑" charset="-122"/>
+              <a:ea typeface="微软雅黑" panose="020B0503020204020204" charset="-122"/>
               <a:cs typeface="+mn-cs"/>
             </a:endParaRPr>
           </a:p>
@@ -2099,7 +2139,7 @@
               <a:uLnTx/>
               <a:uFillTx/>
               <a:latin typeface="Century Gothic" panose="020B0502020202020204"/>
-              <a:ea typeface="微软雅黑" charset="-122"/>
+              <a:ea typeface="微软雅黑" panose="020B0503020204020204" charset="-122"/>
               <a:cs typeface="+mn-cs"/>
             </a:endParaRPr>
           </a:p>
@@ -2162,7 +2202,7 @@
               <a:uLnTx/>
               <a:uFillTx/>
               <a:latin typeface="Century Gothic" panose="020B0502020202020204"/>
-              <a:ea typeface="微软雅黑" charset="-122"/>
+              <a:ea typeface="微软雅黑" panose="020B0503020204020204" charset="-122"/>
               <a:cs typeface="+mn-cs"/>
             </a:endParaRPr>
           </a:p>
@@ -2225,7 +2265,7 @@
               <a:uLnTx/>
               <a:uFillTx/>
               <a:latin typeface="Century Gothic" panose="020B0502020202020204"/>
-              <a:ea typeface="微软雅黑" charset="-122"/>
+              <a:ea typeface="微软雅黑" panose="020B0503020204020204" charset="-122"/>
               <a:cs typeface="+mn-cs"/>
             </a:endParaRPr>
           </a:p>
@@ -2288,7 +2328,7 @@
               <a:uLnTx/>
               <a:uFillTx/>
               <a:latin typeface="Century Gothic" panose="020B0502020202020204"/>
-              <a:ea typeface="微软雅黑" charset="-122"/>
+              <a:ea typeface="微软雅黑" panose="020B0503020204020204" charset="-122"/>
               <a:cs typeface="+mn-cs"/>
             </a:endParaRPr>
           </a:p>
@@ -2471,7 +2511,7 @@
                   <a:srgbClr val="005BAC"/>
                 </a:solidFill>
                 <a:latin typeface="Century Gothic" panose="020B0502020202020204"/>
-                <a:ea typeface="微软雅黑" charset="-122"/>
+                <a:ea typeface="微软雅黑" panose="020B0503020204020204" charset="-122"/>
                 <a:cs typeface="+mn-cs"/>
               </a:rPr>
               <a:t>明德厚学 求是创新</a:t>
@@ -2481,7 +2521,7 @@
                 <a:srgbClr val="005BAC"/>
               </a:solidFill>
               <a:latin typeface="Century Gothic" panose="020B0502020202020204"/>
-              <a:ea typeface="微软雅黑" charset="-122"/>
+              <a:ea typeface="微软雅黑" panose="020B0503020204020204" charset="-122"/>
               <a:cs typeface="+mn-cs"/>
             </a:endParaRPr>
           </a:p>
@@ -5003,7 +5043,7 @@
                 <a:uLnTx/>
                 <a:uFillTx/>
                 <a:latin typeface="Century Gothic" panose="020B0502020202020204"/>
-                <a:ea typeface="微软雅黑" charset="-122"/>
+                <a:ea typeface="微软雅黑" panose="020B0503020204020204" charset="-122"/>
               </a:endParaRPr>
             </a:p>
           </p:txBody>
@@ -5114,7 +5154,7 @@
                 <a:uLnTx/>
                 <a:uFillTx/>
                 <a:latin typeface="Century Gothic" panose="020B0502020202020204"/>
-                <a:ea typeface="微软雅黑" charset="-122"/>
+                <a:ea typeface="微软雅黑" panose="020B0503020204020204" charset="-122"/>
               </a:endParaRPr>
             </a:p>
           </p:txBody>
@@ -5174,7 +5214,7 @@
                 <a:uLnTx/>
                 <a:uFillTx/>
                 <a:latin typeface="Century Gothic" panose="020B0502020202020204"/>
-                <a:ea typeface="微软雅黑" charset="-122"/>
+                <a:ea typeface="微软雅黑" panose="020B0503020204020204" charset="-122"/>
               </a:endParaRPr>
             </a:p>
           </p:txBody>
@@ -5285,7 +5325,7 @@
                 <a:uLnTx/>
                 <a:uFillTx/>
                 <a:latin typeface="Century Gothic" panose="020B0502020202020204"/>
-                <a:ea typeface="微软雅黑" charset="-122"/>
+                <a:ea typeface="微软雅黑" panose="020B0503020204020204" charset="-122"/>
               </a:endParaRPr>
             </a:p>
           </p:txBody>
@@ -5396,7 +5436,7 @@
                 <a:uLnTx/>
                 <a:uFillTx/>
                 <a:latin typeface="Century Gothic" panose="020B0502020202020204"/>
-                <a:ea typeface="微软雅黑" charset="-122"/>
+                <a:ea typeface="微软雅黑" panose="020B0503020204020204" charset="-122"/>
               </a:endParaRPr>
             </a:p>
           </p:txBody>
@@ -5456,7 +5496,7 @@
                 <a:uLnTx/>
                 <a:uFillTx/>
                 <a:latin typeface="Century Gothic" panose="020B0502020202020204"/>
-                <a:ea typeface="微软雅黑" charset="-122"/>
+                <a:ea typeface="微软雅黑" panose="020B0503020204020204" charset="-122"/>
               </a:endParaRPr>
             </a:p>
           </p:txBody>
@@ -5685,7 +5725,7 @@
                 <a:uLnTx/>
                 <a:uFillTx/>
                 <a:latin typeface="Century Gothic" panose="020B0502020202020204"/>
-                <a:ea typeface="微软雅黑" charset="-122"/>
+                <a:ea typeface="微软雅黑" panose="020B0503020204020204" charset="-122"/>
               </a:endParaRPr>
             </a:p>
           </p:txBody>
@@ -5796,7 +5836,7 @@
                 <a:uLnTx/>
                 <a:uFillTx/>
                 <a:latin typeface="Century Gothic" panose="020B0502020202020204"/>
-                <a:ea typeface="微软雅黑" charset="-122"/>
+                <a:ea typeface="微软雅黑" panose="020B0503020204020204" charset="-122"/>
               </a:endParaRPr>
             </a:p>
           </p:txBody>
@@ -5886,7 +5926,7 @@
               <a:uLnTx/>
               <a:uFillTx/>
               <a:latin typeface="Century Gothic" panose="020B0502020202020204"/>
-              <a:ea typeface="微软雅黑" charset="-122"/>
+              <a:ea typeface="微软雅黑" panose="020B0503020204020204" charset="-122"/>
               <a:cs typeface="+mn-cs"/>
             </a:endParaRPr>
           </a:p>
@@ -5949,7 +5989,7 @@
               <a:uLnTx/>
               <a:uFillTx/>
               <a:latin typeface="Century Gothic" panose="020B0502020202020204"/>
-              <a:ea typeface="微软雅黑" charset="-122"/>
+              <a:ea typeface="微软雅黑" panose="020B0503020204020204" charset="-122"/>
               <a:cs typeface="+mn-cs"/>
             </a:endParaRPr>
           </a:p>
@@ -6075,7 +6115,7 @@
                   <a:srgbClr val="768395"/>
                 </a:solidFill>
                 <a:latin typeface="Century Gothic" panose="020B0502020202020204"/>
-                <a:ea typeface="微软雅黑" charset="-122"/>
+                <a:ea typeface="微软雅黑" panose="020B0503020204020204" charset="-122"/>
               </a:rPr>
               <a:t>华中科技大学电子信息与通信学院</a:t>
             </a:r>
@@ -6084,7 +6124,7 @@
                 <a:srgbClr val="768395"/>
               </a:solidFill>
               <a:latin typeface="Century Gothic" panose="020B0502020202020204"/>
-              <a:ea typeface="微软雅黑" charset="-122"/>
+              <a:ea typeface="微软雅黑" panose="020B0503020204020204" charset="-122"/>
             </a:endParaRPr>
           </a:p>
         </p:txBody>
@@ -6208,7 +6248,7 @@
                   <a:srgbClr val="768395"/>
                 </a:solidFill>
                 <a:latin typeface="Century Gothic" panose="020B0502020202020204"/>
-                <a:ea typeface="微软雅黑" charset="-122"/>
+                <a:ea typeface="微软雅黑" panose="020B0503020204020204" charset="-122"/>
               </a:rPr>
               <a:t>明德厚学 求是创新</a:t>
             </a:r>
@@ -6217,7 +6257,7 @@
                 <a:srgbClr val="768395"/>
               </a:solidFill>
               <a:latin typeface="Century Gothic" panose="020B0502020202020204"/>
-              <a:ea typeface="微软雅黑" charset="-122"/>
+              <a:ea typeface="微软雅黑" panose="020B0503020204020204" charset="-122"/>
             </a:endParaRPr>
           </a:p>
         </p:txBody>
@@ -8689,23 +8729,23 @@
             </a:pPr>
             <a:r>
               <a:rPr lang="en-US" altLang="zh-CN" sz="3600" dirty="0">
-                <a:latin typeface="微软雅黑" charset="-122"/>
-                <a:ea typeface="微软雅黑" charset="-122"/>
+                <a:latin typeface="微软雅黑" panose="020B0503020204020204" charset="-122"/>
+                <a:ea typeface="微软雅黑" panose="020B0503020204020204" charset="-122"/>
                 <a:sym typeface="+mn-ea"/>
               </a:rPr>
               <a:t>AI</a:t>
             </a:r>
             <a:r>
               <a:rPr lang="zh-CN" altLang="en-US" sz="3600" dirty="0">
-                <a:latin typeface="微软雅黑" charset="-122"/>
-                <a:ea typeface="微软雅黑" charset="-122"/>
+                <a:latin typeface="微软雅黑" panose="020B0503020204020204" charset="-122"/>
+                <a:ea typeface="微软雅黑" panose="020B0503020204020204" charset="-122"/>
                 <a:sym typeface="+mn-ea"/>
               </a:rPr>
               <a:t>与通信融合研究进展调研四</a:t>
             </a:r>
             <a:endParaRPr lang="zh-CN" altLang="en-US">
-              <a:latin typeface="微软雅黑" charset="-122"/>
-              <a:ea typeface="微软雅黑" charset="-122"/>
+              <a:latin typeface="微软雅黑" panose="020B0503020204020204" charset="-122"/>
+              <a:ea typeface="微软雅黑" panose="020B0503020204020204" charset="-122"/>
               <a:sym typeface="+mn-ea"/>
             </a:endParaRPr>
           </a:p>
@@ -9023,15 +9063,15 @@
                 <a:solidFill>
                   <a:schemeClr val="tx1"/>
                 </a:solidFill>
-                <a:latin typeface="微软雅黑" charset="-122"/>
-                <a:ea typeface="微软雅黑" charset="-122"/>
+                <a:latin typeface="微软雅黑" panose="020B0503020204020204" charset="-122"/>
+                <a:ea typeface="微软雅黑" panose="020B0503020204020204" charset="-122"/>
                 <a:sym typeface="+mn-ea"/>
               </a:rPr>
               <a:t>研究方向</a:t>
             </a:r>
             <a:endParaRPr lang="zh-CN" altLang="en-US">
-              <a:latin typeface="微软雅黑" charset="-122"/>
-              <a:ea typeface="微软雅黑" charset="-122"/>
+              <a:latin typeface="微软雅黑" panose="020B0503020204020204" charset="-122"/>
+              <a:ea typeface="微软雅黑" panose="020B0503020204020204" charset="-122"/>
               <a:sym typeface="+mn-ea"/>
             </a:endParaRPr>
           </a:p>
@@ -9073,8 +9113,8 @@
                 <a:solidFill>
                   <a:schemeClr val="tx1"/>
                 </a:solidFill>
-                <a:latin typeface="微软雅黑" charset="-122"/>
-                <a:ea typeface="微软雅黑" charset="-122"/>
+                <a:latin typeface="微软雅黑" panose="020B0503020204020204" charset="-122"/>
+                <a:ea typeface="微软雅黑" panose="020B0503020204020204" charset="-122"/>
                 <a:sym typeface="+mn-ea"/>
               </a:rPr>
               <a:t>本次调研围绕</a:t>
@@ -9084,8 +9124,8 @@
                 <a:solidFill>
                   <a:schemeClr val="tx1"/>
                 </a:solidFill>
-                <a:latin typeface="微软雅黑" charset="-122"/>
-                <a:ea typeface="微软雅黑" charset="-122"/>
+                <a:latin typeface="微软雅黑" panose="020B0503020204020204" charset="-122"/>
+                <a:ea typeface="微软雅黑" panose="020B0503020204020204" charset="-122"/>
                 <a:sym typeface="+mn-ea"/>
               </a:rPr>
               <a:t>“</a:t>
@@ -9095,8 +9135,8 @@
                 <a:solidFill>
                   <a:schemeClr val="tx1"/>
                 </a:solidFill>
-                <a:latin typeface="微软雅黑" charset="-122"/>
-                <a:ea typeface="微软雅黑" charset="-122"/>
+                <a:latin typeface="微软雅黑" panose="020B0503020204020204" charset="-122"/>
+                <a:ea typeface="微软雅黑" panose="020B0503020204020204" charset="-122"/>
                 <a:sym typeface="+mn-ea"/>
               </a:rPr>
               <a:t>通信</a:t>
@@ -9106,8 +9146,8 @@
                 <a:solidFill>
                   <a:schemeClr val="tx1"/>
                 </a:solidFill>
-                <a:latin typeface="微软雅黑" charset="-122"/>
-                <a:ea typeface="微软雅黑" charset="-122"/>
+                <a:latin typeface="微软雅黑" panose="020B0503020204020204" charset="-122"/>
+                <a:ea typeface="微软雅黑" panose="020B0503020204020204" charset="-122"/>
                 <a:sym typeface="+mn-ea"/>
               </a:rPr>
               <a:t> AI </a:t>
@@ -9117,8 +9157,8 @@
                 <a:solidFill>
                   <a:schemeClr val="tx1"/>
                 </a:solidFill>
-                <a:latin typeface="微软雅黑" charset="-122"/>
-                <a:ea typeface="微软雅黑" charset="-122"/>
+                <a:latin typeface="微软雅黑" panose="020B0503020204020204" charset="-122"/>
+                <a:ea typeface="微软雅黑" panose="020B0503020204020204" charset="-122"/>
                 <a:sym typeface="+mn-ea"/>
               </a:rPr>
               <a:t>功能测试验收</a:t>
@@ -9128,8 +9168,8 @@
                 <a:solidFill>
                   <a:schemeClr val="tx1"/>
                 </a:solidFill>
-                <a:latin typeface="微软雅黑" charset="-122"/>
-                <a:ea typeface="微软雅黑" charset="-122"/>
+                <a:latin typeface="微软雅黑" panose="020B0503020204020204" charset="-122"/>
+                <a:ea typeface="微软雅黑" panose="020B0503020204020204" charset="-122"/>
                 <a:sym typeface="+mn-ea"/>
               </a:rPr>
               <a:t>”</a:t>
@@ -9139,8 +9179,8 @@
                 <a:solidFill>
                   <a:schemeClr val="tx1"/>
                 </a:solidFill>
-                <a:latin typeface="微软雅黑" charset="-122"/>
-                <a:ea typeface="微软雅黑" charset="-122"/>
+                <a:latin typeface="微软雅黑" panose="020B0503020204020204" charset="-122"/>
+                <a:ea typeface="微软雅黑" panose="020B0503020204020204" charset="-122"/>
                 <a:sym typeface="+mn-ea"/>
               </a:rPr>
               <a:t>和</a:t>
@@ -9150,8 +9190,8 @@
                 <a:solidFill>
                   <a:schemeClr val="tx1"/>
                 </a:solidFill>
-                <a:latin typeface="微软雅黑" charset="-122"/>
-                <a:ea typeface="微软雅黑" charset="-122"/>
+                <a:latin typeface="微软雅黑" panose="020B0503020204020204" charset="-122"/>
+                <a:ea typeface="微软雅黑" panose="020B0503020204020204" charset="-122"/>
                 <a:sym typeface="+mn-ea"/>
               </a:rPr>
               <a:t>“</a:t>
@@ -9161,8 +9201,8 @@
                 <a:solidFill>
                   <a:schemeClr val="tx1"/>
                 </a:solidFill>
-                <a:latin typeface="微软雅黑" charset="0"/>
-                <a:ea typeface="微软雅黑" charset="0"/>
+                <a:latin typeface="微软雅黑" panose="020B0503020204020204" charset="-122"/>
+                <a:ea typeface="微软雅黑" panose="020B0503020204020204" charset="-122"/>
                 <a:sym typeface="+mn-ea"/>
               </a:rPr>
               <a:t>Radio Map</a:t>
@@ -9172,8 +9212,8 @@
                 <a:solidFill>
                   <a:schemeClr val="tx1"/>
                 </a:solidFill>
-                <a:latin typeface="微软雅黑" charset="-122"/>
-                <a:ea typeface="微软雅黑" charset="-122"/>
+                <a:latin typeface="微软雅黑" panose="020B0503020204020204" charset="-122"/>
+                <a:ea typeface="微软雅黑" panose="020B0503020204020204" charset="-122"/>
                 <a:sym typeface="+mn-ea"/>
               </a:rPr>
               <a:t>”</a:t>
@@ -9183,8 +9223,8 @@
                 <a:solidFill>
                   <a:schemeClr val="tx1"/>
                 </a:solidFill>
-                <a:latin typeface="微软雅黑" charset="-122"/>
-                <a:ea typeface="微软雅黑" charset="-122"/>
+                <a:latin typeface="微软雅黑" panose="020B0503020204020204" charset="-122"/>
+                <a:ea typeface="微软雅黑" panose="020B0503020204020204" charset="-122"/>
                 <a:sym typeface="+mn-ea"/>
               </a:rPr>
               <a:t>两个方向展开</a:t>
@@ -9194,8 +9234,8 @@
                 <a:solidFill>
                   <a:schemeClr val="tx1"/>
                 </a:solidFill>
-                <a:latin typeface="微软雅黑" charset="-122"/>
-                <a:ea typeface="微软雅黑" charset="-122"/>
+                <a:latin typeface="微软雅黑" panose="020B0503020204020204" charset="-122"/>
+                <a:ea typeface="微软雅黑" panose="020B0503020204020204" charset="-122"/>
                 <a:sym typeface="+mn-ea"/>
               </a:rPr>
               <a:t>。</a:t>
@@ -9204,8 +9244,8 @@
               <a:solidFill>
                 <a:schemeClr val="tx1"/>
               </a:solidFill>
-              <a:latin typeface="微软雅黑" charset="-122"/>
-              <a:ea typeface="微软雅黑" charset="-122"/>
+              <a:latin typeface="微软雅黑" panose="020B0503020204020204" charset="-122"/>
+              <a:ea typeface="微软雅黑" panose="020B0503020204020204" charset="-122"/>
               <a:sym typeface="+mn-ea"/>
             </a:endParaRPr>
           </a:p>
@@ -9222,8 +9262,8 @@
                 <a:solidFill>
                   <a:schemeClr val="tx1"/>
                 </a:solidFill>
-                <a:latin typeface="微软雅黑" charset="-122"/>
-                <a:ea typeface="微软雅黑" charset="-122"/>
+                <a:latin typeface="微软雅黑" panose="020B0503020204020204" charset="-122"/>
+                <a:ea typeface="微软雅黑" panose="020B0503020204020204" charset="-122"/>
                 <a:sym typeface="+mn-ea"/>
               </a:rPr>
               <a:t>方向一：通信</a:t>
@@ -9233,8 +9273,8 @@
                 <a:solidFill>
                   <a:schemeClr val="tx1"/>
                 </a:solidFill>
-                <a:latin typeface="微软雅黑" charset="-122"/>
-                <a:ea typeface="微软雅黑" charset="-122"/>
+                <a:latin typeface="微软雅黑" panose="020B0503020204020204" charset="-122"/>
+                <a:ea typeface="微软雅黑" panose="020B0503020204020204" charset="-122"/>
                 <a:sym typeface="+mn-ea"/>
               </a:rPr>
               <a:t> AI </a:t>
@@ -9244,8 +9284,8 @@
                 <a:solidFill>
                   <a:schemeClr val="tx1"/>
                 </a:solidFill>
-                <a:latin typeface="微软雅黑" charset="-122"/>
-                <a:ea typeface="微软雅黑" charset="-122"/>
+                <a:latin typeface="微软雅黑" panose="020B0503020204020204" charset="-122"/>
+                <a:ea typeface="微软雅黑" panose="020B0503020204020204" charset="-122"/>
                 <a:sym typeface="+mn-ea"/>
               </a:rPr>
               <a:t>功能测试验收</a:t>
@@ -9254,8 +9294,8 @@
               <a:solidFill>
                 <a:schemeClr val="tx1"/>
               </a:solidFill>
-              <a:latin typeface="微软雅黑" charset="-122"/>
-              <a:ea typeface="微软雅黑" charset="-122"/>
+              <a:latin typeface="微软雅黑" panose="020B0503020204020204" charset="-122"/>
+              <a:ea typeface="微软雅黑" panose="020B0503020204020204" charset="-122"/>
               <a:sym typeface="+mn-ea"/>
             </a:endParaRPr>
           </a:p>
@@ -9272,8 +9312,8 @@
                 <a:solidFill>
                   <a:schemeClr val="tx1"/>
                 </a:solidFill>
-                <a:latin typeface="微软雅黑" charset="-122"/>
-                <a:ea typeface="微软雅黑" charset="-122"/>
+                <a:latin typeface="微软雅黑" panose="020B0503020204020204" charset="-122"/>
+                <a:ea typeface="微软雅黑" panose="020B0503020204020204" charset="-122"/>
                 <a:sym typeface="+mn-ea"/>
               </a:rPr>
               <a:t>研究背景：</a:t>
@@ -9283,8 +9323,8 @@
                 <a:solidFill>
                   <a:schemeClr val="tx1"/>
                 </a:solidFill>
-                <a:latin typeface="微软雅黑" charset="-122"/>
-                <a:ea typeface="微软雅黑" charset="-122"/>
+                <a:latin typeface="微软雅黑" panose="020B0503020204020204" charset="-122"/>
+                <a:ea typeface="微软雅黑" panose="020B0503020204020204" charset="-122"/>
                 <a:sym typeface="+mn-ea"/>
               </a:rPr>
               <a:t>终端通信功能引入</a:t>
@@ -9294,8 +9334,8 @@
                 <a:solidFill>
                   <a:schemeClr val="tx1"/>
                 </a:solidFill>
-                <a:latin typeface="微软雅黑" charset="-122"/>
-                <a:ea typeface="微软雅黑" charset="-122"/>
+                <a:latin typeface="微软雅黑" panose="020B0503020204020204" charset="-122"/>
+                <a:ea typeface="微软雅黑" panose="020B0503020204020204" charset="-122"/>
                 <a:sym typeface="+mn-ea"/>
               </a:rPr>
               <a:t> AI </a:t>
@@ -9305,8 +9345,8 @@
                 <a:solidFill>
                   <a:schemeClr val="tx1"/>
                 </a:solidFill>
-                <a:latin typeface="微软雅黑" charset="-122"/>
-                <a:ea typeface="微软雅黑" charset="-122"/>
+                <a:latin typeface="微软雅黑" panose="020B0503020204020204" charset="-122"/>
+                <a:ea typeface="微软雅黑" panose="020B0503020204020204" charset="-122"/>
                 <a:sym typeface="+mn-ea"/>
               </a:rPr>
               <a:t>后，模型可能因输入配置变化、使用环境变化或版本更新而出现性能退化，需要建立相应的验证与持续监测方法。</a:t>
@@ -9315,8 +9355,8 @@
               <a:solidFill>
                 <a:schemeClr val="tx1"/>
               </a:solidFill>
-              <a:latin typeface="微软雅黑" charset="-122"/>
-              <a:ea typeface="微软雅黑" charset="-122"/>
+              <a:latin typeface="微软雅黑" panose="020B0503020204020204" charset="-122"/>
+              <a:ea typeface="微软雅黑" panose="020B0503020204020204" charset="-122"/>
               <a:sym typeface="+mn-ea"/>
             </a:endParaRPr>
           </a:p>
@@ -9333,8 +9373,8 @@
                 <a:solidFill>
                   <a:schemeClr val="tx1"/>
                 </a:solidFill>
-                <a:latin typeface="微软雅黑" charset="-122"/>
-                <a:ea typeface="微软雅黑" charset="-122"/>
+                <a:latin typeface="微软雅黑" panose="020B0503020204020204" charset="-122"/>
+                <a:ea typeface="微软雅黑" panose="020B0503020204020204" charset="-122"/>
                 <a:sym typeface="+mn-ea"/>
               </a:rPr>
               <a:t>调研重点：</a:t>
@@ -9343,8 +9383,8 @@
               <a:solidFill>
                 <a:schemeClr val="tx1"/>
               </a:solidFill>
-              <a:latin typeface="微软雅黑" charset="-122"/>
-              <a:ea typeface="微软雅黑" charset="-122"/>
+              <a:latin typeface="微软雅黑" panose="020B0503020204020204" charset="-122"/>
+              <a:ea typeface="微软雅黑" panose="020B0503020204020204" charset="-122"/>
               <a:sym typeface="+mn-ea"/>
             </a:endParaRPr>
           </a:p>
@@ -9361,8 +9401,8 @@
                 <a:solidFill>
                   <a:schemeClr val="tx1"/>
                 </a:solidFill>
-                <a:latin typeface="微软雅黑" charset="-122"/>
-                <a:ea typeface="微软雅黑" charset="-122"/>
+                <a:latin typeface="微软雅黑" panose="020B0503020204020204" charset="-122"/>
+                <a:ea typeface="微软雅黑" panose="020B0503020204020204" charset="-122"/>
                 <a:sym typeface="+mn-ea"/>
               </a:rPr>
               <a:t>配置变化时怎样验证：</a:t>
@@ -9372,8 +9412,8 @@
                 <a:solidFill>
                   <a:schemeClr val="tx1"/>
                 </a:solidFill>
-                <a:latin typeface="微软雅黑" charset="-122"/>
-                <a:ea typeface="微软雅黑" charset="-122"/>
+                <a:latin typeface="微软雅黑" panose="020B0503020204020204" charset="-122"/>
+                <a:ea typeface="微软雅黑" panose="020B0503020204020204" charset="-122"/>
                 <a:sym typeface="+mn-ea"/>
               </a:rPr>
               <a:t>利用具有已知关系的测试配置，检查模型输出是否合理。</a:t>
@@ -9382,8 +9422,8 @@
               <a:solidFill>
                 <a:schemeClr val="tx1"/>
               </a:solidFill>
-              <a:latin typeface="微软雅黑" charset="-122"/>
-              <a:ea typeface="微软雅黑" charset="-122"/>
+              <a:latin typeface="微软雅黑" panose="020B0503020204020204" charset="-122"/>
+              <a:ea typeface="微软雅黑" panose="020B0503020204020204" charset="-122"/>
               <a:sym typeface="+mn-ea"/>
             </a:endParaRPr>
           </a:p>
@@ -9400,8 +9440,8 @@
                 <a:solidFill>
                   <a:schemeClr val="tx1"/>
                 </a:solidFill>
-                <a:latin typeface="微软雅黑" charset="-122"/>
-                <a:ea typeface="微软雅黑" charset="-122"/>
+                <a:latin typeface="微软雅黑" panose="020B0503020204020204" charset="-122"/>
+                <a:ea typeface="微软雅黑" panose="020B0503020204020204" charset="-122"/>
                 <a:sym typeface="+mn-ea"/>
               </a:rPr>
               <a:t>部署后怎样监测：</a:t>
@@ -9411,8 +9451,8 @@
                 <a:solidFill>
                   <a:schemeClr val="tx1"/>
                 </a:solidFill>
-                <a:latin typeface="微软雅黑" charset="-122"/>
-                <a:ea typeface="微软雅黑" charset="-122"/>
+                <a:latin typeface="微软雅黑" panose="020B0503020204020204" charset="-122"/>
+                <a:ea typeface="微软雅黑" panose="020B0503020204020204" charset="-122"/>
                 <a:sym typeface="+mn-ea"/>
               </a:rPr>
               <a:t>明确终端模型能力及监测条件，支持异常发现与模型管理。</a:t>
@@ -9421,8 +9461,8 @@
               <a:solidFill>
                 <a:schemeClr val="tx1"/>
               </a:solidFill>
-              <a:latin typeface="微软雅黑" charset="-122"/>
-              <a:ea typeface="微软雅黑" charset="-122"/>
+              <a:latin typeface="微软雅黑" panose="020B0503020204020204" charset="-122"/>
+              <a:ea typeface="微软雅黑" panose="020B0503020204020204" charset="-122"/>
               <a:sym typeface="+mn-ea"/>
             </a:endParaRPr>
           </a:p>
@@ -9439,8 +9479,8 @@
                 <a:solidFill>
                   <a:schemeClr val="tx1"/>
                 </a:solidFill>
-                <a:latin typeface="微软雅黑" charset="-122"/>
-                <a:ea typeface="微软雅黑" charset="-122"/>
+                <a:latin typeface="微软雅黑" panose="020B0503020204020204" charset="-122"/>
+                <a:ea typeface="微软雅黑" panose="020B0503020204020204" charset="-122"/>
                 <a:sym typeface="+mn-ea"/>
               </a:rPr>
               <a:t>模型更新后怎样验收：</a:t>
@@ -9450,8 +9490,8 @@
                 <a:solidFill>
                   <a:schemeClr val="tx1"/>
                 </a:solidFill>
-                <a:latin typeface="微软雅黑" charset="-122"/>
-                <a:ea typeface="微软雅黑" charset="-122"/>
+                <a:latin typeface="微软雅黑" panose="020B0503020204020204" charset="-122"/>
+                <a:ea typeface="微软雅黑" panose="020B0503020204020204" charset="-122"/>
                 <a:sym typeface="+mn-ea"/>
               </a:rPr>
               <a:t>评价更新对整个模型组合的功能表现和资源开销的影响。</a:t>
@@ -9460,8 +9500,8 @@
               <a:solidFill>
                 <a:schemeClr val="tx1"/>
               </a:solidFill>
-              <a:latin typeface="微软雅黑" charset="-122"/>
-              <a:ea typeface="微软雅黑" charset="-122"/>
+              <a:latin typeface="微软雅黑" panose="020B0503020204020204" charset="-122"/>
+              <a:ea typeface="微软雅黑" panose="020B0503020204020204" charset="-122"/>
               <a:sym typeface="+mn-ea"/>
             </a:endParaRPr>
           </a:p>
@@ -9478,8 +9518,8 @@
                 <a:solidFill>
                   <a:schemeClr val="tx1"/>
                 </a:solidFill>
-                <a:latin typeface="微软雅黑" charset="-122"/>
-                <a:ea typeface="微软雅黑" charset="-122"/>
+                <a:latin typeface="微软雅黑" panose="020B0503020204020204" charset="-122"/>
+                <a:ea typeface="微软雅黑" panose="020B0503020204020204" charset="-122"/>
                 <a:sym typeface="+mn-ea"/>
               </a:rPr>
               <a:t>研究目标：</a:t>
@@ -9489,8 +9529,8 @@
                 <a:solidFill>
                   <a:schemeClr val="tx1"/>
                 </a:solidFill>
-                <a:latin typeface="微软雅黑" charset="-122"/>
-                <a:ea typeface="微软雅黑" charset="-122"/>
+                <a:latin typeface="微软雅黑" panose="020B0503020204020204" charset="-122"/>
+                <a:ea typeface="微软雅黑" panose="020B0503020204020204" charset="-122"/>
                 <a:sym typeface="+mn-ea"/>
               </a:rPr>
               <a:t>明确通信</a:t>
@@ -9500,8 +9540,8 @@
                 <a:solidFill>
                   <a:schemeClr val="tx1"/>
                 </a:solidFill>
-                <a:latin typeface="微软雅黑" charset="-122"/>
-                <a:ea typeface="微软雅黑" charset="-122"/>
+                <a:latin typeface="微软雅黑" panose="020B0503020204020204" charset="-122"/>
+                <a:ea typeface="微软雅黑" panose="020B0503020204020204" charset="-122"/>
                 <a:sym typeface="+mn-ea"/>
               </a:rPr>
               <a:t> AI </a:t>
@@ -9511,8 +9551,8 @@
                 <a:solidFill>
                   <a:schemeClr val="tx1"/>
                 </a:solidFill>
-                <a:latin typeface="微软雅黑" charset="-122"/>
-                <a:ea typeface="微软雅黑" charset="-122"/>
+                <a:latin typeface="微软雅黑" panose="020B0503020204020204" charset="-122"/>
+                <a:ea typeface="微软雅黑" panose="020B0503020204020204" charset="-122"/>
                 <a:sym typeface="+mn-ea"/>
               </a:rPr>
               <a:t>的测试输入、判定依据和异常处理流程，为终端功能验收提供方法参考。</a:t>
@@ -9521,8 +9561,8 @@
               <a:solidFill>
                 <a:schemeClr val="tx1"/>
               </a:solidFill>
-              <a:latin typeface="微软雅黑" charset="-122"/>
-              <a:ea typeface="微软雅黑" charset="-122"/>
+              <a:latin typeface="微软雅黑" panose="020B0503020204020204" charset="-122"/>
+              <a:ea typeface="微软雅黑" panose="020B0503020204020204" charset="-122"/>
               <a:sym typeface="+mn-ea"/>
             </a:endParaRPr>
           </a:p>
@@ -9538,8 +9578,8 @@
               <a:solidFill>
                 <a:schemeClr val="tx1"/>
               </a:solidFill>
-              <a:latin typeface="微软雅黑" charset="-122"/>
-              <a:ea typeface="微软雅黑" charset="-122"/>
+              <a:latin typeface="微软雅黑" panose="020B0503020204020204" charset="-122"/>
+              <a:ea typeface="微软雅黑" panose="020B0503020204020204" charset="-122"/>
               <a:sym typeface="+mn-ea"/>
             </a:endParaRPr>
           </a:p>
@@ -9556,8 +9596,8 @@
                 <a:solidFill>
                   <a:schemeClr val="tx1"/>
                 </a:solidFill>
-                <a:latin typeface="微软雅黑" charset="-122"/>
-                <a:ea typeface="微软雅黑" charset="-122"/>
+                <a:latin typeface="微软雅黑" panose="020B0503020204020204" charset="-122"/>
+                <a:ea typeface="微软雅黑" panose="020B0503020204020204" charset="-122"/>
                 <a:sym typeface="+mn-ea"/>
               </a:rPr>
               <a:t>方向二：</a:t>
@@ -9567,8 +9607,8 @@
                 <a:solidFill>
                   <a:schemeClr val="tx1"/>
                 </a:solidFill>
-                <a:latin typeface="微软雅黑" charset="-122"/>
-                <a:ea typeface="微软雅黑" charset="-122"/>
+                <a:latin typeface="微软雅黑" panose="020B0503020204020204" charset="-122"/>
+                <a:ea typeface="微软雅黑" panose="020B0503020204020204" charset="-122"/>
                 <a:sym typeface="+mn-ea"/>
               </a:rPr>
               <a:t>Radio Map </a:t>
@@ -9578,18 +9618,18 @@
                 <a:solidFill>
                   <a:schemeClr val="tx1"/>
                 </a:solidFill>
-                <a:latin typeface="微软雅黑" charset="-122"/>
-                <a:ea typeface="微软雅黑" charset="-122"/>
-                <a:sym typeface="+mn-ea"/>
-              </a:rPr>
-              <a:t>辅助覆盖分析与复测选点</a:t>
+                <a:latin typeface="微软雅黑" panose="020B0503020204020204" charset="-122"/>
+                <a:ea typeface="微软雅黑" panose="020B0503020204020204" charset="-122"/>
+                <a:sym typeface="+mn-ea"/>
+              </a:rPr>
+              <a:t>辅助覆盖分析与补测选点</a:t>
             </a:r>
             <a:endParaRPr lang="zh-CN" altLang="en-US" sz="1600" b="1" dirty="0">
               <a:solidFill>
                 <a:schemeClr val="tx1"/>
               </a:solidFill>
-              <a:latin typeface="微软雅黑" charset="-122"/>
-              <a:ea typeface="微软雅黑" charset="-122"/>
+              <a:latin typeface="微软雅黑" panose="020B0503020204020204" charset="-122"/>
+              <a:ea typeface="微软雅黑" panose="020B0503020204020204" charset="-122"/>
               <a:sym typeface="+mn-ea"/>
             </a:endParaRPr>
           </a:p>
@@ -9606,8 +9646,8 @@
                 <a:solidFill>
                   <a:schemeClr val="tx1"/>
                 </a:solidFill>
-                <a:latin typeface="微软雅黑" charset="-122"/>
-                <a:ea typeface="微软雅黑" charset="-122"/>
+                <a:latin typeface="微软雅黑" panose="020B0503020204020204" charset="-122"/>
+                <a:ea typeface="微软雅黑" panose="020B0503020204020204" charset="-122"/>
                 <a:sym typeface="+mn-ea"/>
               </a:rPr>
               <a:t>研究背景：</a:t>
@@ -9617,8 +9657,8 @@
                 <a:solidFill>
                   <a:schemeClr val="tx1"/>
                 </a:solidFill>
-                <a:latin typeface="微软雅黑" charset="-122"/>
-                <a:ea typeface="微软雅黑" charset="-122"/>
+                <a:latin typeface="微软雅黑" panose="020B0503020204020204" charset="-122"/>
+                <a:ea typeface="微软雅黑" panose="020B0503020204020204" charset="-122"/>
                 <a:sym typeface="+mn-ea"/>
               </a:rPr>
               <a:t>外场测量集中在已走过的路线，未测区域的覆盖情况不明确，需要利用已有数据扩展覆盖认知，为后续寻找弱覆盖位置提供依据。</a:t>
@@ -9627,8 +9667,8 @@
               <a:solidFill>
                 <a:schemeClr val="tx1"/>
               </a:solidFill>
-              <a:latin typeface="微软雅黑" charset="-122"/>
-              <a:ea typeface="微软雅黑" charset="-122"/>
+              <a:latin typeface="微软雅黑" panose="020B0503020204020204" charset="-122"/>
+              <a:ea typeface="微软雅黑" panose="020B0503020204020204" charset="-122"/>
               <a:sym typeface="+mn-ea"/>
             </a:endParaRPr>
           </a:p>
@@ -9645,8 +9685,8 @@
                 <a:solidFill>
                   <a:schemeClr val="tx1"/>
                 </a:solidFill>
-                <a:latin typeface="微软雅黑" charset="-122"/>
-                <a:ea typeface="微软雅黑" charset="-122"/>
+                <a:latin typeface="微软雅黑" panose="020B0503020204020204" charset="-122"/>
+                <a:ea typeface="微软雅黑" panose="020B0503020204020204" charset="-122"/>
                 <a:sym typeface="+mn-ea"/>
               </a:rPr>
               <a:t>调研重点：</a:t>
@@ -9655,8 +9695,8 @@
               <a:solidFill>
                 <a:schemeClr val="tx1"/>
               </a:solidFill>
-              <a:latin typeface="微软雅黑" charset="-122"/>
-              <a:ea typeface="微软雅黑" charset="-122"/>
+              <a:latin typeface="微软雅黑" panose="020B0503020204020204" charset="-122"/>
+              <a:ea typeface="微软雅黑" panose="020B0503020204020204" charset="-122"/>
               <a:sym typeface="+mn-ea"/>
             </a:endParaRPr>
           </a:p>
@@ -9673,8 +9713,8 @@
                 <a:solidFill>
                   <a:schemeClr val="tx1"/>
                 </a:solidFill>
-                <a:latin typeface="微软雅黑" charset="-122"/>
-                <a:ea typeface="微软雅黑" charset="-122"/>
+                <a:latin typeface="微软雅黑" panose="020B0503020204020204" charset="-122"/>
+                <a:ea typeface="微软雅黑" panose="020B0503020204020204" charset="-122"/>
                 <a:sym typeface="+mn-ea"/>
               </a:rPr>
               <a:t>众包测量识别薄弱区域：</a:t>
@@ -9684,8 +9724,8 @@
                 <a:solidFill>
                   <a:schemeClr val="tx1"/>
                 </a:solidFill>
-                <a:latin typeface="微软雅黑" charset="-122"/>
-                <a:ea typeface="微软雅黑" charset="-122"/>
+                <a:latin typeface="微软雅黑" panose="020B0503020204020204" charset="-122"/>
+                <a:ea typeface="微软雅黑" panose="020B0503020204020204" charset="-122"/>
                 <a:sym typeface="+mn-ea"/>
               </a:rPr>
               <a:t>按照小区和信号等级学习覆盖边界，结合弱信号与失去服务记录筛选待复测区域。</a:t>
@@ -9694,8 +9734,8 @@
               <a:solidFill>
                 <a:schemeClr val="tx1"/>
               </a:solidFill>
-              <a:latin typeface="微软雅黑" charset="-122"/>
-              <a:ea typeface="微软雅黑" charset="-122"/>
+              <a:latin typeface="微软雅黑" panose="020B0503020204020204" charset="-122"/>
+              <a:ea typeface="微软雅黑" panose="020B0503020204020204" charset="-122"/>
               <a:sym typeface="+mn-ea"/>
             </a:endParaRPr>
           </a:p>
@@ -9712,8 +9752,8 @@
                 <a:solidFill>
                   <a:schemeClr val="tx1"/>
                 </a:solidFill>
-                <a:latin typeface="微软雅黑" charset="-122"/>
-                <a:ea typeface="微软雅黑" charset="-122"/>
+                <a:latin typeface="微软雅黑" panose="020B0503020204020204" charset="-122"/>
+                <a:ea typeface="微软雅黑" panose="020B0503020204020204" charset="-122"/>
                 <a:sym typeface="+mn-ea"/>
               </a:rPr>
               <a:t>轨迹测量补全未测覆盖：</a:t>
@@ -9723,8 +9763,8 @@
                 <a:solidFill>
                   <a:schemeClr val="tx1"/>
                 </a:solidFill>
-                <a:latin typeface="微软雅黑" charset="-122"/>
-                <a:ea typeface="微软雅黑" charset="-122"/>
+                <a:latin typeface="微软雅黑" panose="020B0503020204020204" charset="-122"/>
+                <a:ea typeface="微软雅黑" panose="020B0503020204020204" charset="-122"/>
                 <a:sym typeface="+mn-ea"/>
               </a:rPr>
               <a:t>利用沿行走路线采集的稀疏测量，估计周边未测位置的信号分布。</a:t>
@@ -9733,8 +9773,8 @@
               <a:solidFill>
                 <a:schemeClr val="tx1"/>
               </a:solidFill>
-              <a:latin typeface="微软雅黑" charset="-122"/>
-              <a:ea typeface="微软雅黑" charset="-122"/>
+              <a:latin typeface="微软雅黑" panose="020B0503020204020204" charset="-122"/>
+              <a:ea typeface="微软雅黑" panose="020B0503020204020204" charset="-122"/>
               <a:sym typeface="+mn-ea"/>
             </a:endParaRPr>
           </a:p>
@@ -9751,8 +9791,8 @@
                 <a:solidFill>
                   <a:schemeClr val="tx1"/>
                 </a:solidFill>
-                <a:latin typeface="微软雅黑" charset="-122"/>
-                <a:ea typeface="微软雅黑" charset="-122"/>
+                <a:latin typeface="微软雅黑" panose="020B0503020204020204" charset="-122"/>
+                <a:ea typeface="微软雅黑" panose="020B0503020204020204" charset="-122"/>
                 <a:sym typeface="+mn-ea"/>
               </a:rPr>
               <a:t>仿真辅助建图与测量选点：</a:t>
@@ -9762,8 +9802,8 @@
                 <a:solidFill>
                   <a:schemeClr val="tx1"/>
                 </a:solidFill>
-                <a:latin typeface="微软雅黑" charset="-122"/>
-                <a:ea typeface="微软雅黑" charset="-122"/>
+                <a:latin typeface="微软雅黑" panose="020B0503020204020204" charset="-122"/>
+                <a:ea typeface="微软雅黑" panose="020B0503020204020204" charset="-122"/>
                 <a:sym typeface="+mn-ea"/>
               </a:rPr>
               <a:t>结合环境仿真和少量实测修正覆盖地图，通过代表性或高不确定性选点提高采样效率。</a:t>
@@ -9772,8 +9812,8 @@
               <a:solidFill>
                 <a:schemeClr val="tx1"/>
               </a:solidFill>
-              <a:latin typeface="微软雅黑" charset="-122"/>
-              <a:ea typeface="微软雅黑" charset="-122"/>
+              <a:latin typeface="微软雅黑" panose="020B0503020204020204" charset="-122"/>
+              <a:ea typeface="微软雅黑" panose="020B0503020204020204" charset="-122"/>
               <a:sym typeface="+mn-ea"/>
             </a:endParaRPr>
           </a:p>
@@ -9789,8 +9829,8 @@
                 <a:solidFill>
                   <a:schemeClr val="tx1"/>
                 </a:solidFill>
-                <a:latin typeface="微软雅黑" charset="-122"/>
-                <a:ea typeface="微软雅黑" charset="-122"/>
+                <a:latin typeface="微软雅黑" panose="020B0503020204020204" charset="-122"/>
+                <a:ea typeface="微软雅黑" panose="020B0503020204020204" charset="-122"/>
                 <a:sym typeface="+mn-ea"/>
               </a:rPr>
               <a:t>研究目标：</a:t>
@@ -9800,8 +9840,8 @@
                 <a:solidFill>
                   <a:schemeClr val="tx1"/>
                 </a:solidFill>
-                <a:latin typeface="微软雅黑" charset="-122"/>
-                <a:ea typeface="微软雅黑" charset="-122"/>
+                <a:latin typeface="微软雅黑" panose="020B0503020204020204" charset="-122"/>
+                <a:ea typeface="微软雅黑" panose="020B0503020204020204" charset="-122"/>
                 <a:sym typeface="+mn-ea"/>
               </a:rPr>
               <a:t>将零散测量转化为覆盖地图，辅助筛选疑似薄弱区域和待补测位置，为场测路线设计提供依据。</a:t>
@@ -9810,8 +9850,8 @@
               <a:solidFill>
                 <a:schemeClr val="tx1"/>
               </a:solidFill>
-              <a:latin typeface="微软雅黑" charset="-122"/>
-              <a:ea typeface="微软雅黑" charset="-122"/>
+              <a:latin typeface="微软雅黑" panose="020B0503020204020204" charset="-122"/>
+              <a:ea typeface="微软雅黑" panose="020B0503020204020204" charset="-122"/>
               <a:sym typeface="+mn-ea"/>
             </a:endParaRPr>
           </a:p>
@@ -9827,8 +9867,8 @@
                 <a:solidFill>
                   <a:schemeClr val="tx1"/>
                 </a:solidFill>
-                <a:latin typeface="微软雅黑" charset="-122"/>
-                <a:ea typeface="微软雅黑" charset="-122"/>
+                <a:latin typeface="微软雅黑" panose="020B0503020204020204" charset="-122"/>
+                <a:ea typeface="微软雅黑" panose="020B0503020204020204" charset="-122"/>
                 <a:sym typeface="+mn-ea"/>
               </a:rPr>
               <a:t>本次关注：方向一研究</a:t>
@@ -9838,8 +9878,8 @@
                 <a:solidFill>
                   <a:schemeClr val="tx1"/>
                 </a:solidFill>
-                <a:latin typeface="微软雅黑" charset="-122"/>
-                <a:ea typeface="微软雅黑" charset="-122"/>
+                <a:latin typeface="微软雅黑" panose="020B0503020204020204" charset="-122"/>
+                <a:ea typeface="微软雅黑" panose="020B0503020204020204" charset="-122"/>
                 <a:sym typeface="+mn-ea"/>
               </a:rPr>
               <a:t>模型怎样验证和管理</a:t>
@@ -9849,8 +9889,8 @@
                 <a:solidFill>
                   <a:schemeClr val="tx1"/>
                 </a:solidFill>
-                <a:latin typeface="微软雅黑" charset="-122"/>
-                <a:ea typeface="微软雅黑" charset="-122"/>
+                <a:latin typeface="微软雅黑" panose="020B0503020204020204" charset="-122"/>
+                <a:ea typeface="微软雅黑" panose="020B0503020204020204" charset="-122"/>
                 <a:sym typeface="+mn-ea"/>
               </a:rPr>
               <a:t>，方向二研究</a:t>
@@ -9860,8 +9900,8 @@
                 <a:solidFill>
                   <a:schemeClr val="tx1"/>
                 </a:solidFill>
-                <a:latin typeface="微软雅黑" charset="-122"/>
-                <a:ea typeface="微软雅黑" charset="-122"/>
+                <a:latin typeface="微软雅黑" panose="020B0503020204020204" charset="-122"/>
+                <a:ea typeface="微软雅黑" panose="020B0503020204020204" charset="-122"/>
                 <a:sym typeface="+mn-ea"/>
               </a:rPr>
               <a:t>测量如何形成覆盖认知，并指导后续采集</a:t>
@@ -9871,8 +9911,8 @@
                 <a:solidFill>
                   <a:schemeClr val="tx1"/>
                 </a:solidFill>
-                <a:latin typeface="微软雅黑" charset="-122"/>
-                <a:ea typeface="微软雅黑" charset="-122"/>
+                <a:latin typeface="微软雅黑" panose="020B0503020204020204" charset="-122"/>
+                <a:ea typeface="微软雅黑" panose="020B0503020204020204" charset="-122"/>
                 <a:sym typeface="+mn-ea"/>
               </a:rPr>
               <a:t>。</a:t>
@@ -9881,8 +9921,8 @@
               <a:solidFill>
                 <a:schemeClr val="tx1"/>
               </a:solidFill>
-              <a:latin typeface="微软雅黑" charset="-122"/>
-              <a:ea typeface="微软雅黑" charset="-122"/>
+              <a:latin typeface="微软雅黑" panose="020B0503020204020204" charset="-122"/>
+              <a:ea typeface="微软雅黑" panose="020B0503020204020204" charset="-122"/>
               <a:sym typeface="+mn-ea"/>
             </a:endParaRPr>
           </a:p>
@@ -9935,31 +9975,31 @@
           <a:p>
             <a:r>
               <a:rPr lang="zh-CN" altLang="en-US" sz="2800" b="1" dirty="0">
-                <a:latin typeface="微软雅黑" charset="-122"/>
-                <a:ea typeface="微软雅黑" charset="-122"/>
+                <a:latin typeface="微软雅黑" panose="020B0503020204020204" charset="-122"/>
+                <a:ea typeface="微软雅黑" panose="020B0503020204020204" charset="-122"/>
                 <a:sym typeface="+mn-ea"/>
               </a:rPr>
               <a:t>方向一：通信</a:t>
             </a:r>
             <a:r>
               <a:rPr lang="en-US" altLang="zh-CN" sz="2800" b="1" dirty="0">
-                <a:latin typeface="微软雅黑" charset="-122"/>
-                <a:ea typeface="微软雅黑" charset="-122"/>
+                <a:latin typeface="微软雅黑" panose="020B0503020204020204" charset="-122"/>
+                <a:ea typeface="微软雅黑" panose="020B0503020204020204" charset="-122"/>
                 <a:sym typeface="+mn-ea"/>
               </a:rPr>
               <a:t> AI </a:t>
             </a:r>
             <a:r>
               <a:rPr lang="zh-CN" altLang="en-US" sz="2800" b="1" dirty="0">
-                <a:latin typeface="微软雅黑" charset="-122"/>
-                <a:ea typeface="微软雅黑" charset="-122"/>
+                <a:latin typeface="微软雅黑" panose="020B0503020204020204" charset="-122"/>
+                <a:ea typeface="微软雅黑" panose="020B0503020204020204" charset="-122"/>
                 <a:sym typeface="+mn-ea"/>
               </a:rPr>
               <a:t>功能测试验收</a:t>
             </a:r>
             <a:endParaRPr lang="zh-CN" altLang="en-US" sz="2800" b="1" dirty="0">
-              <a:latin typeface="微软雅黑" charset="-122"/>
-              <a:ea typeface="微软雅黑" charset="-122"/>
+              <a:latin typeface="微软雅黑" panose="020B0503020204020204" charset="-122"/>
+              <a:ea typeface="微软雅黑" panose="020B0503020204020204" charset="-122"/>
               <a:sym typeface="+mn-ea"/>
             </a:endParaRPr>
           </a:p>
@@ -10001,8 +10041,8 @@
                 <a:solidFill>
                   <a:schemeClr val="tx1"/>
                 </a:solidFill>
-                <a:latin typeface="微软雅黑" charset="-122"/>
-                <a:ea typeface="微软雅黑" charset="-122"/>
+                <a:latin typeface="微软雅黑" panose="020B0503020204020204" charset="-122"/>
+                <a:ea typeface="微软雅黑" panose="020B0503020204020204" charset="-122"/>
                 <a:sym typeface="+mn-ea"/>
               </a:rPr>
               <a:t>1. </a:t>
@@ -10012,8 +10052,8 @@
                 <a:solidFill>
                   <a:schemeClr val="tx1"/>
                 </a:solidFill>
-                <a:latin typeface="微软雅黑" charset="-122"/>
-                <a:ea typeface="微软雅黑" charset="-122"/>
+                <a:latin typeface="微软雅黑" panose="020B0503020204020204" charset="-122"/>
+                <a:ea typeface="微软雅黑" panose="020B0503020204020204" charset="-122"/>
                 <a:sym typeface="+mn-ea"/>
               </a:rPr>
               <a:t>诺基亚</a:t>
@@ -10023,8 +10063,8 @@
                 <a:solidFill>
                   <a:schemeClr val="tx1"/>
                 </a:solidFill>
-                <a:latin typeface="微软雅黑" charset="-122"/>
-                <a:ea typeface="微软雅黑" charset="-122"/>
+                <a:latin typeface="微软雅黑" panose="020B0503020204020204" charset="-122"/>
+                <a:ea typeface="微软雅黑" panose="020B0503020204020204" charset="-122"/>
                 <a:sym typeface="+mn-ea"/>
               </a:rPr>
               <a:t>——</a:t>
@@ -10034,8 +10074,8 @@
                 <a:solidFill>
                   <a:schemeClr val="tx1"/>
                 </a:solidFill>
-                <a:latin typeface="微软雅黑" charset="-122"/>
-                <a:ea typeface="微软雅黑" charset="-122"/>
+                <a:latin typeface="微软雅黑" panose="020B0503020204020204" charset="-122"/>
+                <a:ea typeface="微软雅黑" panose="020B0503020204020204" charset="-122"/>
                 <a:sym typeface="+mn-ea"/>
               </a:rPr>
               <a:t>基于关联配置的终端通信</a:t>
@@ -10045,8 +10085,8 @@
                 <a:solidFill>
                   <a:schemeClr val="tx1"/>
                 </a:solidFill>
-                <a:latin typeface="微软雅黑" charset="-122"/>
-                <a:ea typeface="微软雅黑" charset="-122"/>
+                <a:latin typeface="微软雅黑" panose="020B0503020204020204" charset="-122"/>
+                <a:ea typeface="微软雅黑" panose="020B0503020204020204" charset="-122"/>
                 <a:sym typeface="+mn-ea"/>
               </a:rPr>
               <a:t> AI </a:t>
@@ -10056,8 +10096,8 @@
                 <a:solidFill>
                   <a:schemeClr val="tx1"/>
                 </a:solidFill>
-                <a:latin typeface="微软雅黑" charset="-122"/>
-                <a:ea typeface="微软雅黑" charset="-122"/>
+                <a:latin typeface="微软雅黑" panose="020B0503020204020204" charset="-122"/>
+                <a:ea typeface="微软雅黑" panose="020B0503020204020204" charset="-122"/>
                 <a:sym typeface="+mn-ea"/>
               </a:rPr>
               <a:t>模型鲁棒性验证</a:t>
@@ -10067,8 +10107,8 @@
                 <a:solidFill>
                   <a:srgbClr val="000000"/>
                 </a:solidFill>
-                <a:latin typeface="微软雅黑" charset="-122"/>
-                <a:ea typeface="微软雅黑" charset="-122"/>
+                <a:latin typeface="微软雅黑" panose="020B0503020204020204" charset="-122"/>
+                <a:ea typeface="微软雅黑" panose="020B0503020204020204" charset="-122"/>
                 <a:cs typeface="+mn-ea"/>
                 <a:sym typeface="+mn-ea"/>
               </a:rPr>
@@ -10078,8 +10118,8 @@
               <a:solidFill>
                 <a:schemeClr val="tx1"/>
               </a:solidFill>
-              <a:latin typeface="微软雅黑" charset="-122"/>
-              <a:ea typeface="微软雅黑" charset="-122"/>
+              <a:latin typeface="微软雅黑" panose="020B0503020204020204" charset="-122"/>
+              <a:ea typeface="微软雅黑" panose="020B0503020204020204" charset="-122"/>
               <a:sym typeface="+mn-ea"/>
             </a:endParaRPr>
           </a:p>
@@ -10096,8 +10136,8 @@
                 <a:solidFill>
                   <a:srgbClr val="FF0000"/>
                 </a:solidFill>
-                <a:latin typeface="微软雅黑" charset="-122"/>
-                <a:ea typeface="微软雅黑" charset="-122"/>
+                <a:latin typeface="微软雅黑" panose="020B0503020204020204" charset="-122"/>
+                <a:ea typeface="微软雅黑" panose="020B0503020204020204" charset="-122"/>
                 <a:sym typeface="+mn-ea"/>
               </a:rPr>
               <a:t>研究问题与价值：</a:t>
@@ -10107,8 +10147,8 @@
                 <a:solidFill>
                   <a:srgbClr val="000000"/>
                 </a:solidFill>
-                <a:latin typeface="微软雅黑" charset="-122"/>
-                <a:ea typeface="微软雅黑" charset="-122"/>
+                <a:latin typeface="微软雅黑" panose="020B0503020204020204" charset="-122"/>
+                <a:ea typeface="微软雅黑" panose="020B0503020204020204" charset="-122"/>
                 <a:sym typeface="+mn-ea"/>
               </a:rPr>
               <a:t>波束预测、终端定位等通信</a:t>
@@ -10118,8 +10158,8 @@
                 <a:solidFill>
                   <a:srgbClr val="000000"/>
                 </a:solidFill>
-                <a:latin typeface="微软雅黑" charset="-122"/>
-                <a:ea typeface="微软雅黑" charset="-122"/>
+                <a:latin typeface="微软雅黑" panose="020B0503020204020204" charset="-122"/>
+                <a:ea typeface="微软雅黑" panose="020B0503020204020204" charset="-122"/>
                 <a:sym typeface="+mn-ea"/>
               </a:rPr>
               <a:t> AI </a:t>
@@ -10129,8 +10169,8 @@
                 <a:solidFill>
                   <a:srgbClr val="000000"/>
                 </a:solidFill>
-                <a:latin typeface="微软雅黑" charset="-122"/>
-                <a:ea typeface="微软雅黑" charset="-122"/>
+                <a:latin typeface="微软雅黑" panose="020B0503020204020204" charset="-122"/>
+                <a:ea typeface="微软雅黑" panose="020B0503020204020204" charset="-122"/>
                 <a:sym typeface="+mn-ea"/>
               </a:rPr>
               <a:t>功能的精确真值，有时难以由测试设备直接确定。例如，预测</a:t>
@@ -10140,8 +10180,8 @@
                 <a:solidFill>
                   <a:srgbClr val="000000"/>
                 </a:solidFill>
-                <a:latin typeface="微软雅黑" charset="-122"/>
-                <a:ea typeface="微软雅黑" charset="-122"/>
+                <a:latin typeface="微软雅黑" panose="020B0503020204020204" charset="-122"/>
+                <a:ea typeface="微软雅黑" panose="020B0503020204020204" charset="-122"/>
                 <a:sym typeface="+mn-ea"/>
               </a:rPr>
               <a:t> RSRP </a:t>
@@ -10151,8 +10191,8 @@
                 <a:solidFill>
                   <a:srgbClr val="000000"/>
                 </a:solidFill>
-                <a:latin typeface="微软雅黑" charset="-122"/>
-                <a:ea typeface="微软雅黑" charset="-122"/>
+                <a:latin typeface="微软雅黑" panose="020B0503020204020204" charset="-122"/>
+                <a:ea typeface="微软雅黑" panose="020B0503020204020204" charset="-122"/>
                 <a:sym typeface="+mn-ea"/>
               </a:rPr>
               <a:t>受到终端自身接收增益影响，测试设备难以仅凭发射参数给出准确答案。该专利利用配置之间的已知关系，检查模型输出变化是否合理</a:t>
@@ -10162,8 +10202,8 @@
                 <a:solidFill>
                   <a:srgbClr val="000000"/>
                 </a:solidFill>
-                <a:latin typeface="微软雅黑" charset="-122"/>
-                <a:ea typeface="微软雅黑" charset="-122"/>
+                <a:latin typeface="微软雅黑" panose="020B0503020204020204" charset="-122"/>
+                <a:ea typeface="微软雅黑" panose="020B0503020204020204" charset="-122"/>
                 <a:sym typeface="+mn-ea"/>
               </a:rPr>
               <a:t>，为真值不足时的模型验证提供补充依据。</a:t>
@@ -10172,8 +10212,8 @@
               <a:solidFill>
                 <a:srgbClr val="000000"/>
               </a:solidFill>
-              <a:latin typeface="微软雅黑" charset="-122"/>
-              <a:ea typeface="微软雅黑" charset="-122"/>
+              <a:latin typeface="微软雅黑" panose="020B0503020204020204" charset="-122"/>
+              <a:ea typeface="微软雅黑" panose="020B0503020204020204" charset="-122"/>
               <a:sym typeface="+mn-ea"/>
             </a:endParaRPr>
           </a:p>
@@ -10190,8 +10230,8 @@
                 <a:solidFill>
                   <a:srgbClr val="FF0000"/>
                 </a:solidFill>
-                <a:latin typeface="微软雅黑" charset="-122"/>
-                <a:ea typeface="微软雅黑" charset="-122"/>
+                <a:latin typeface="微软雅黑" panose="020B0503020204020204" charset="-122"/>
+                <a:ea typeface="微软雅黑" panose="020B0503020204020204" charset="-122"/>
                 <a:sym typeface="+mn-ea"/>
               </a:rPr>
               <a:t>核心思路：</a:t>
@@ -10201,8 +10241,8 @@
                 <a:solidFill>
                   <a:srgbClr val="000000"/>
                 </a:solidFill>
-                <a:latin typeface="微软雅黑" charset="-122"/>
-                <a:ea typeface="微软雅黑" charset="-122"/>
+                <a:latin typeface="微软雅黑" panose="020B0503020204020204" charset="-122"/>
+                <a:ea typeface="微软雅黑" panose="020B0503020204020204" charset="-122"/>
                 <a:sym typeface="+mn-ea"/>
               </a:rPr>
               <a:t>终端根据测试配置测量参考信号，将测量结果及模型所需的配置信息作为输入</a:t>
@@ -10212,8 +10252,8 @@
                 <a:solidFill>
                   <a:srgbClr val="000000"/>
                 </a:solidFill>
-                <a:latin typeface="微软雅黑" charset="-122"/>
-                <a:ea typeface="微软雅黑" charset="-122"/>
+                <a:latin typeface="微软雅黑" panose="020B0503020204020204" charset="-122"/>
+                <a:ea typeface="微软雅黑" panose="020B0503020204020204" charset="-122"/>
                 <a:sym typeface="+mn-ea"/>
               </a:rPr>
               <a:t>，输出最好波束、</a:t>
@@ -10223,8 +10263,8 @@
                 <a:solidFill>
                   <a:srgbClr val="000000"/>
                 </a:solidFill>
-                <a:latin typeface="微软雅黑" charset="-122"/>
-                <a:ea typeface="微软雅黑" charset="-122"/>
+                <a:latin typeface="微软雅黑" panose="020B0503020204020204" charset="-122"/>
+                <a:ea typeface="微软雅黑" panose="020B0503020204020204" charset="-122"/>
                 <a:sym typeface="+mn-ea"/>
               </a:rPr>
               <a:t>RSRP </a:t>
@@ -10234,8 +10274,8 @@
                 <a:solidFill>
                   <a:srgbClr val="000000"/>
                 </a:solidFill>
-                <a:latin typeface="微软雅黑" charset="-122"/>
-                <a:ea typeface="微软雅黑" charset="-122"/>
+                <a:latin typeface="微软雅黑" panose="020B0503020204020204" charset="-122"/>
+                <a:ea typeface="微软雅黑" panose="020B0503020204020204" charset="-122"/>
                 <a:sym typeface="+mn-ea"/>
               </a:rPr>
               <a:t>或位置预测。对基准配置和关联配置分别运行</a:t>
@@ -10245,8 +10285,8 @@
                 <a:solidFill>
                   <a:srgbClr val="000000"/>
                 </a:solidFill>
-                <a:latin typeface="微软雅黑" charset="-122"/>
-                <a:ea typeface="微软雅黑" charset="-122"/>
+                <a:latin typeface="微软雅黑" panose="020B0503020204020204" charset="-122"/>
+                <a:ea typeface="微软雅黑" panose="020B0503020204020204" charset="-122"/>
                 <a:sym typeface="+mn-ea"/>
               </a:rPr>
               <a:t>同一个模型</a:t>
@@ -10256,8 +10296,8 @@
                 <a:solidFill>
                   <a:srgbClr val="000000"/>
                 </a:solidFill>
-                <a:latin typeface="微软雅黑" charset="-122"/>
-                <a:ea typeface="微软雅黑" charset="-122"/>
+                <a:latin typeface="微软雅黑" panose="020B0503020204020204" charset="-122"/>
+                <a:ea typeface="微软雅黑" panose="020B0503020204020204" charset="-122"/>
                 <a:sym typeface="+mn-ea"/>
               </a:rPr>
               <a:t>，再将两组预测的实际变化与预期关系比较，得到</a:t>
@@ -10267,19 +10307,19 @@
                 <a:solidFill>
                   <a:srgbClr val="000000"/>
                 </a:solidFill>
-                <a:latin typeface="微软雅黑" charset="-122"/>
-                <a:ea typeface="微软雅黑" charset="-122"/>
-                <a:sym typeface="+mn-ea"/>
-              </a:rPr>
-              <a:t>关系偏差或通过／失败结论</a:t>
+                <a:latin typeface="微软雅黑" panose="020B0503020204020204" charset="-122"/>
+                <a:ea typeface="微软雅黑" panose="020B0503020204020204" charset="-122"/>
+                <a:sym typeface="+mn-ea"/>
+              </a:rPr>
+              <a:t>关系偏差，从而得出通过／失败结论</a:t>
             </a:r>
             <a:r>
               <a:rPr lang="zh-CN" altLang="en-US" sz="1400" dirty="0">
                 <a:solidFill>
                   <a:srgbClr val="000000"/>
                 </a:solidFill>
-                <a:latin typeface="微软雅黑" charset="-122"/>
-                <a:ea typeface="微软雅黑" charset="-122"/>
+                <a:latin typeface="微软雅黑" panose="020B0503020204020204" charset="-122"/>
+                <a:ea typeface="微软雅黑" panose="020B0503020204020204" charset="-122"/>
                 <a:sym typeface="+mn-ea"/>
               </a:rPr>
               <a:t>，用于决定后续测试和模型处理。</a:t>
@@ -10288,8 +10328,8 @@
               <a:solidFill>
                 <a:srgbClr val="000000"/>
               </a:solidFill>
-              <a:latin typeface="微软雅黑" charset="-122"/>
-              <a:ea typeface="微软雅黑" charset="-122"/>
+              <a:latin typeface="微软雅黑" panose="020B0503020204020204" charset="-122"/>
+              <a:ea typeface="微软雅黑" panose="020B0503020204020204" charset="-122"/>
               <a:sym typeface="+mn-ea"/>
             </a:endParaRPr>
           </a:p>
@@ -10306,8 +10346,8 @@
                 <a:solidFill>
                   <a:srgbClr val="FF0000"/>
                 </a:solidFill>
-                <a:latin typeface="微软雅黑" charset="-122"/>
-                <a:ea typeface="微软雅黑" charset="-122"/>
+                <a:latin typeface="微软雅黑" panose="020B0503020204020204" charset="-122"/>
+                <a:ea typeface="微软雅黑" panose="020B0503020204020204" charset="-122"/>
                 <a:sym typeface="+mn-ea"/>
               </a:rPr>
               <a:t>研究方法：</a:t>
@@ -10316,8 +10356,8 @@
               <a:solidFill>
                 <a:srgbClr val="FF0000"/>
               </a:solidFill>
-              <a:latin typeface="微软雅黑" charset="-122"/>
-              <a:ea typeface="微软雅黑" charset="-122"/>
+              <a:latin typeface="微软雅黑" panose="020B0503020204020204" charset="-122"/>
+              <a:ea typeface="微软雅黑" panose="020B0503020204020204" charset="-122"/>
               <a:sym typeface="+mn-ea"/>
             </a:endParaRPr>
           </a:p>
@@ -10334,8 +10374,8 @@
                 <a:solidFill>
                   <a:schemeClr val="tx1"/>
                 </a:solidFill>
-                <a:latin typeface="微软雅黑" charset="-122"/>
-                <a:ea typeface="微软雅黑" charset="-122"/>
+                <a:latin typeface="微软雅黑" panose="020B0503020204020204" charset="-122"/>
+                <a:ea typeface="微软雅黑" panose="020B0503020204020204" charset="-122"/>
                 <a:sym typeface="+mn-ea"/>
               </a:rPr>
               <a:t>a. </a:t>
@@ -10345,8 +10385,8 @@
                 <a:solidFill>
                   <a:schemeClr val="tx1"/>
                 </a:solidFill>
-                <a:latin typeface="微软雅黑" charset="-122"/>
-                <a:ea typeface="微软雅黑" charset="-122"/>
+                <a:latin typeface="微软雅黑" panose="020B0503020204020204" charset="-122"/>
+                <a:ea typeface="微软雅黑" panose="020B0503020204020204" charset="-122"/>
                 <a:sym typeface="+mn-ea"/>
               </a:rPr>
               <a:t>建立基准，明确预测对象。</a:t>
@@ -10356,8 +10396,8 @@
                 <a:solidFill>
                   <a:schemeClr val="tx1"/>
                 </a:solidFill>
-                <a:latin typeface="微软雅黑" charset="-122"/>
-                <a:ea typeface="微软雅黑" charset="-122"/>
+                <a:latin typeface="微软雅黑" panose="020B0503020204020204" charset="-122"/>
+                <a:ea typeface="微软雅黑" panose="020B0503020204020204" charset="-122"/>
                 <a:sym typeface="+mn-ea"/>
               </a:rPr>
               <a:t> </a:t>
@@ -10367,8 +10407,8 @@
                 <a:solidFill>
                   <a:schemeClr val="tx1"/>
                 </a:solidFill>
-                <a:latin typeface="微软雅黑" charset="-122"/>
-                <a:ea typeface="微软雅黑" charset="-122"/>
+                <a:latin typeface="微软雅黑" panose="020B0503020204020204" charset="-122"/>
+                <a:ea typeface="微软雅黑" panose="020B0503020204020204" charset="-122"/>
                 <a:sym typeface="+mn-ea"/>
               </a:rPr>
               <a:t>测试设备配置参考信号、测量资源和预测目标。终端完成测量与推理，保存基准预测，并记录输出对应的配置和资源，确保后续能够正确对齐。</a:t>
@@ -10377,8 +10417,8 @@
               <a:solidFill>
                 <a:schemeClr val="tx1"/>
               </a:solidFill>
-              <a:latin typeface="微软雅黑" charset="-122"/>
-              <a:ea typeface="微软雅黑" charset="-122"/>
+              <a:latin typeface="微软雅黑" panose="020B0503020204020204" charset="-122"/>
+              <a:ea typeface="微软雅黑" panose="020B0503020204020204" charset="-122"/>
               <a:sym typeface="+mn-ea"/>
             </a:endParaRPr>
           </a:p>
@@ -10395,8 +10435,8 @@
                 <a:solidFill>
                   <a:schemeClr val="tx1"/>
                 </a:solidFill>
-                <a:latin typeface="微软雅黑" charset="-122"/>
-                <a:ea typeface="微软雅黑" charset="-122"/>
+                <a:latin typeface="微软雅黑" panose="020B0503020204020204" charset="-122"/>
+                <a:ea typeface="微软雅黑" panose="020B0503020204020204" charset="-122"/>
                 <a:sym typeface="+mn-ea"/>
               </a:rPr>
               <a:t>b. </a:t>
@@ -10406,8 +10446,8 @@
                 <a:solidFill>
                   <a:schemeClr val="tx1"/>
                 </a:solidFill>
-                <a:latin typeface="微软雅黑" charset="-122"/>
-                <a:ea typeface="微软雅黑" charset="-122"/>
+                <a:latin typeface="微软雅黑" panose="020B0503020204020204" charset="-122"/>
+                <a:ea typeface="微软雅黑" panose="020B0503020204020204" charset="-122"/>
                 <a:sym typeface="+mn-ea"/>
               </a:rPr>
               <a:t>构造关联配置，规定输出关系。</a:t>
@@ -10417,8 +10457,8 @@
                 <a:solidFill>
                   <a:schemeClr val="tx1"/>
                 </a:solidFill>
-                <a:latin typeface="微软雅黑" charset="-122"/>
-                <a:ea typeface="微软雅黑" charset="-122"/>
+                <a:latin typeface="微软雅黑" panose="020B0503020204020204" charset="-122"/>
+                <a:ea typeface="微软雅黑" panose="020B0503020204020204" charset="-122"/>
                 <a:sym typeface="+mn-ea"/>
               </a:rPr>
               <a:t> </a:t>
@@ -10428,8 +10468,8 @@
                 <a:solidFill>
                   <a:schemeClr val="tx1"/>
                 </a:solidFill>
-                <a:latin typeface="微软雅黑" charset="-122"/>
-                <a:ea typeface="微软雅黑" charset="-122"/>
+                <a:latin typeface="微软雅黑" panose="020B0503020204020204" charset="-122"/>
+                <a:ea typeface="微软雅黑" panose="020B0503020204020204" charset="-122"/>
                 <a:sym typeface="+mn-ea"/>
               </a:rPr>
               <a:t>通过重排扫描顺序、调整输入子集或统一改变发射功率，形成第二组输入。</a:t>
@@ -10439,8 +10479,8 @@
                 <a:solidFill>
                   <a:schemeClr val="tx1"/>
                 </a:solidFill>
-                <a:latin typeface="微软雅黑" charset="-122"/>
-                <a:ea typeface="微软雅黑" charset="-122"/>
+                <a:latin typeface="微软雅黑" panose="020B0503020204020204" charset="-122"/>
+                <a:ea typeface="微软雅黑" panose="020B0503020204020204" charset="-122"/>
                 <a:sym typeface="+mn-ea"/>
               </a:rPr>
               <a:t>不同变化采用不同判断规则</a:t>
@@ -10450,8 +10490,8 @@
                 <a:solidFill>
                   <a:schemeClr val="tx1"/>
                 </a:solidFill>
-                <a:latin typeface="微软雅黑" charset="-122"/>
-                <a:ea typeface="微软雅黑" charset="-122"/>
+                <a:latin typeface="微软雅黑" panose="020B0503020204020204" charset="-122"/>
+                <a:ea typeface="微软雅黑" panose="020B0503020204020204" charset="-122"/>
                 <a:sym typeface="+mn-ea"/>
               </a:rPr>
               <a:t>：扫描重排可检查同一目标的预测一致性，功率变化则检查预测功率的相应变化。</a:t>
@@ -10460,8 +10500,8 @@
               <a:solidFill>
                 <a:schemeClr val="tx1"/>
               </a:solidFill>
-              <a:latin typeface="微软雅黑" charset="-122"/>
-              <a:ea typeface="微软雅黑" charset="-122"/>
+              <a:latin typeface="微软雅黑" panose="020B0503020204020204" charset="-122"/>
+              <a:ea typeface="微软雅黑" panose="020B0503020204020204" charset="-122"/>
               <a:sym typeface="+mn-ea"/>
             </a:endParaRPr>
           </a:p>
@@ -10478,8 +10518,8 @@
                 <a:solidFill>
                   <a:schemeClr val="tx1"/>
                 </a:solidFill>
-                <a:latin typeface="微软雅黑" charset="-122"/>
-                <a:ea typeface="微软雅黑" charset="-122"/>
+                <a:latin typeface="微软雅黑" panose="020B0503020204020204" charset="-122"/>
+                <a:ea typeface="微软雅黑" panose="020B0503020204020204" charset="-122"/>
                 <a:sym typeface="+mn-ea"/>
               </a:rPr>
               <a:t>c. </a:t>
@@ -10489,8 +10529,8 @@
                 <a:solidFill>
                   <a:schemeClr val="tx1"/>
                 </a:solidFill>
-                <a:latin typeface="微软雅黑" charset="-122"/>
-                <a:ea typeface="微软雅黑" charset="-122"/>
+                <a:latin typeface="微软雅黑" panose="020B0503020204020204" charset="-122"/>
+                <a:ea typeface="微软雅黑" panose="020B0503020204020204" charset="-122"/>
                 <a:sym typeface="+mn-ea"/>
               </a:rPr>
               <a:t>获取关联预测，评价关系偏差。</a:t>
@@ -10500,8 +10540,8 @@
                 <a:solidFill>
                   <a:schemeClr val="tx1"/>
                 </a:solidFill>
-                <a:latin typeface="微软雅黑" charset="-122"/>
-                <a:ea typeface="微软雅黑" charset="-122"/>
+                <a:latin typeface="微软雅黑" panose="020B0503020204020204" charset="-122"/>
+                <a:ea typeface="微软雅黑" panose="020B0503020204020204" charset="-122"/>
                 <a:sym typeface="+mn-ea"/>
               </a:rPr>
               <a:t> </a:t>
@@ -10511,8 +10551,8 @@
                 <a:solidFill>
                   <a:schemeClr val="tx1"/>
                 </a:solidFill>
-                <a:latin typeface="微软雅黑" charset="-122"/>
-                <a:ea typeface="微软雅黑" charset="-122"/>
+                <a:latin typeface="微软雅黑" panose="020B0503020204020204" charset="-122"/>
+                <a:ea typeface="微软雅黑" panose="020B0503020204020204" charset="-122"/>
                 <a:sym typeface="+mn-ea"/>
               </a:rPr>
               <a:t>在传播条件可比、模型版本固定的前提下，获得第二组预测，对齐资源和目标后检查是否满足预期关系。结合容差与重复测试判断，必要时增加配置进一步验证。</a:t>
@@ -10521,8 +10561,8 @@
               <a:solidFill>
                 <a:schemeClr val="tx1"/>
               </a:solidFill>
-              <a:latin typeface="微软雅黑" charset="-122"/>
-              <a:ea typeface="微软雅黑" charset="-122"/>
+              <a:latin typeface="微软雅黑" panose="020B0503020204020204" charset="-122"/>
+              <a:ea typeface="微软雅黑" panose="020B0503020204020204" charset="-122"/>
               <a:sym typeface="+mn-ea"/>
             </a:endParaRPr>
           </a:p>
@@ -10539,8 +10579,8 @@
                 <a:solidFill>
                   <a:schemeClr val="tx1"/>
                 </a:solidFill>
-                <a:latin typeface="微软雅黑" charset="-122"/>
-                <a:ea typeface="微软雅黑" charset="-122"/>
+                <a:latin typeface="微软雅黑" panose="020B0503020204020204" charset="-122"/>
+                <a:ea typeface="微软雅黑" panose="020B0503020204020204" charset="-122"/>
                 <a:sym typeface="+mn-ea"/>
               </a:rPr>
               <a:t>d. </a:t>
@@ -10550,8 +10590,8 @@
                 <a:solidFill>
                   <a:schemeClr val="tx1"/>
                 </a:solidFill>
-                <a:latin typeface="微软雅黑" charset="-122"/>
-                <a:ea typeface="微软雅黑" charset="-122"/>
+                <a:latin typeface="微软雅黑" panose="020B0503020204020204" charset="-122"/>
+                <a:ea typeface="微软雅黑" panose="020B0503020204020204" charset="-122"/>
                 <a:sym typeface="+mn-ea"/>
               </a:rPr>
               <a:t>分配比较任务，形成验证结果。</a:t>
@@ -10561,8 +10601,8 @@
                 <a:solidFill>
                   <a:schemeClr val="tx1"/>
                 </a:solidFill>
-                <a:latin typeface="微软雅黑" charset="-122"/>
-                <a:ea typeface="微软雅黑" charset="-122"/>
+                <a:latin typeface="微软雅黑" panose="020B0503020204020204" charset="-122"/>
+                <a:ea typeface="微软雅黑" panose="020B0503020204020204" charset="-122"/>
                 <a:sym typeface="+mn-ea"/>
               </a:rPr>
               <a:t> </a:t>
@@ -10572,8 +10612,8 @@
                 <a:solidFill>
                   <a:schemeClr val="tx1"/>
                 </a:solidFill>
-                <a:latin typeface="微软雅黑" charset="-122"/>
-                <a:ea typeface="微软雅黑" charset="-122"/>
+                <a:latin typeface="微软雅黑" panose="020B0503020204020204" charset="-122"/>
+                <a:ea typeface="微软雅黑" panose="020B0503020204020204" charset="-122"/>
                 <a:sym typeface="+mn-ea"/>
               </a:rPr>
               <a:t>终端支持本地验证时，上报差值或通过／失败结论；否则，上报两组预测，由测试设备比较。异常后可进一步复测、停用或切换模型，也可触发重新训练。</a:t>
@@ -10582,8 +10622,8 @@
               <a:solidFill>
                 <a:schemeClr val="tx1"/>
               </a:solidFill>
-              <a:latin typeface="微软雅黑" charset="-122"/>
-              <a:ea typeface="微软雅黑" charset="-122"/>
+              <a:latin typeface="微软雅黑" panose="020B0503020204020204" charset="-122"/>
+              <a:ea typeface="微软雅黑" panose="020B0503020204020204" charset="-122"/>
               <a:sym typeface="+mn-ea"/>
             </a:endParaRPr>
           </a:p>
@@ -10600,8 +10640,8 @@
                 <a:solidFill>
                   <a:srgbClr val="FF0000"/>
                 </a:solidFill>
-                <a:latin typeface="微软雅黑" charset="-122"/>
-                <a:ea typeface="微软雅黑" charset="-122"/>
+                <a:latin typeface="微软雅黑" panose="020B0503020204020204" charset="-122"/>
+                <a:ea typeface="微软雅黑" panose="020B0503020204020204" charset="-122"/>
                 <a:sym typeface="+mn-ea"/>
               </a:rPr>
               <a:t>成熟度与研究启示：</a:t>
@@ -10611,8 +10651,8 @@
                 <a:solidFill>
                   <a:schemeClr val="tx1"/>
                 </a:solidFill>
-                <a:latin typeface="微软雅黑" charset="-122"/>
-                <a:ea typeface="微软雅黑" charset="-122"/>
+                <a:latin typeface="微软雅黑" panose="020B0503020204020204" charset="-122"/>
+                <a:ea typeface="微软雅黑" panose="020B0503020204020204" charset="-122"/>
                 <a:sym typeface="+mn-ea"/>
               </a:rPr>
               <a:t>专利提供了实验室与部署后的验证流程，具体用例和容差仍需实验确定。可先固定信道与模型版本，开展成对配置测试。</a:t>
@@ -10621,8 +10661,8 @@
               <a:solidFill>
                 <a:schemeClr val="tx1"/>
               </a:solidFill>
-              <a:latin typeface="微软雅黑" charset="-122"/>
-              <a:ea typeface="微软雅黑" charset="-122"/>
+              <a:latin typeface="微软雅黑" panose="020B0503020204020204" charset="-122"/>
+              <a:ea typeface="微软雅黑" panose="020B0503020204020204" charset="-122"/>
               <a:sym typeface="+mn-ea"/>
             </a:endParaRPr>
           </a:p>
@@ -10666,7 +10706,7 @@
       </p:sp>
       <p:pic>
         <p:nvPicPr>
-          <p:cNvPr id="1" name="图片 0" descr="post_object_image_502525274"/>
+          <p:cNvPr id="4" name="图片 3" descr="post_object_image_502525274"/>
           <p:cNvPicPr>
             <a:picLocks noChangeAspect="1"/>
           </p:cNvPicPr>
@@ -10764,31 +10804,31 @@
           <a:p>
             <a:r>
               <a:rPr lang="zh-CN" altLang="en-US" sz="2800" b="1" dirty="0">
-                <a:latin typeface="微软雅黑" charset="-122"/>
-                <a:ea typeface="微软雅黑" charset="-122"/>
+                <a:latin typeface="微软雅黑" panose="020B0503020204020204" charset="-122"/>
+                <a:ea typeface="微软雅黑" panose="020B0503020204020204" charset="-122"/>
                 <a:sym typeface="+mn-ea"/>
               </a:rPr>
               <a:t>方向一：通信</a:t>
             </a:r>
             <a:r>
               <a:rPr lang="en-US" altLang="zh-CN" sz="2800" b="1" dirty="0">
-                <a:latin typeface="微软雅黑" charset="-122"/>
-                <a:ea typeface="微软雅黑" charset="-122"/>
+                <a:latin typeface="微软雅黑" panose="020B0503020204020204" charset="-122"/>
+                <a:ea typeface="微软雅黑" panose="020B0503020204020204" charset="-122"/>
                 <a:sym typeface="+mn-ea"/>
               </a:rPr>
               <a:t> AI </a:t>
             </a:r>
             <a:r>
               <a:rPr lang="zh-CN" altLang="en-US" sz="2800" b="1" dirty="0">
-                <a:latin typeface="微软雅黑" charset="-122"/>
-                <a:ea typeface="微软雅黑" charset="-122"/>
+                <a:latin typeface="微软雅黑" panose="020B0503020204020204" charset="-122"/>
+                <a:ea typeface="微软雅黑" panose="020B0503020204020204" charset="-122"/>
                 <a:sym typeface="+mn-ea"/>
               </a:rPr>
               <a:t>功能测试验收</a:t>
             </a:r>
             <a:endParaRPr lang="zh-CN" altLang="en-US" sz="2800" b="1" dirty="0">
-              <a:latin typeface="微软雅黑" charset="-122"/>
-              <a:ea typeface="微软雅黑" charset="-122"/>
+              <a:latin typeface="微软雅黑" panose="020B0503020204020204" charset="-122"/>
+              <a:ea typeface="微软雅黑" panose="020B0503020204020204" charset="-122"/>
               <a:sym typeface="+mn-ea"/>
             </a:endParaRPr>
           </a:p>
@@ -10830,8 +10870,8 @@
                 <a:solidFill>
                   <a:schemeClr val="tx1"/>
                 </a:solidFill>
-                <a:latin typeface="微软雅黑" charset="-122"/>
-                <a:ea typeface="微软雅黑" charset="-122"/>
+                <a:latin typeface="微软雅黑" panose="020B0503020204020204" charset="-122"/>
+                <a:ea typeface="微软雅黑" panose="020B0503020204020204" charset="-122"/>
                 <a:sym typeface="+mn-ea"/>
               </a:rPr>
               <a:t>2. </a:t>
@@ -10841,8 +10881,8 @@
                 <a:solidFill>
                   <a:schemeClr val="tx1"/>
                 </a:solidFill>
-                <a:latin typeface="微软雅黑" charset="-122"/>
-                <a:ea typeface="微软雅黑" charset="-122"/>
+                <a:latin typeface="微软雅黑" panose="020B0503020204020204" charset="-122"/>
+                <a:ea typeface="微软雅黑" panose="020B0503020204020204" charset="-122"/>
                 <a:sym typeface="+mn-ea"/>
               </a:rPr>
               <a:t>苹果</a:t>
@@ -10852,8 +10892,8 @@
                 <a:solidFill>
                   <a:schemeClr val="tx1"/>
                 </a:solidFill>
-                <a:latin typeface="微软雅黑" charset="-122"/>
-                <a:ea typeface="微软雅黑" charset="-122"/>
+                <a:latin typeface="微软雅黑" panose="020B0503020204020204" charset="-122"/>
+                <a:ea typeface="微软雅黑" panose="020B0503020204020204" charset="-122"/>
                 <a:sym typeface="+mn-ea"/>
               </a:rPr>
               <a:t>——</a:t>
@@ -10863,8 +10903,8 @@
                 <a:solidFill>
                   <a:schemeClr val="tx1"/>
                 </a:solidFill>
-                <a:latin typeface="微软雅黑" charset="-122"/>
-                <a:ea typeface="微软雅黑" charset="-122"/>
+                <a:latin typeface="微软雅黑" panose="020B0503020204020204" charset="-122"/>
+                <a:ea typeface="微软雅黑" panose="020B0503020204020204" charset="-122"/>
                 <a:sym typeface="+mn-ea"/>
               </a:rPr>
               <a:t>通信</a:t>
@@ -10874,8 +10914,8 @@
                 <a:solidFill>
                   <a:schemeClr val="tx1"/>
                 </a:solidFill>
-                <a:latin typeface="微软雅黑" charset="-122"/>
-                <a:ea typeface="微软雅黑" charset="-122"/>
+                <a:latin typeface="微软雅黑" panose="020B0503020204020204" charset="-122"/>
+                <a:ea typeface="微软雅黑" panose="020B0503020204020204" charset="-122"/>
                 <a:sym typeface="+mn-ea"/>
               </a:rPr>
               <a:t>AI</a:t>
@@ -10885,8 +10925,8 @@
                 <a:solidFill>
                   <a:schemeClr val="tx1"/>
                 </a:solidFill>
-                <a:latin typeface="微软雅黑" charset="-122"/>
-                <a:ea typeface="微软雅黑" charset="-122"/>
+                <a:latin typeface="微软雅黑" panose="020B0503020204020204" charset="-122"/>
+                <a:ea typeface="微软雅黑" panose="020B0503020204020204" charset="-122"/>
                 <a:sym typeface="+mn-ea"/>
               </a:rPr>
               <a:t>模型部署后的监测与切换</a:t>
@@ -10896,8 +10936,8 @@
                 <a:solidFill>
                   <a:srgbClr val="000000"/>
                 </a:solidFill>
-                <a:latin typeface="微软雅黑" charset="-122"/>
-                <a:ea typeface="微软雅黑" charset="-122"/>
+                <a:latin typeface="微软雅黑" panose="020B0503020204020204" charset="-122"/>
+                <a:ea typeface="微软雅黑" panose="020B0503020204020204" charset="-122"/>
                 <a:cs typeface="+mn-ea"/>
                 <a:sym typeface="+mn-ea"/>
               </a:rPr>
@@ -10908,8 +10948,8 @@
                 <a:solidFill>
                   <a:srgbClr val="000000"/>
                 </a:solidFill>
-                <a:latin typeface="微软雅黑" charset="0"/>
-                <a:ea typeface="微软雅黑" charset="0"/>
+                <a:latin typeface="微软雅黑" panose="020B0503020204020204" charset="-122"/>
+                <a:ea typeface="微软雅黑" panose="020B0503020204020204" charset="-122"/>
                 <a:cs typeface="+mn-ea"/>
                 <a:sym typeface="+mn-ea"/>
               </a:rPr>
@@ -10920,8 +10960,8 @@
                 <a:solidFill>
                   <a:srgbClr val="000000"/>
                 </a:solidFill>
-                <a:latin typeface="微软雅黑" charset="-122"/>
-                <a:ea typeface="微软雅黑" charset="-122"/>
+                <a:latin typeface="微软雅黑" panose="020B0503020204020204" charset="-122"/>
+                <a:ea typeface="微软雅黑" panose="020B0503020204020204" charset="-122"/>
                 <a:cs typeface="+mn-ea"/>
                 <a:sym typeface="+mn-ea"/>
               </a:rPr>
@@ -10931,8 +10971,8 @@
               <a:solidFill>
                 <a:schemeClr val="tx1"/>
               </a:solidFill>
-              <a:latin typeface="微软雅黑" charset="-122"/>
-              <a:ea typeface="微软雅黑" charset="-122"/>
+              <a:latin typeface="微软雅黑" panose="020B0503020204020204" charset="-122"/>
+              <a:ea typeface="微软雅黑" panose="020B0503020204020204" charset="-122"/>
               <a:sym typeface="+mn-ea"/>
             </a:endParaRPr>
           </a:p>
@@ -10949,8 +10989,8 @@
                 <a:solidFill>
                   <a:srgbClr val="FF0000"/>
                 </a:solidFill>
-                <a:latin typeface="微软雅黑" charset="-122"/>
-                <a:ea typeface="微软雅黑" charset="-122"/>
+                <a:latin typeface="微软雅黑" panose="020B0503020204020204" charset="-122"/>
+                <a:ea typeface="微软雅黑" panose="020B0503020204020204" charset="-122"/>
                 <a:sym typeface="+mn-ea"/>
               </a:rPr>
               <a:t>研究问题与价值：</a:t>
@@ -10960,8 +11000,8 @@
                 <a:solidFill>
                   <a:srgbClr val="000000"/>
                 </a:solidFill>
-                <a:latin typeface="微软雅黑" charset="-122"/>
-                <a:ea typeface="微软雅黑" charset="-122"/>
+                <a:latin typeface="微软雅黑" panose="020B0503020204020204" charset="-122"/>
+                <a:ea typeface="微软雅黑" panose="020B0503020204020204" charset="-122"/>
                 <a:sym typeface="+mn-ea"/>
               </a:rPr>
               <a:t>波束预测等通信</a:t>
@@ -10971,8 +11011,8 @@
                 <a:solidFill>
                   <a:srgbClr val="000000"/>
                 </a:solidFill>
-                <a:latin typeface="微软雅黑" charset="-122"/>
-                <a:ea typeface="微软雅黑" charset="-122"/>
+                <a:latin typeface="微软雅黑" panose="020B0503020204020204" charset="-122"/>
+                <a:ea typeface="微软雅黑" panose="020B0503020204020204" charset="-122"/>
                 <a:sym typeface="+mn-ea"/>
               </a:rPr>
               <a:t>AI</a:t>
@@ -10982,8 +11022,8 @@
                 <a:solidFill>
                   <a:srgbClr val="000000"/>
                 </a:solidFill>
-                <a:latin typeface="微软雅黑" charset="-122"/>
-                <a:ea typeface="微软雅黑" charset="-122"/>
+                <a:latin typeface="微软雅黑" panose="020B0503020204020204" charset="-122"/>
+                <a:ea typeface="微软雅黑" panose="020B0503020204020204" charset="-122"/>
                 <a:sym typeface="+mn-ea"/>
               </a:rPr>
               <a:t>模型部署后，可能因小区切换、传播环境变化或模型更新而出现性能下降。仅凭部署前通过测试，无法保证模型在当前条件下仍然适用。因此，需要明确何时检查模型、检查结果如何反馈，以及表现变差后如何切换或回退。</a:t>
@@ -10992,8 +11032,8 @@
               <a:solidFill>
                 <a:srgbClr val="000000"/>
               </a:solidFill>
-              <a:latin typeface="微软雅黑" charset="-122"/>
-              <a:ea typeface="微软雅黑" charset="-122"/>
+              <a:latin typeface="微软雅黑" panose="020B0503020204020204" charset="-122"/>
+              <a:ea typeface="微软雅黑" panose="020B0503020204020204" charset="-122"/>
               <a:sym typeface="+mn-ea"/>
             </a:endParaRPr>
           </a:p>
@@ -11010,8 +11050,8 @@
                 <a:solidFill>
                   <a:srgbClr val="FF0000"/>
                 </a:solidFill>
-                <a:latin typeface="微软雅黑" charset="-122"/>
-                <a:ea typeface="微软雅黑" charset="-122"/>
+                <a:latin typeface="微软雅黑" panose="020B0503020204020204" charset="-122"/>
+                <a:ea typeface="微软雅黑" panose="020B0503020204020204" charset="-122"/>
                 <a:sym typeface="+mn-ea"/>
               </a:rPr>
               <a:t>核心思路：</a:t>
@@ -11021,8 +11061,8 @@
                 <a:solidFill>
                   <a:srgbClr val="000000"/>
                 </a:solidFill>
-                <a:latin typeface="微软雅黑" charset="-122"/>
-                <a:ea typeface="微软雅黑" charset="-122"/>
+                <a:latin typeface="微软雅黑" panose="020B0503020204020204" charset="-122"/>
+                <a:ea typeface="微软雅黑" panose="020B0503020204020204" charset="-122"/>
                 <a:sym typeface="+mn-ea"/>
               </a:rPr>
               <a:t>为不同模型建立带有标识、版本、启用状态和验证情况的记录，由网络配置每个模型的监测条件。终端在条件满足时采集测量，形成监测评分或上报测量结果，再根据评价结果决定是否继续使用。</a:t>
@@ -11032,8 +11072,8 @@
                 <a:solidFill>
                   <a:srgbClr val="000000"/>
                 </a:solidFill>
-                <a:latin typeface="微软雅黑" charset="-122"/>
-                <a:ea typeface="微软雅黑" charset="-122"/>
+                <a:latin typeface="微软雅黑" panose="020B0503020204020204" charset="-122"/>
+                <a:ea typeface="微软雅黑" panose="020B0503020204020204" charset="-122"/>
                 <a:sym typeface="+mn-ea"/>
               </a:rPr>
               <a:t>监测既面向当前模型，也可以覆盖尚未启用的候选模型，为后续替换提供依据</a:t>
@@ -11043,8 +11083,8 @@
                 <a:solidFill>
                   <a:srgbClr val="000000"/>
                 </a:solidFill>
-                <a:latin typeface="微软雅黑" charset="-122"/>
-                <a:ea typeface="微软雅黑" charset="-122"/>
+                <a:latin typeface="微软雅黑" panose="020B0503020204020204" charset="-122"/>
+                <a:ea typeface="微软雅黑" panose="020B0503020204020204" charset="-122"/>
                 <a:sym typeface="+mn-ea"/>
               </a:rPr>
               <a:t>。</a:t>
@@ -11053,8 +11093,8 @@
               <a:solidFill>
                 <a:srgbClr val="000000"/>
               </a:solidFill>
-              <a:latin typeface="微软雅黑" charset="-122"/>
-              <a:ea typeface="微软雅黑" charset="-122"/>
+              <a:latin typeface="微软雅黑" panose="020B0503020204020204" charset="-122"/>
+              <a:ea typeface="微软雅黑" panose="020B0503020204020204" charset="-122"/>
               <a:sym typeface="+mn-ea"/>
             </a:endParaRPr>
           </a:p>
@@ -11071,8 +11111,8 @@
                 <a:solidFill>
                   <a:srgbClr val="FF0000"/>
                 </a:solidFill>
-                <a:latin typeface="微软雅黑" charset="-122"/>
-                <a:ea typeface="微软雅黑" charset="-122"/>
+                <a:latin typeface="微软雅黑" panose="020B0503020204020204" charset="-122"/>
+                <a:ea typeface="微软雅黑" panose="020B0503020204020204" charset="-122"/>
                 <a:sym typeface="+mn-ea"/>
               </a:rPr>
               <a:t>研究方法：</a:t>
@@ -11081,8 +11121,8 @@
               <a:solidFill>
                 <a:srgbClr val="FF0000"/>
               </a:solidFill>
-              <a:latin typeface="微软雅黑" charset="-122"/>
-              <a:ea typeface="微软雅黑" charset="-122"/>
+              <a:latin typeface="微软雅黑" panose="020B0503020204020204" charset="-122"/>
+              <a:ea typeface="微软雅黑" panose="020B0503020204020204" charset="-122"/>
               <a:sym typeface="+mn-ea"/>
             </a:endParaRPr>
           </a:p>
@@ -11099,8 +11139,8 @@
                 <a:solidFill>
                   <a:schemeClr val="tx1"/>
                 </a:solidFill>
-                <a:latin typeface="微软雅黑" charset="-122"/>
-                <a:ea typeface="微软雅黑" charset="-122"/>
+                <a:latin typeface="微软雅黑" panose="020B0503020204020204" charset="-122"/>
+                <a:ea typeface="微软雅黑" panose="020B0503020204020204" charset="-122"/>
                 <a:sym typeface="+mn-ea"/>
               </a:rPr>
               <a:t>a. </a:t>
@@ -11110,8 +11150,8 @@
                 <a:solidFill>
                   <a:schemeClr val="tx1"/>
                 </a:solidFill>
-                <a:latin typeface="微软雅黑" charset="-122"/>
-                <a:ea typeface="微软雅黑" charset="-122"/>
+                <a:latin typeface="微软雅黑" panose="020B0503020204020204" charset="-122"/>
+                <a:ea typeface="微软雅黑" panose="020B0503020204020204" charset="-122"/>
                 <a:sym typeface="+mn-ea"/>
               </a:rPr>
               <a:t>记录模型信息，明确监测对象。</a:t>
@@ -11121,8 +11161,8 @@
                 <a:solidFill>
                   <a:schemeClr val="tx1"/>
                 </a:solidFill>
-                <a:latin typeface="微软雅黑" charset="-122"/>
-                <a:ea typeface="微软雅黑" charset="-122"/>
+                <a:latin typeface="微软雅黑" panose="020B0503020204020204" charset="-122"/>
+                <a:ea typeface="微软雅黑" panose="020B0503020204020204" charset="-122"/>
                 <a:sym typeface="+mn-ea"/>
               </a:rPr>
               <a:t>网络向终端提供新模型或更新模型及其唯一标识，并关联版本、启用状态和验证情况，使后续测量与评分能够对应到具体模型，区分当前使用的模型和备用候选。</a:t>
@@ -11131,8 +11171,8 @@
               <a:solidFill>
                 <a:schemeClr val="tx1"/>
               </a:solidFill>
-              <a:latin typeface="微软雅黑" charset="-122"/>
-              <a:ea typeface="微软雅黑" charset="-122"/>
+              <a:latin typeface="微软雅黑" panose="020B0503020204020204" charset="-122"/>
+              <a:ea typeface="微软雅黑" panose="020B0503020204020204" charset="-122"/>
               <a:sym typeface="+mn-ea"/>
             </a:endParaRPr>
           </a:p>
@@ -11149,8 +11189,8 @@
                 <a:solidFill>
                   <a:schemeClr val="tx1"/>
                 </a:solidFill>
-                <a:latin typeface="微软雅黑" charset="-122"/>
-                <a:ea typeface="微软雅黑" charset="-122"/>
+                <a:latin typeface="微软雅黑" panose="020B0503020204020204" charset="-122"/>
+                <a:ea typeface="微软雅黑" panose="020B0503020204020204" charset="-122"/>
                 <a:sym typeface="+mn-ea"/>
               </a:rPr>
               <a:t>b. </a:t>
@@ -11160,8 +11200,8 @@
                 <a:solidFill>
                   <a:schemeClr val="tx1"/>
                 </a:solidFill>
-                <a:latin typeface="微软雅黑" charset="-122"/>
-                <a:ea typeface="微软雅黑" charset="-122"/>
+                <a:latin typeface="微软雅黑" panose="020B0503020204020204" charset="-122"/>
+                <a:ea typeface="微软雅黑" panose="020B0503020204020204" charset="-122"/>
                 <a:sym typeface="+mn-ea"/>
               </a:rPr>
               <a:t>配置监测条件，确定检查时机。</a:t>
@@ -11171,8 +11211,8 @@
                 <a:solidFill>
                   <a:schemeClr val="tx1"/>
                 </a:solidFill>
-                <a:latin typeface="微软雅黑" charset="-122"/>
-                <a:ea typeface="微软雅黑" charset="-122"/>
+                <a:latin typeface="微软雅黑" panose="020B0503020204020204" charset="-122"/>
+                <a:ea typeface="微软雅黑" panose="020B0503020204020204" charset="-122"/>
                 <a:sym typeface="+mn-ea"/>
               </a:rPr>
               <a:t>网络针对模型规定监测触发规则，例如服务小区变化、信号强度低于门限、预测值与实测值偏差过大。</a:t>
@@ -11182,8 +11222,8 @@
                 <a:solidFill>
                   <a:schemeClr val="tx1"/>
                 </a:solidFill>
-                <a:latin typeface="微软雅黑" charset="-122"/>
-                <a:ea typeface="微软雅黑" charset="-122"/>
+                <a:latin typeface="微软雅黑" panose="020B0503020204020204" charset="-122"/>
+                <a:ea typeface="微软雅黑" panose="020B0503020204020204" charset="-122"/>
                 <a:sym typeface="+mn-ea"/>
               </a:rPr>
               <a:t>触发条件表示需要检查，并不直接等于模型失效</a:t>
@@ -11193,8 +11233,8 @@
                 <a:solidFill>
                   <a:schemeClr val="tx1"/>
                 </a:solidFill>
-                <a:latin typeface="微软雅黑" charset="-122"/>
-                <a:ea typeface="微软雅黑" charset="-122"/>
+                <a:latin typeface="微软雅黑" panose="020B0503020204020204" charset="-122"/>
+                <a:ea typeface="微软雅黑" panose="020B0503020204020204" charset="-122"/>
                 <a:sym typeface="+mn-ea"/>
               </a:rPr>
               <a:t>。</a:t>
@@ -11203,8 +11243,8 @@
               <a:solidFill>
                 <a:schemeClr val="tx1"/>
               </a:solidFill>
-              <a:latin typeface="微软雅黑" charset="-122"/>
-              <a:ea typeface="微软雅黑" charset="-122"/>
+              <a:latin typeface="微软雅黑" panose="020B0503020204020204" charset="-122"/>
+              <a:ea typeface="微软雅黑" panose="020B0503020204020204" charset="-122"/>
               <a:sym typeface="+mn-ea"/>
             </a:endParaRPr>
           </a:p>
@@ -11221,8 +11261,8 @@
                 <a:solidFill>
                   <a:schemeClr val="tx1"/>
                 </a:solidFill>
-                <a:latin typeface="微软雅黑" charset="-122"/>
-                <a:ea typeface="微软雅黑" charset="-122"/>
+                <a:latin typeface="微软雅黑" panose="020B0503020204020204" charset="-122"/>
+                <a:ea typeface="微软雅黑" panose="020B0503020204020204" charset="-122"/>
                 <a:sym typeface="+mn-ea"/>
               </a:rPr>
               <a:t>c. </a:t>
@@ -11232,8 +11272,8 @@
                 <a:solidFill>
                   <a:schemeClr val="tx1"/>
                 </a:solidFill>
-                <a:latin typeface="微软雅黑" charset="-122"/>
-                <a:ea typeface="微软雅黑" charset="-122"/>
+                <a:latin typeface="微软雅黑" panose="020B0503020204020204" charset="-122"/>
+                <a:ea typeface="微软雅黑" panose="020B0503020204020204" charset="-122"/>
                 <a:sym typeface="+mn-ea"/>
               </a:rPr>
               <a:t>采集监测数据，形成评价结果。</a:t>
@@ -11243,8 +11283,8 @@
                 <a:solidFill>
                   <a:schemeClr val="tx1"/>
                 </a:solidFill>
-                <a:latin typeface="微软雅黑" charset="-122"/>
-                <a:ea typeface="微软雅黑" charset="-122"/>
+                <a:latin typeface="微软雅黑" panose="020B0503020204020204" charset="-122"/>
+                <a:ea typeface="微软雅黑" panose="020B0503020204020204" charset="-122"/>
                 <a:sym typeface="+mn-ea"/>
               </a:rPr>
               <a:t>终端按配置执行测量，检查模型推理表现，并将结果关联到模型标识。终端可以计算监测评分后上报，也可以上报测量，由网络计算评分；候选模型在具备监测条件时也可接受评估。</a:t>
@@ -11253,8 +11293,8 @@
               <a:solidFill>
                 <a:schemeClr val="tx1"/>
               </a:solidFill>
-              <a:latin typeface="微软雅黑" charset="-122"/>
-              <a:ea typeface="微软雅黑" charset="-122"/>
+              <a:latin typeface="微软雅黑" panose="020B0503020204020204" charset="-122"/>
+              <a:ea typeface="微软雅黑" panose="020B0503020204020204" charset="-122"/>
               <a:sym typeface="+mn-ea"/>
             </a:endParaRPr>
           </a:p>
@@ -11271,8 +11311,8 @@
                 <a:solidFill>
                   <a:schemeClr val="tx1"/>
                 </a:solidFill>
-                <a:latin typeface="微软雅黑" charset="-122"/>
-                <a:ea typeface="微软雅黑" charset="-122"/>
+                <a:latin typeface="微软雅黑" panose="020B0503020204020204" charset="-122"/>
+                <a:ea typeface="微软雅黑" panose="020B0503020204020204" charset="-122"/>
                 <a:sym typeface="+mn-ea"/>
               </a:rPr>
               <a:t>d. </a:t>
@@ -11282,8 +11322,8 @@
                 <a:solidFill>
                   <a:schemeClr val="tx1"/>
                 </a:solidFill>
-                <a:latin typeface="微软雅黑" charset="-122"/>
-                <a:ea typeface="微软雅黑" charset="-122"/>
+                <a:latin typeface="微软雅黑" panose="020B0503020204020204" charset="-122"/>
+                <a:ea typeface="微软雅黑" panose="020B0503020204020204" charset="-122"/>
                 <a:sym typeface="+mn-ea"/>
               </a:rPr>
               <a:t>反馈监测结果，执行模型管理。</a:t>
@@ -11293,8 +11333,8 @@
                 <a:solidFill>
                   <a:schemeClr val="tx1"/>
                 </a:solidFill>
-                <a:latin typeface="微软雅黑" charset="-122"/>
-                <a:ea typeface="微软雅黑" charset="-122"/>
+                <a:latin typeface="微软雅黑" panose="020B0503020204020204" charset="-122"/>
+                <a:ea typeface="微软雅黑" panose="020B0503020204020204" charset="-122"/>
                 <a:sym typeface="+mn-ea"/>
               </a:rPr>
               <a:t>当前模型表现良好则继续使用；表现不好时，查找在相近运行条件下评分良好的候选模型并进行选择，没有合适候选则回退传统方案。网络也可以根据上报评分直接指示终端切换模型。</a:t>
@@ -11303,8 +11343,8 @@
               <a:solidFill>
                 <a:schemeClr val="tx1"/>
               </a:solidFill>
-              <a:latin typeface="微软雅黑" charset="-122"/>
-              <a:ea typeface="微软雅黑" charset="-122"/>
+              <a:latin typeface="微软雅黑" panose="020B0503020204020204" charset="-122"/>
+              <a:ea typeface="微软雅黑" panose="020B0503020204020204" charset="-122"/>
               <a:sym typeface="+mn-ea"/>
             </a:endParaRPr>
           </a:p>
@@ -11321,8 +11361,8 @@
                 <a:solidFill>
                   <a:srgbClr val="FF0000"/>
                 </a:solidFill>
-                <a:latin typeface="微软雅黑" charset="-122"/>
-                <a:ea typeface="微软雅黑" charset="-122"/>
+                <a:latin typeface="微软雅黑" panose="020B0503020204020204" charset="-122"/>
+                <a:ea typeface="微软雅黑" panose="020B0503020204020204" charset="-122"/>
                 <a:sym typeface="+mn-ea"/>
               </a:rPr>
               <a:t>成熟度与研究启示：</a:t>
@@ -11332,8 +11372,8 @@
                 <a:solidFill>
                   <a:schemeClr val="tx1"/>
                 </a:solidFill>
-                <a:latin typeface="微软雅黑" charset="-122"/>
-                <a:ea typeface="微软雅黑" charset="-122"/>
+                <a:latin typeface="微软雅黑" panose="020B0503020204020204" charset="-122"/>
+                <a:ea typeface="微软雅黑" panose="020B0503020204020204" charset="-122"/>
                 <a:sym typeface="+mn-ea"/>
               </a:rPr>
               <a:t>专利给出了部署后监测与模型管理机制，未提供定量效果对比或可直接套用的统一评分规则。可围绕监测是否正确触发、评分能否反映性能退化、切换或回退后功能能否恢复</a:t>
@@ -11343,8 +11383,8 @@
                 <a:solidFill>
                   <a:schemeClr val="tx1"/>
                 </a:solidFill>
-                <a:latin typeface="微软雅黑" charset="-122"/>
-                <a:ea typeface="微软雅黑" charset="-122"/>
+                <a:latin typeface="微软雅黑" panose="020B0503020204020204" charset="-122"/>
+                <a:ea typeface="微软雅黑" panose="020B0503020204020204" charset="-122"/>
                 <a:sym typeface="+mn-ea"/>
               </a:rPr>
               <a:t>开展验证。具体评分方法、判定门限及监测开销，需要结合选定的通信功能进一步实验确定。</a:t>
@@ -11353,8 +11393,8 @@
               <a:solidFill>
                 <a:schemeClr val="tx1"/>
               </a:solidFill>
-              <a:latin typeface="微软雅黑" charset="-122"/>
-              <a:ea typeface="微软雅黑" charset="-122"/>
+              <a:latin typeface="微软雅黑" panose="020B0503020204020204" charset="-122"/>
+              <a:ea typeface="微软雅黑" panose="020B0503020204020204" charset="-122"/>
               <a:sym typeface="+mn-ea"/>
             </a:endParaRPr>
           </a:p>
@@ -11520,31 +11560,31 @@
           <a:p>
             <a:r>
               <a:rPr lang="zh-CN" altLang="en-US" sz="2800" b="1" dirty="0">
-                <a:latin typeface="微软雅黑" charset="-122"/>
-                <a:ea typeface="微软雅黑" charset="-122"/>
+                <a:latin typeface="微软雅黑" panose="020B0503020204020204" charset="-122"/>
+                <a:ea typeface="微软雅黑" panose="020B0503020204020204" charset="-122"/>
                 <a:sym typeface="+mn-ea"/>
               </a:rPr>
               <a:t>方向一：通信</a:t>
             </a:r>
             <a:r>
               <a:rPr lang="en-US" altLang="zh-CN" sz="2800" b="1" dirty="0">
-                <a:latin typeface="微软雅黑" charset="-122"/>
-                <a:ea typeface="微软雅黑" charset="-122"/>
+                <a:latin typeface="微软雅黑" panose="020B0503020204020204" charset="-122"/>
+                <a:ea typeface="微软雅黑" panose="020B0503020204020204" charset="-122"/>
                 <a:sym typeface="+mn-ea"/>
               </a:rPr>
               <a:t> AI </a:t>
             </a:r>
             <a:r>
               <a:rPr lang="zh-CN" altLang="en-US" sz="2800" b="1" dirty="0">
-                <a:latin typeface="微软雅黑" charset="-122"/>
-                <a:ea typeface="微软雅黑" charset="-122"/>
+                <a:latin typeface="微软雅黑" panose="020B0503020204020204" charset="-122"/>
+                <a:ea typeface="微软雅黑" panose="020B0503020204020204" charset="-122"/>
                 <a:sym typeface="+mn-ea"/>
               </a:rPr>
               <a:t>功能测试验收</a:t>
             </a:r>
             <a:endParaRPr lang="zh-CN" altLang="en-US" sz="2800" b="1" dirty="0">
-              <a:latin typeface="微软雅黑" charset="-122"/>
-              <a:ea typeface="微软雅黑" charset="-122"/>
+              <a:latin typeface="微软雅黑" panose="020B0503020204020204" charset="-122"/>
+              <a:ea typeface="微软雅黑" panose="020B0503020204020204" charset="-122"/>
               <a:sym typeface="+mn-ea"/>
             </a:endParaRPr>
           </a:p>
@@ -11558,7 +11598,7 @@
         </p:nvSpPr>
         <p:spPr>
           <a:xfrm>
-            <a:off x="173778" y="951895"/>
+            <a:off x="173778" y="894745"/>
             <a:ext cx="8235035" cy="5523853"/>
           </a:xfrm>
           <a:prstGeom prst="rect">
@@ -11576,7 +11616,7 @@
           <a:p>
             <a:pPr indent="0">
               <a:lnSpc>
-                <a:spcPct val="110000"/>
+                <a:spcPct val="130000"/>
               </a:lnSpc>
               <a:buFont typeface="Arial" panose="020B0604020202020204" pitchFamily="34" charset="0"/>
               <a:buNone/>
@@ -11586,8 +11626,8 @@
                 <a:solidFill>
                   <a:schemeClr val="tx1"/>
                 </a:solidFill>
-                <a:latin typeface="微软雅黑" charset="-122"/>
-                <a:ea typeface="微软雅黑" charset="-122"/>
+                <a:latin typeface="微软雅黑" panose="020B0503020204020204" charset="-122"/>
+                <a:ea typeface="微软雅黑" panose="020B0503020204020204" charset="-122"/>
                 <a:sym typeface="+mn-ea"/>
               </a:rPr>
               <a:t>3. </a:t>
@@ -11597,8 +11637,8 @@
                 <a:solidFill>
                   <a:schemeClr val="tx1"/>
                 </a:solidFill>
-                <a:latin typeface="微软雅黑" charset="-122"/>
-                <a:ea typeface="微软雅黑" charset="-122"/>
+                <a:latin typeface="微软雅黑" panose="020B0503020204020204" charset="-122"/>
+                <a:ea typeface="微软雅黑" panose="020B0503020204020204" charset="-122"/>
                 <a:sym typeface="+mn-ea"/>
               </a:rPr>
               <a:t>苹果</a:t>
@@ -11608,8 +11648,8 @@
                 <a:solidFill>
                   <a:schemeClr val="tx1"/>
                 </a:solidFill>
-                <a:latin typeface="微软雅黑" charset="-122"/>
-                <a:ea typeface="微软雅黑" charset="-122"/>
+                <a:latin typeface="微软雅黑" panose="020B0503020204020204" charset="-122"/>
+                <a:ea typeface="微软雅黑" panose="020B0503020204020204" charset="-122"/>
                 <a:sym typeface="+mn-ea"/>
               </a:rPr>
               <a:t>——</a:t>
@@ -11619,8 +11659,8 @@
                 <a:solidFill>
                   <a:schemeClr val="tx1"/>
                 </a:solidFill>
-                <a:latin typeface="微软雅黑" charset="-122"/>
-                <a:ea typeface="微软雅黑" charset="-122"/>
+                <a:latin typeface="微软雅黑" panose="020B0503020204020204" charset="-122"/>
+                <a:ea typeface="微软雅黑" panose="020B0503020204020204" charset="-122"/>
                 <a:sym typeface="+mn-ea"/>
               </a:rPr>
               <a:t>新模型加入后，验证整个模型组合</a:t>
@@ -11630,8 +11670,8 @@
                 <a:solidFill>
                   <a:srgbClr val="000000"/>
                 </a:solidFill>
-                <a:latin typeface="微软雅黑" charset="-122"/>
-                <a:ea typeface="微软雅黑" charset="-122"/>
+                <a:latin typeface="微软雅黑" panose="020B0503020204020204" charset="-122"/>
+                <a:ea typeface="微软雅黑" panose="020B0503020204020204" charset="-122"/>
                 <a:cs typeface="+mn-ea"/>
                 <a:sym typeface="+mn-ea"/>
               </a:rPr>
@@ -11642,8 +11682,8 @@
                 <a:solidFill>
                   <a:srgbClr val="000000"/>
                 </a:solidFill>
-                <a:latin typeface="微软雅黑" charset="0"/>
-                <a:ea typeface="微软雅黑" charset="0"/>
+                <a:latin typeface="微软雅黑" panose="020B0503020204020204" charset="-122"/>
+                <a:ea typeface="微软雅黑" panose="020B0503020204020204" charset="-122"/>
                 <a:cs typeface="+mn-ea"/>
                 <a:sym typeface="+mn-ea"/>
               </a:rPr>
@@ -11654,8 +11694,8 @@
                 <a:solidFill>
                   <a:srgbClr val="000000"/>
                 </a:solidFill>
-                <a:latin typeface="微软雅黑" charset="-122"/>
-                <a:ea typeface="微软雅黑" charset="-122"/>
+                <a:latin typeface="微软雅黑" panose="020B0503020204020204" charset="-122"/>
+                <a:ea typeface="微软雅黑" panose="020B0503020204020204" charset="-122"/>
                 <a:cs typeface="+mn-ea"/>
                 <a:sym typeface="+mn-ea"/>
               </a:rPr>
@@ -11665,15 +11705,15 @@
               <a:solidFill>
                 <a:schemeClr val="tx1"/>
               </a:solidFill>
-              <a:latin typeface="微软雅黑" charset="-122"/>
-              <a:ea typeface="微软雅黑" charset="-122"/>
+              <a:latin typeface="微软雅黑" panose="020B0503020204020204" charset="-122"/>
+              <a:ea typeface="微软雅黑" panose="020B0503020204020204" charset="-122"/>
               <a:sym typeface="+mn-ea"/>
             </a:endParaRPr>
           </a:p>
           <a:p>
             <a:pPr indent="0">
               <a:lnSpc>
-                <a:spcPct val="120000"/>
+                <a:spcPct val="130000"/>
               </a:lnSpc>
               <a:buFont typeface="Arial" panose="020B0604020202020204" pitchFamily="34" charset="0"/>
               <a:buNone/>
@@ -11683,8 +11723,8 @@
                 <a:solidFill>
                   <a:srgbClr val="FF0000"/>
                 </a:solidFill>
-                <a:latin typeface="微软雅黑" charset="-122"/>
-                <a:ea typeface="微软雅黑" charset="-122"/>
+                <a:latin typeface="微软雅黑" panose="020B0503020204020204" charset="-122"/>
+                <a:ea typeface="微软雅黑" panose="020B0503020204020204" charset="-122"/>
                 <a:sym typeface="+mn-ea"/>
               </a:rPr>
               <a:t>研究问题与价值：</a:t>
@@ -11694,8 +11734,8 @@
                 <a:solidFill>
                   <a:srgbClr val="000000"/>
                 </a:solidFill>
-                <a:latin typeface="微软雅黑" charset="-122"/>
-                <a:ea typeface="微软雅黑" charset="-122"/>
+                <a:latin typeface="微软雅黑" panose="020B0503020204020204" charset="-122"/>
+                <a:ea typeface="微软雅黑" panose="020B0503020204020204" charset="-122"/>
                 <a:sym typeface="+mn-ea"/>
               </a:rPr>
               <a:t>终端中的多个通信</a:t>
@@ -11705,8 +11745,8 @@
                 <a:solidFill>
                   <a:srgbClr val="000000"/>
                 </a:solidFill>
-                <a:latin typeface="微软雅黑" charset="-122"/>
-                <a:ea typeface="微软雅黑" charset="-122"/>
+                <a:latin typeface="微软雅黑" panose="020B0503020204020204" charset="-122"/>
+                <a:ea typeface="微软雅黑" panose="020B0503020204020204" charset="-122"/>
                 <a:sym typeface="+mn-ea"/>
               </a:rPr>
               <a:t>AI</a:t>
@@ -11716,8 +11756,8 @@
                 <a:solidFill>
                   <a:srgbClr val="000000"/>
                 </a:solidFill>
-                <a:latin typeface="微软雅黑" charset="-122"/>
-                <a:ea typeface="微软雅黑" charset="-122"/>
+                <a:latin typeface="微软雅黑" panose="020B0503020204020204" charset="-122"/>
+                <a:ea typeface="微软雅黑" panose="020B0503020204020204" charset="-122"/>
                 <a:sym typeface="+mn-ea"/>
               </a:rPr>
               <a:t>模型可能相互依赖，一个模型的输出或选择结果会影响后续模型。因此，新模型单独测试合格，加入现有组合后，仍可能导致整体功能退化或资源开销超限。本研究将验收对象扩展到模型组合，</a:t>
@@ -11727,8 +11767,8 @@
                 <a:solidFill>
                   <a:srgbClr val="000000"/>
                 </a:solidFill>
-                <a:latin typeface="微软雅黑" charset="-122"/>
-                <a:ea typeface="微软雅黑" charset="-122"/>
+                <a:latin typeface="微软雅黑" panose="020B0503020204020204" charset="-122"/>
+                <a:ea typeface="微软雅黑" panose="020B0503020204020204" charset="-122"/>
                 <a:sym typeface="+mn-ea"/>
               </a:rPr>
               <a:t>为模型更新能否放行提供依据，降低</a:t>
@@ -11738,8 +11778,8 @@
                 <a:solidFill>
                   <a:srgbClr val="000000"/>
                 </a:solidFill>
-                <a:latin typeface="微软雅黑" charset="-122"/>
-                <a:ea typeface="微软雅黑" charset="-122"/>
+                <a:latin typeface="微软雅黑" panose="020B0503020204020204" charset="-122"/>
+                <a:ea typeface="微软雅黑" panose="020B0503020204020204" charset="-122"/>
                 <a:sym typeface="+mn-ea"/>
               </a:rPr>
               <a:t>“</a:t>
@@ -11749,8 +11789,8 @@
                 <a:solidFill>
                   <a:srgbClr val="000000"/>
                 </a:solidFill>
-                <a:latin typeface="微软雅黑" charset="-122"/>
-                <a:ea typeface="微软雅黑" charset="-122"/>
+                <a:latin typeface="微软雅黑" panose="020B0503020204020204" charset="-122"/>
+                <a:ea typeface="微软雅黑" panose="020B0503020204020204" charset="-122"/>
                 <a:sym typeface="+mn-ea"/>
               </a:rPr>
               <a:t>单模型合格、整机功能却变差</a:t>
@@ -11760,8 +11800,8 @@
                 <a:solidFill>
                   <a:srgbClr val="000000"/>
                 </a:solidFill>
-                <a:latin typeface="微软雅黑" charset="-122"/>
-                <a:ea typeface="微软雅黑" charset="-122"/>
+                <a:latin typeface="微软雅黑" panose="020B0503020204020204" charset="-122"/>
+                <a:ea typeface="微软雅黑" panose="020B0503020204020204" charset="-122"/>
                 <a:sym typeface="+mn-ea"/>
               </a:rPr>
               <a:t>”</a:t>
@@ -11771,8 +11811,8 @@
                 <a:solidFill>
                   <a:srgbClr val="000000"/>
                 </a:solidFill>
-                <a:latin typeface="微软雅黑" charset="-122"/>
-                <a:ea typeface="微软雅黑" charset="-122"/>
+                <a:latin typeface="微软雅黑" panose="020B0503020204020204" charset="-122"/>
+                <a:ea typeface="微软雅黑" panose="020B0503020204020204" charset="-122"/>
                 <a:sym typeface="+mn-ea"/>
               </a:rPr>
               <a:t>的风险。</a:t>
@@ -11781,15 +11821,15 @@
               <a:solidFill>
                 <a:srgbClr val="000000"/>
               </a:solidFill>
-              <a:latin typeface="微软雅黑" charset="-122"/>
-              <a:ea typeface="微软雅黑" charset="-122"/>
+              <a:latin typeface="微软雅黑" panose="020B0503020204020204" charset="-122"/>
+              <a:ea typeface="微软雅黑" panose="020B0503020204020204" charset="-122"/>
               <a:sym typeface="+mn-ea"/>
             </a:endParaRPr>
           </a:p>
           <a:p>
             <a:pPr indent="0">
               <a:lnSpc>
-                <a:spcPct val="120000"/>
+                <a:spcPct val="130000"/>
               </a:lnSpc>
               <a:buFont typeface="Arial" panose="020B0604020202020204" pitchFamily="34" charset="0"/>
               <a:buNone/>
@@ -11799,8 +11839,8 @@
                 <a:solidFill>
                   <a:srgbClr val="FF0000"/>
                 </a:solidFill>
-                <a:latin typeface="微软雅黑" charset="-122"/>
-                <a:ea typeface="微软雅黑" charset="-122"/>
+                <a:latin typeface="微软雅黑" panose="020B0503020204020204" charset="-122"/>
+                <a:ea typeface="微软雅黑" panose="020B0503020204020204" charset="-122"/>
                 <a:sym typeface="+mn-ea"/>
               </a:rPr>
               <a:t>核心思路：</a:t>
@@ -11810,8 +11850,8 @@
                 <a:solidFill>
                   <a:srgbClr val="000000"/>
                 </a:solidFill>
-                <a:latin typeface="微软雅黑" charset="-122"/>
-                <a:ea typeface="微软雅黑" charset="-122"/>
+                <a:latin typeface="微软雅黑" panose="020B0503020204020204" charset="-122"/>
+                <a:ea typeface="微软雅黑" panose="020B0503020204020204" charset="-122"/>
                 <a:sym typeface="+mn-ea"/>
               </a:rPr>
               <a:t>围绕模型所参与的通信功能，开展加入新模型前后的组合对照测试。</a:t>
@@ -11821,19 +11861,19 @@
                 <a:solidFill>
                   <a:srgbClr val="000000"/>
                 </a:solidFill>
-                <a:latin typeface="微软雅黑" charset="-122"/>
-                <a:ea typeface="微软雅黑" charset="-122"/>
-                <a:sym typeface="+mn-ea"/>
-              </a:rPr>
-              <a:t>先使用旧版本或传统代码建立基准，再将待测模型加入组合，重新运行代表性测试场景，比较最终功能表现及资源消耗，决定是否接受更新。这种在系统更新后重新检查原有功能的做法，称为回归测试。</a:t>
+                <a:latin typeface="微软雅黑" panose="020B0503020204020204" charset="-122"/>
+                <a:ea typeface="微软雅黑" panose="020B0503020204020204" charset="-122"/>
+                <a:sym typeface="+mn-ea"/>
+              </a:rPr>
+              <a:t>先使用旧版本或传统代码建立基准，再将待测模型加入组合，重新运行代表性测试场景，比较最终功能表现及资源消耗，决定是否接受更新。</a:t>
             </a:r>
             <a:r>
               <a:rPr lang="zh-CN" altLang="en-US" sz="1400" b="1" dirty="0">
                 <a:solidFill>
                   <a:srgbClr val="000000"/>
                 </a:solidFill>
-                <a:latin typeface="微软雅黑" charset="-122"/>
-                <a:ea typeface="微软雅黑" charset="-122"/>
+                <a:latin typeface="微软雅黑" panose="020B0503020204020204" charset="-122"/>
+                <a:ea typeface="微软雅黑" panose="020B0503020204020204" charset="-122"/>
                 <a:sym typeface="+mn-ea"/>
               </a:rPr>
               <a:t>右图展示终端执行这一验收过程的主要步骤。</a:t>
@@ -11842,15 +11882,15 @@
               <a:solidFill>
                 <a:srgbClr val="000000"/>
               </a:solidFill>
-              <a:latin typeface="微软雅黑" charset="-122"/>
-              <a:ea typeface="微软雅黑" charset="-122"/>
+              <a:latin typeface="微软雅黑" panose="020B0503020204020204" charset="-122"/>
+              <a:ea typeface="微软雅黑" panose="020B0503020204020204" charset="-122"/>
               <a:sym typeface="+mn-ea"/>
             </a:endParaRPr>
           </a:p>
           <a:p>
             <a:pPr indent="0">
               <a:lnSpc>
-                <a:spcPct val="110000"/>
+                <a:spcPct val="130000"/>
               </a:lnSpc>
               <a:buFont typeface="Arial" panose="020B0604020202020204" pitchFamily="34" charset="0"/>
               <a:buNone/>
@@ -11860,8 +11900,8 @@
                 <a:solidFill>
                   <a:srgbClr val="FF0000"/>
                 </a:solidFill>
-                <a:latin typeface="微软雅黑" charset="-122"/>
-                <a:ea typeface="微软雅黑" charset="-122"/>
+                <a:latin typeface="微软雅黑" panose="020B0503020204020204" charset="-122"/>
+                <a:ea typeface="微软雅黑" panose="020B0503020204020204" charset="-122"/>
                 <a:sym typeface="+mn-ea"/>
               </a:rPr>
               <a:t>研究方法：</a:t>
@@ -11870,15 +11910,15 @@
               <a:solidFill>
                 <a:srgbClr val="FF0000"/>
               </a:solidFill>
-              <a:latin typeface="微软雅黑" charset="-122"/>
-              <a:ea typeface="微软雅黑" charset="-122"/>
+              <a:latin typeface="微软雅黑" panose="020B0503020204020204" charset="-122"/>
+              <a:ea typeface="微软雅黑" panose="020B0503020204020204" charset="-122"/>
               <a:sym typeface="+mn-ea"/>
             </a:endParaRPr>
           </a:p>
           <a:p>
             <a:pPr indent="0">
               <a:lnSpc>
-                <a:spcPct val="110000"/>
+                <a:spcPct val="130000"/>
               </a:lnSpc>
               <a:buFont typeface="Arial" panose="020B0604020202020204" pitchFamily="34" charset="0"/>
               <a:buNone/>
@@ -11888,8 +11928,8 @@
                 <a:solidFill>
                   <a:schemeClr val="tx1"/>
                 </a:solidFill>
-                <a:latin typeface="微软雅黑" charset="-122"/>
-                <a:ea typeface="微软雅黑" charset="-122"/>
+                <a:latin typeface="微软雅黑" panose="020B0503020204020204" charset="-122"/>
+                <a:ea typeface="微软雅黑" panose="020B0503020204020204" charset="-122"/>
                 <a:sym typeface="+mn-ea"/>
               </a:rPr>
               <a:t>a. </a:t>
@@ -11899,8 +11939,8 @@
                 <a:solidFill>
                   <a:schemeClr val="tx1"/>
                 </a:solidFill>
-                <a:latin typeface="微软雅黑" charset="-122"/>
-                <a:ea typeface="微软雅黑" charset="-122"/>
+                <a:latin typeface="微软雅黑" panose="020B0503020204020204" charset="-122"/>
+                <a:ea typeface="微软雅黑" panose="020B0503020204020204" charset="-122"/>
                 <a:sym typeface="+mn-ea"/>
               </a:rPr>
               <a:t>梳理模型依赖，确定测试对象。</a:t>
@@ -11910,8 +11950,8 @@
                 <a:solidFill>
                   <a:schemeClr val="tx1"/>
                 </a:solidFill>
-                <a:latin typeface="微软雅黑" charset="-122"/>
-                <a:ea typeface="微软雅黑" charset="-122"/>
+                <a:latin typeface="微软雅黑" panose="020B0503020204020204" charset="-122"/>
+                <a:ea typeface="微软雅黑" panose="020B0503020204020204" charset="-122"/>
                 <a:sym typeface="+mn-ea"/>
               </a:rPr>
               <a:t>终端接收新模型后，将其标记为待测试，并识别它与现有模型之间的输入输出、选择控制等关系。记录相关模型标识和版本，确定需要检查的组合及通信功能。</a:t>
@@ -11920,15 +11960,15 @@
               <a:solidFill>
                 <a:schemeClr val="tx1"/>
               </a:solidFill>
-              <a:latin typeface="微软雅黑" charset="-122"/>
-              <a:ea typeface="微软雅黑" charset="-122"/>
+              <a:latin typeface="微软雅黑" panose="020B0503020204020204" charset="-122"/>
+              <a:ea typeface="微软雅黑" panose="020B0503020204020204" charset="-122"/>
               <a:sym typeface="+mn-ea"/>
             </a:endParaRPr>
           </a:p>
           <a:p>
             <a:pPr indent="0">
               <a:lnSpc>
-                <a:spcPct val="110000"/>
+                <a:spcPct val="130000"/>
               </a:lnSpc>
               <a:buFont typeface="Arial" panose="020B0604020202020204" pitchFamily="34" charset="0"/>
               <a:buNone/>
@@ -11938,8 +11978,8 @@
                 <a:solidFill>
                   <a:schemeClr val="tx1"/>
                 </a:solidFill>
-                <a:latin typeface="微软雅黑" charset="-122"/>
-                <a:ea typeface="微软雅黑" charset="-122"/>
+                <a:latin typeface="微软雅黑" panose="020B0503020204020204" charset="-122"/>
+                <a:ea typeface="微软雅黑" panose="020B0503020204020204" charset="-122"/>
                 <a:sym typeface="+mn-ea"/>
               </a:rPr>
               <a:t>b. </a:t>
@@ -11949,8 +11989,8 @@
                 <a:solidFill>
                   <a:schemeClr val="tx1"/>
                 </a:solidFill>
-                <a:latin typeface="微软雅黑" charset="-122"/>
-                <a:ea typeface="微软雅黑" charset="-122"/>
+                <a:latin typeface="微软雅黑" panose="020B0503020204020204" charset="-122"/>
+                <a:ea typeface="微软雅黑" panose="020B0503020204020204" charset="-122"/>
                 <a:sym typeface="+mn-ea"/>
               </a:rPr>
               <a:t>运行基准测试，保存功能输出。</a:t>
@@ -11960,25 +12000,25 @@
                 <a:solidFill>
                   <a:schemeClr val="tx1"/>
                 </a:solidFill>
-                <a:latin typeface="微软雅黑" charset="-122"/>
-                <a:ea typeface="微软雅黑" charset="-122"/>
-                <a:sym typeface="+mn-ea"/>
-              </a:rPr>
-              <a:t>不使用待测模型，而采用旧版本或传统代码运行对应功能。根据所选功能，以无线测量或上游模型输出等作为输入，保存组合产生的最终推理结果，并记录功能性能、功耗和计算资源指标。</a:t>
+                <a:latin typeface="微软雅黑" panose="020B0503020204020204" charset="-122"/>
+                <a:ea typeface="微软雅黑" panose="020B0503020204020204" charset="-122"/>
+                <a:sym typeface="+mn-ea"/>
+              </a:rPr>
+              <a:t>不使用待测模型，而采用旧版本或传统代码运行对应功能。根据所选功能，以无线测量等作为输入，保存组合产生的最终推理结果，并记录功能性能、功耗和计算资源指标。</a:t>
             </a:r>
             <a:endParaRPr lang="zh-CN" altLang="en-US" sz="1400" dirty="0">
               <a:solidFill>
                 <a:schemeClr val="tx1"/>
               </a:solidFill>
-              <a:latin typeface="微软雅黑" charset="-122"/>
-              <a:ea typeface="微软雅黑" charset="-122"/>
+              <a:latin typeface="微软雅黑" panose="020B0503020204020204" charset="-122"/>
+              <a:ea typeface="微软雅黑" panose="020B0503020204020204" charset="-122"/>
               <a:sym typeface="+mn-ea"/>
             </a:endParaRPr>
           </a:p>
           <a:p>
             <a:pPr indent="0">
               <a:lnSpc>
-                <a:spcPct val="120000"/>
+                <a:spcPct val="130000"/>
               </a:lnSpc>
               <a:buFont typeface="Arial" panose="020B0604020202020204" pitchFamily="34" charset="0"/>
               <a:buNone/>
@@ -11988,8 +12028,8 @@
                 <a:solidFill>
                   <a:schemeClr val="tx1"/>
                 </a:solidFill>
-                <a:latin typeface="微软雅黑" charset="-122"/>
-                <a:ea typeface="微软雅黑" charset="-122"/>
+                <a:latin typeface="微软雅黑" panose="020B0503020204020204" charset="-122"/>
+                <a:ea typeface="微软雅黑" panose="020B0503020204020204" charset="-122"/>
                 <a:sym typeface="+mn-ea"/>
               </a:rPr>
               <a:t>c. </a:t>
@@ -11999,8 +12039,8 @@
                 <a:solidFill>
                   <a:schemeClr val="tx1"/>
                 </a:solidFill>
-                <a:latin typeface="微软雅黑" charset="-122"/>
-                <a:ea typeface="微软雅黑" charset="-122"/>
+                <a:latin typeface="微软雅黑" panose="020B0503020204020204" charset="-122"/>
+                <a:ea typeface="微软雅黑" panose="020B0503020204020204" charset="-122"/>
                 <a:sym typeface="+mn-ea"/>
               </a:rPr>
               <a:t>运行候选组合，比较更新影响。将待测模型加入组合，获得更新后的最终推理结果及相同指标。对照测试应控制场景、输入和其他模型版本，重点判断最终功能是否改善、原有能力是否退化，以及资源开销是否满足要求</a:t>
@@ -12010,8 +12050,8 @@
                 <a:solidFill>
                   <a:schemeClr val="tx1"/>
                 </a:solidFill>
-                <a:latin typeface="微软雅黑" charset="-122"/>
-                <a:ea typeface="微软雅黑" charset="-122"/>
+                <a:latin typeface="微软雅黑" panose="020B0503020204020204" charset="-122"/>
+                <a:ea typeface="微软雅黑" panose="020B0503020204020204" charset="-122"/>
                 <a:sym typeface="+mn-ea"/>
               </a:rPr>
               <a:t>，形成组合验收结论。</a:t>
@@ -12020,15 +12060,15 @@
               <a:solidFill>
                 <a:schemeClr val="tx1"/>
               </a:solidFill>
-              <a:latin typeface="微软雅黑" charset="-122"/>
-              <a:ea typeface="微软雅黑" charset="-122"/>
+              <a:latin typeface="微软雅黑" panose="020B0503020204020204" charset="-122"/>
+              <a:ea typeface="微软雅黑" panose="020B0503020204020204" charset="-122"/>
               <a:sym typeface="+mn-ea"/>
             </a:endParaRPr>
           </a:p>
           <a:p>
             <a:pPr indent="0">
               <a:lnSpc>
-                <a:spcPct val="110000"/>
+                <a:spcPct val="130000"/>
               </a:lnSpc>
               <a:buFont typeface="Arial" panose="020B0604020202020204" pitchFamily="34" charset="0"/>
               <a:buNone/>
@@ -12038,8 +12078,8 @@
                 <a:solidFill>
                   <a:schemeClr val="tx1"/>
                 </a:solidFill>
-                <a:latin typeface="微软雅黑" charset="-122"/>
-                <a:ea typeface="微软雅黑" charset="-122"/>
+                <a:latin typeface="微软雅黑" panose="020B0503020204020204" charset="-122"/>
+                <a:ea typeface="微软雅黑" panose="020B0503020204020204" charset="-122"/>
                 <a:sym typeface="+mn-ea"/>
               </a:rPr>
               <a:t>d. </a:t>
@@ -12049,8 +12089,8 @@
                 <a:solidFill>
                   <a:srgbClr val="000000"/>
                 </a:solidFill>
-                <a:latin typeface="微软雅黑" charset="-122"/>
-                <a:ea typeface="微软雅黑" charset="-122"/>
+                <a:latin typeface="微软雅黑" panose="020B0503020204020204" charset="-122"/>
+                <a:ea typeface="微软雅黑" panose="020B0503020204020204" charset="-122"/>
                 <a:sym typeface="+mn-ea"/>
               </a:rPr>
               <a:t>反馈验收结论，衔接监测与纠正。</a:t>
@@ -12060,8 +12100,8 @@
                 <a:solidFill>
                   <a:srgbClr val="000000"/>
                 </a:solidFill>
-                <a:latin typeface="微软雅黑" charset="-122"/>
-                <a:ea typeface="微软雅黑" charset="-122"/>
+                <a:latin typeface="微软雅黑" panose="020B0503020204020204" charset="-122"/>
+                <a:ea typeface="微软雅黑" panose="020B0503020204020204" charset="-122"/>
                 <a:sym typeface="+mn-ea"/>
               </a:rPr>
               <a:t>通过测试则接受更新并标记为已验证；未通过则拒绝，并向网络反馈原因。使用后继续监测组合表现，发现退化时开展附加测试定位相关模型，采取恢复旧版本、回退传统代码或重新训练等措施；修复后的更新仍需再次验收。</a:t>
@@ -12070,15 +12110,15 @@
               <a:solidFill>
                 <a:srgbClr val="000000"/>
               </a:solidFill>
-              <a:latin typeface="微软雅黑" charset="-122"/>
-              <a:ea typeface="微软雅黑" charset="-122"/>
+              <a:latin typeface="微软雅黑" panose="020B0503020204020204" charset="-122"/>
+              <a:ea typeface="微软雅黑" panose="020B0503020204020204" charset="-122"/>
               <a:sym typeface="+mn-ea"/>
             </a:endParaRPr>
           </a:p>
           <a:p>
             <a:pPr indent="0">
               <a:lnSpc>
-                <a:spcPct val="110000"/>
+                <a:spcPct val="130000"/>
               </a:lnSpc>
               <a:buFont typeface="Arial" panose="020B0604020202020204" pitchFamily="34" charset="0"/>
               <a:buNone/>
@@ -12088,8 +12128,8 @@
                 <a:solidFill>
                   <a:srgbClr val="FF0000"/>
                 </a:solidFill>
-                <a:latin typeface="微软雅黑" charset="-122"/>
-                <a:ea typeface="微软雅黑" charset="-122"/>
+                <a:latin typeface="微软雅黑" panose="020B0503020204020204" charset="-122"/>
+                <a:ea typeface="微软雅黑" panose="020B0503020204020204" charset="-122"/>
                 <a:sym typeface="+mn-ea"/>
               </a:rPr>
               <a:t>成熟度与研究启示：</a:t>
@@ -12099,8 +12139,8 @@
                 <a:solidFill>
                   <a:schemeClr val="tx1"/>
                 </a:solidFill>
-                <a:latin typeface="微软雅黑" charset="-122"/>
-                <a:ea typeface="微软雅黑" charset="-122"/>
+                <a:latin typeface="微软雅黑" panose="020B0503020204020204" charset="-122"/>
+                <a:ea typeface="微软雅黑" panose="020B0503020204020204" charset="-122"/>
                 <a:sym typeface="+mn-ea"/>
               </a:rPr>
               <a:t>处于机制设计阶段</a:t>
@@ -12110,8 +12150,8 @@
                 <a:solidFill>
                   <a:schemeClr val="tx1"/>
                 </a:solidFill>
-                <a:latin typeface="微软雅黑" charset="-122"/>
-                <a:ea typeface="微软雅黑" charset="-122"/>
+                <a:latin typeface="微软雅黑" panose="020B0503020204020204" charset="-122"/>
+                <a:ea typeface="微软雅黑" panose="020B0503020204020204" charset="-122"/>
                 <a:sym typeface="+mn-ea"/>
               </a:rPr>
               <a:t>，已提出组合测试、准入、监测和纠正流程；未提供配套代码、统一数值门限或可复现的定量验证。可据此研究</a:t>
@@ -12121,8 +12161,8 @@
                 <a:solidFill>
                   <a:schemeClr val="tx1"/>
                 </a:solidFill>
-                <a:latin typeface="微软雅黑" charset="-122"/>
-                <a:ea typeface="微软雅黑" charset="-122"/>
+                <a:latin typeface="微软雅黑" panose="020B0503020204020204" charset="-122"/>
+                <a:ea typeface="微软雅黑" panose="020B0503020204020204" charset="-122"/>
                 <a:sym typeface="+mn-ea"/>
               </a:rPr>
               <a:t>组合性能与资源约束共同决定模型更新准入</a:t>
@@ -12132,8 +12172,8 @@
                 <a:solidFill>
                   <a:schemeClr val="tx1"/>
                 </a:solidFill>
-                <a:latin typeface="微软雅黑" charset="-122"/>
-                <a:ea typeface="微软雅黑" charset="-122"/>
+                <a:latin typeface="微软雅黑" panose="020B0503020204020204" charset="-122"/>
+                <a:ea typeface="微软雅黑" panose="020B0503020204020204" charset="-122"/>
                 <a:sym typeface="+mn-ea"/>
               </a:rPr>
               <a:t>的测试方法。</a:t>
@@ -12142,8 +12182,8 @@
               <a:solidFill>
                 <a:schemeClr val="tx1"/>
               </a:solidFill>
-              <a:latin typeface="微软雅黑" charset="-122"/>
-              <a:ea typeface="微软雅黑" charset="-122"/>
+              <a:latin typeface="微软雅黑" panose="020B0503020204020204" charset="-122"/>
+              <a:ea typeface="微软雅黑" panose="020B0503020204020204" charset="-122"/>
               <a:sym typeface="+mn-ea"/>
             </a:endParaRPr>
           </a:p>
@@ -12240,7 +12280,7 @@
       </p:sp>
       <p:pic>
         <p:nvPicPr>
-          <p:cNvPr id="1" name="图片 0" descr="post_object_image_2998800772"/>
+          <p:cNvPr id="4" name="图片 3" descr="post_object_image_2998800772"/>
           <p:cNvPicPr>
             <a:picLocks noChangeAspect="1"/>
           </p:cNvPicPr>
@@ -12309,8 +12349,8 @@
           <a:p>
             <a:r>
               <a:rPr lang="zh-CN" altLang="en-US" sz="2800" b="1" dirty="0">
-                <a:latin typeface="微软雅黑" charset="-122"/>
-                <a:ea typeface="微软雅黑" charset="-122"/>
+                <a:latin typeface="微软雅黑" panose="020B0503020204020204" charset="-122"/>
+                <a:ea typeface="微软雅黑" panose="020B0503020204020204" charset="-122"/>
                 <a:sym typeface="+mn-ea"/>
               </a:rPr>
               <a:t>方向二：</a:t>
@@ -12320,8 +12360,8 @@
                 <a:solidFill>
                   <a:schemeClr val="tx1"/>
                 </a:solidFill>
-                <a:latin typeface="微软雅黑" charset="0"/>
-                <a:ea typeface="微软雅黑" charset="0"/>
+                <a:latin typeface="微软雅黑" panose="020B0503020204020204" charset="-122"/>
+                <a:ea typeface="微软雅黑" panose="020B0503020204020204" charset="-122"/>
                 <a:sym typeface="+mn-ea"/>
               </a:rPr>
               <a:t>R</a:t>
@@ -12331,15 +12371,15 @@
                 <a:solidFill>
                   <a:schemeClr val="tx1"/>
                 </a:solidFill>
-                <a:latin typeface="微软雅黑" charset="0"/>
-                <a:ea typeface="微软雅黑" charset="0"/>
+                <a:latin typeface="微软雅黑" panose="020B0503020204020204" charset="-122"/>
+                <a:ea typeface="微软雅黑" panose="020B0503020204020204" charset="-122"/>
                 <a:sym typeface="+mn-ea"/>
               </a:rPr>
               <a:t>adio Map</a:t>
             </a:r>
             <a:endParaRPr lang="zh-CN" altLang="en-US">
-              <a:latin typeface="微软雅黑" charset="-122"/>
-              <a:ea typeface="微软雅黑" charset="-122"/>
+              <a:latin typeface="微软雅黑" panose="020B0503020204020204" charset="-122"/>
+              <a:ea typeface="微软雅黑" panose="020B0503020204020204" charset="-122"/>
               <a:sym typeface="+mn-ea"/>
             </a:endParaRPr>
           </a:p>
@@ -12381,8 +12421,8 @@
                 <a:solidFill>
                   <a:schemeClr val="tx1"/>
                 </a:solidFill>
-                <a:latin typeface="微软雅黑" charset="-122"/>
-                <a:ea typeface="微软雅黑" charset="-122"/>
+                <a:latin typeface="微软雅黑" panose="020B0503020204020204" charset="-122"/>
+                <a:ea typeface="微软雅黑" panose="020B0503020204020204" charset="-122"/>
                 <a:sym typeface="+mn-ea"/>
               </a:rPr>
               <a:t>1. Vodafone——</a:t>
@@ -12392,8 +12432,8 @@
                 <a:solidFill>
                   <a:schemeClr val="tx1"/>
                 </a:solidFill>
-                <a:latin typeface="微软雅黑" charset="-122"/>
-                <a:ea typeface="微软雅黑" charset="-122"/>
+                <a:latin typeface="微软雅黑" panose="020B0503020204020204" charset="-122"/>
+                <a:ea typeface="微软雅黑" panose="020B0503020204020204" charset="-122"/>
                 <a:sym typeface="+mn-ea"/>
               </a:rPr>
               <a:t>利用终端众包测量，生成蜂窝覆盖地图并识别薄弱区域</a:t>
@@ -12403,8 +12443,8 @@
                 <a:solidFill>
                   <a:srgbClr val="000000"/>
                 </a:solidFill>
-                <a:latin typeface="微软雅黑" charset="-122"/>
-                <a:ea typeface="微软雅黑" charset="-122"/>
+                <a:latin typeface="微软雅黑" panose="020B0503020204020204" charset="-122"/>
+                <a:ea typeface="微软雅黑" panose="020B0503020204020204" charset="-122"/>
                 <a:cs typeface="+mn-ea"/>
                 <a:sym typeface="+mn-ea"/>
               </a:rPr>
@@ -12415,8 +12455,8 @@
                 <a:solidFill>
                   <a:srgbClr val="000000"/>
                 </a:solidFill>
-                <a:latin typeface="微软雅黑" charset="0"/>
-                <a:ea typeface="微软雅黑" charset="0"/>
+                <a:latin typeface="微软雅黑" panose="020B0503020204020204" charset="-122"/>
+                <a:ea typeface="微软雅黑" panose="020B0503020204020204" charset="-122"/>
                 <a:cs typeface="+mn-ea"/>
                 <a:sym typeface="+mn-ea"/>
               </a:rPr>
@@ -12427,8 +12467,8 @@
                 <a:solidFill>
                   <a:srgbClr val="000000"/>
                 </a:solidFill>
-                <a:latin typeface="微软雅黑" charset="-122"/>
-                <a:ea typeface="微软雅黑" charset="-122"/>
+                <a:latin typeface="微软雅黑" panose="020B0503020204020204" charset="-122"/>
+                <a:ea typeface="微软雅黑" panose="020B0503020204020204" charset="-122"/>
                 <a:cs typeface="+mn-ea"/>
                 <a:sym typeface="+mn-ea"/>
               </a:rPr>
@@ -12438,8 +12478,8 @@
               <a:solidFill>
                 <a:schemeClr val="tx1"/>
               </a:solidFill>
-              <a:latin typeface="微软雅黑" charset="-122"/>
-              <a:ea typeface="微软雅黑" charset="-122"/>
+              <a:latin typeface="微软雅黑" panose="020B0503020204020204" charset="-122"/>
+              <a:ea typeface="微软雅黑" panose="020B0503020204020204" charset="-122"/>
               <a:sym typeface="+mn-ea"/>
             </a:endParaRPr>
           </a:p>
@@ -12456,8 +12496,8 @@
                 <a:solidFill>
                   <a:srgbClr val="FF0000"/>
                 </a:solidFill>
-                <a:latin typeface="微软雅黑" charset="-122"/>
-                <a:ea typeface="微软雅黑" charset="-122"/>
+                <a:latin typeface="微软雅黑" panose="020B0503020204020204" charset="-122"/>
+                <a:ea typeface="微软雅黑" panose="020B0503020204020204" charset="-122"/>
                 <a:sym typeface="+mn-ea"/>
               </a:rPr>
               <a:t>研究问题与价值：</a:t>
@@ -12467,8 +12507,8 @@
                 <a:solidFill>
                   <a:srgbClr val="000000"/>
                 </a:solidFill>
-                <a:latin typeface="微软雅黑" charset="-122"/>
-                <a:ea typeface="微软雅黑" charset="-122"/>
+                <a:latin typeface="微软雅黑" panose="020B0503020204020204" charset="-122"/>
+                <a:ea typeface="微软雅黑" panose="020B0503020204020204" charset="-122"/>
                 <a:sym typeface="+mn-ea"/>
               </a:rPr>
               <a:t>终端在日常使用中积累了大量带位置的信号测量和服务状态记录，但零散测量点难以直接说明一个小区覆盖到哪里、哪些区域可能存在覆盖问题。本研究将这些记录转化为覆盖边界与信号等级区域，</a:t>
@@ -12478,8 +12518,8 @@
                 <a:solidFill>
                   <a:srgbClr val="000000"/>
                 </a:solidFill>
-                <a:latin typeface="微软雅黑" charset="-122"/>
-                <a:ea typeface="微软雅黑" charset="-122"/>
+                <a:latin typeface="微软雅黑" panose="020B0503020204020204" charset="-122"/>
+                <a:ea typeface="微软雅黑" panose="020B0503020204020204" charset="-122"/>
                 <a:sym typeface="+mn-ea"/>
               </a:rPr>
               <a:t>帮助筛选疑似薄弱位置，为后续场测复核、问题场景收集和测试选点提供依据。</a:t>
@@ -12488,8 +12528,8 @@
               <a:solidFill>
                 <a:srgbClr val="000000"/>
               </a:solidFill>
-              <a:latin typeface="微软雅黑" charset="-122"/>
-              <a:ea typeface="微软雅黑" charset="-122"/>
+              <a:latin typeface="微软雅黑" panose="020B0503020204020204" charset="-122"/>
+              <a:ea typeface="微软雅黑" panose="020B0503020204020204" charset="-122"/>
               <a:sym typeface="+mn-ea"/>
             </a:endParaRPr>
           </a:p>
@@ -12506,8 +12546,8 @@
                 <a:solidFill>
                   <a:srgbClr val="FF0000"/>
                 </a:solidFill>
-                <a:latin typeface="微软雅黑" charset="-122"/>
-                <a:ea typeface="微软雅黑" charset="-122"/>
+                <a:latin typeface="微软雅黑" panose="020B0503020204020204" charset="-122"/>
+                <a:ea typeface="微软雅黑" panose="020B0503020204020204" charset="-122"/>
                 <a:sym typeface="+mn-ea"/>
               </a:rPr>
               <a:t>核心思路：</a:t>
@@ -12517,8 +12557,8 @@
                 <a:solidFill>
                   <a:srgbClr val="000000"/>
                 </a:solidFill>
-                <a:latin typeface="微软雅黑" charset="-122"/>
-                <a:ea typeface="微软雅黑" charset="-122"/>
+                <a:latin typeface="微软雅黑" panose="020B0503020204020204" charset="-122"/>
+                <a:ea typeface="微软雅黑" panose="020B0503020204020204" charset="-122"/>
                 <a:sym typeface="+mn-ea"/>
               </a:rPr>
               <a:t>在数据分析平台上，按小区整理终端众包记录，利用单类支持向量机（</a:t>
@@ -12528,8 +12568,8 @@
                 <a:solidFill>
                   <a:srgbClr val="000000"/>
                 </a:solidFill>
-                <a:latin typeface="微软雅黑" charset="-122"/>
-                <a:ea typeface="微软雅黑" charset="-122"/>
+                <a:latin typeface="微软雅黑" panose="020B0503020204020204" charset="-122"/>
+                <a:ea typeface="微软雅黑" panose="020B0503020204020204" charset="-122"/>
                 <a:sym typeface="+mn-ea"/>
               </a:rPr>
               <a:t>OC-SVM</a:t>
@@ -12539,8 +12579,8 @@
                 <a:solidFill>
                   <a:srgbClr val="000000"/>
                 </a:solidFill>
-                <a:latin typeface="微软雅黑" charset="-122"/>
-                <a:ea typeface="微软雅黑" charset="-122"/>
+                <a:latin typeface="微软雅黑" panose="020B0503020204020204" charset="-122"/>
+                <a:ea typeface="微软雅黑" panose="020B0503020204020204" charset="-122"/>
                 <a:sym typeface="+mn-ea"/>
               </a:rPr>
               <a:t>）</a:t>
@@ -12550,8 +12590,8 @@
                 <a:solidFill>
                   <a:srgbClr val="000000"/>
                 </a:solidFill>
-                <a:latin typeface="微软雅黑" charset="-122"/>
-                <a:ea typeface="微软雅黑" charset="-122"/>
+                <a:latin typeface="微软雅黑" panose="020B0503020204020204" charset="-122"/>
+                <a:ea typeface="微软雅黑" panose="020B0503020204020204" charset="-122"/>
                 <a:sym typeface="+mn-ea"/>
               </a:rPr>
               <a:t>学习不同信号等级的空间分布。它根据已有测量形成可弯曲的覆盖边界，减少传统凸包法将大范围空白区域一并判为覆盖的问题，再结合弱信号和失去服务记录分析薄弱区域。</a:t>
@@ -12560,8 +12600,8 @@
               <a:solidFill>
                 <a:srgbClr val="000000"/>
               </a:solidFill>
-              <a:latin typeface="微软雅黑" charset="-122"/>
-              <a:ea typeface="微软雅黑" charset="-122"/>
+              <a:latin typeface="微软雅黑" panose="020B0503020204020204" charset="-122"/>
+              <a:ea typeface="微软雅黑" panose="020B0503020204020204" charset="-122"/>
               <a:sym typeface="+mn-ea"/>
             </a:endParaRPr>
           </a:p>
@@ -12578,8 +12618,8 @@
                 <a:solidFill>
                   <a:srgbClr val="FF0000"/>
                 </a:solidFill>
-                <a:latin typeface="微软雅黑" charset="-122"/>
-                <a:ea typeface="微软雅黑" charset="-122"/>
+                <a:latin typeface="微软雅黑" panose="020B0503020204020204" charset="-122"/>
+                <a:ea typeface="微软雅黑" panose="020B0503020204020204" charset="-122"/>
                 <a:sym typeface="+mn-ea"/>
               </a:rPr>
               <a:t>研究方法：</a:t>
@@ -12588,8 +12628,8 @@
               <a:solidFill>
                 <a:srgbClr val="FF0000"/>
               </a:solidFill>
-              <a:latin typeface="微软雅黑" charset="-122"/>
-              <a:ea typeface="微软雅黑" charset="-122"/>
+              <a:latin typeface="微软雅黑" panose="020B0503020204020204" charset="-122"/>
+              <a:ea typeface="微软雅黑" panose="020B0503020204020204" charset="-122"/>
               <a:sym typeface="+mn-ea"/>
             </a:endParaRPr>
           </a:p>
@@ -12606,8 +12646,8 @@
                 <a:solidFill>
                   <a:schemeClr val="tx1"/>
                 </a:solidFill>
-                <a:latin typeface="微软雅黑" charset="-122"/>
-                <a:ea typeface="微软雅黑" charset="-122"/>
+                <a:latin typeface="微软雅黑" panose="020B0503020204020204" charset="-122"/>
+                <a:ea typeface="微软雅黑" panose="020B0503020204020204" charset="-122"/>
                 <a:sym typeface="+mn-ea"/>
               </a:rPr>
               <a:t>a. </a:t>
@@ -12617,8 +12657,8 @@
                 <a:solidFill>
                   <a:schemeClr val="tx1"/>
                 </a:solidFill>
-                <a:latin typeface="微软雅黑" charset="-122"/>
-                <a:ea typeface="微软雅黑" charset="-122"/>
+                <a:latin typeface="微软雅黑" panose="020B0503020204020204" charset="-122"/>
+                <a:ea typeface="微软雅黑" panose="020B0503020204020204" charset="-122"/>
                 <a:sym typeface="+mn-ea"/>
               </a:rPr>
               <a:t>按小区整理记录，形成空间分析输入。</a:t>
@@ -12628,8 +12668,8 @@
                 <a:solidFill>
                   <a:schemeClr val="tx1"/>
                 </a:solidFill>
-                <a:latin typeface="微软雅黑" charset="-122"/>
-                <a:ea typeface="微软雅黑" charset="-122"/>
+                <a:latin typeface="微软雅黑" panose="020B0503020204020204" charset="-122"/>
+                <a:ea typeface="微软雅黑" panose="020B0503020204020204" charset="-122"/>
                 <a:sym typeface="+mn-ea"/>
               </a:rPr>
               <a:t>将时间、经纬度、小区标识和信号等级等信息关联起来，进行坐标检查、异常值及重复事件处理。终端负责提供观测，后台利用这些记录分析覆盖分布；模型主要依据测量点的位置学习边界，不要求先建立完整传播仿真模型。</a:t>
@@ -12638,8 +12678,8 @@
               <a:solidFill>
                 <a:schemeClr val="tx1"/>
               </a:solidFill>
-              <a:latin typeface="微软雅黑" charset="-122"/>
-              <a:ea typeface="微软雅黑" charset="-122"/>
+              <a:latin typeface="微软雅黑" panose="020B0503020204020204" charset="-122"/>
+              <a:ea typeface="微软雅黑" panose="020B0503020204020204" charset="-122"/>
               <a:sym typeface="+mn-ea"/>
             </a:endParaRPr>
           </a:p>
@@ -12656,8 +12696,8 @@
                 <a:solidFill>
                   <a:schemeClr val="tx1"/>
                 </a:solidFill>
-                <a:latin typeface="微软雅黑" charset="-122"/>
-                <a:ea typeface="微软雅黑" charset="-122"/>
+                <a:latin typeface="微软雅黑" panose="020B0503020204020204" charset="-122"/>
+                <a:ea typeface="微软雅黑" panose="020B0503020204020204" charset="-122"/>
                 <a:sym typeface="+mn-ea"/>
               </a:rPr>
               <a:t>b. </a:t>
@@ -12667,8 +12707,8 @@
                 <a:solidFill>
                   <a:schemeClr val="tx1"/>
                 </a:solidFill>
-                <a:latin typeface="微软雅黑" charset="-122"/>
-                <a:ea typeface="微软雅黑" charset="-122"/>
+                <a:latin typeface="微软雅黑" panose="020B0503020204020204" charset="-122"/>
+                <a:ea typeface="微软雅黑" panose="020B0503020204020204" charset="-122"/>
                 <a:sym typeface="+mn-ea"/>
               </a:rPr>
               <a:t>学习覆盖边界，减少几何包围造成的过度估计。</a:t>
@@ -12678,8 +12718,8 @@
                 <a:solidFill>
                   <a:schemeClr val="tx1"/>
                 </a:solidFill>
-                <a:latin typeface="微软雅黑" charset="-122"/>
-                <a:ea typeface="微软雅黑" charset="-122"/>
+                <a:latin typeface="微软雅黑" panose="020B0503020204020204" charset="-122"/>
+                <a:ea typeface="微软雅黑" panose="020B0503020204020204" charset="-122"/>
                 <a:sym typeface="+mn-ea"/>
               </a:rPr>
               <a:t>传统凸包法类似用一根橡皮筋包住最外围测量点，容易把中间缺少覆盖证据的区域也纳入。</a:t>
@@ -12689,8 +12729,8 @@
                 <a:solidFill>
                   <a:schemeClr val="tx1"/>
                 </a:solidFill>
-                <a:latin typeface="微软雅黑" charset="-122"/>
-                <a:ea typeface="微软雅黑" charset="-122"/>
+                <a:latin typeface="微软雅黑" panose="020B0503020204020204" charset="-122"/>
+                <a:ea typeface="微软雅黑" panose="020B0503020204020204" charset="-122"/>
                 <a:sym typeface="+mn-ea"/>
               </a:rPr>
               <a:t>OC-SVM</a:t>
@@ -12700,8 +12740,8 @@
                 <a:solidFill>
                   <a:schemeClr val="tx1"/>
                 </a:solidFill>
-                <a:latin typeface="微软雅黑" charset="-122"/>
-                <a:ea typeface="微软雅黑" charset="-122"/>
+                <a:latin typeface="微软雅黑" panose="020B0503020204020204" charset="-122"/>
+                <a:ea typeface="微软雅黑" panose="020B0503020204020204" charset="-122"/>
                 <a:sym typeface="+mn-ea"/>
               </a:rPr>
               <a:t>则学习测量点集中分布的区域，允许形成凹陷和不规则边界，输出某位置是否落在估计覆盖范围内的判断。</a:t>
@@ -12710,8 +12750,8 @@
               <a:solidFill>
                 <a:schemeClr val="tx1"/>
               </a:solidFill>
-              <a:latin typeface="微软雅黑" charset="-122"/>
-              <a:ea typeface="微软雅黑" charset="-122"/>
+              <a:latin typeface="微软雅黑" panose="020B0503020204020204" charset="-122"/>
+              <a:ea typeface="微软雅黑" panose="020B0503020204020204" charset="-122"/>
               <a:sym typeface="+mn-ea"/>
             </a:endParaRPr>
           </a:p>
@@ -12728,8 +12768,8 @@
                 <a:solidFill>
                   <a:schemeClr val="tx1"/>
                 </a:solidFill>
-                <a:latin typeface="微软雅黑" charset="-122"/>
-                <a:ea typeface="微软雅黑" charset="-122"/>
+                <a:latin typeface="微软雅黑" panose="020B0503020204020204" charset="-122"/>
+                <a:ea typeface="微软雅黑" panose="020B0503020204020204" charset="-122"/>
                 <a:sym typeface="+mn-ea"/>
               </a:rPr>
               <a:t>c. </a:t>
@@ -12739,8 +12779,8 @@
                 <a:solidFill>
                   <a:schemeClr val="tx1"/>
                 </a:solidFill>
-                <a:latin typeface="微软雅黑" charset="-122"/>
-                <a:ea typeface="微软雅黑" charset="-122"/>
+                <a:latin typeface="微软雅黑" panose="020B0503020204020204" charset="-122"/>
+                <a:ea typeface="微软雅黑" panose="020B0503020204020204" charset="-122"/>
                 <a:sym typeface="+mn-ea"/>
               </a:rPr>
               <a:t>按信号等级分层，筛选疑似薄弱区域。</a:t>
@@ -12750,8 +12790,8 @@
                 <a:solidFill>
                   <a:schemeClr val="tx1"/>
                 </a:solidFill>
-                <a:latin typeface="微软雅黑" charset="-122"/>
-                <a:ea typeface="微软雅黑" charset="-122"/>
+                <a:latin typeface="微软雅黑" panose="020B0503020204020204" charset="-122"/>
+                <a:ea typeface="微软雅黑" panose="020B0503020204020204" charset="-122"/>
                 <a:sym typeface="+mn-ea"/>
               </a:rPr>
               <a:t>分别对不同信号等级的测量学习边界，形成强、弱覆盖的分层空间表示，并分析失去服务报告的地理分布。输出可进一步汇总到站点层面，用于定位需要复核的区域。没有测量的位置只能视为证据不足，不能直接认定为无覆盖。</a:t>
@@ -12760,8 +12800,8 @@
               <a:solidFill>
                 <a:schemeClr val="tx1"/>
               </a:solidFill>
-              <a:latin typeface="微软雅黑" charset="-122"/>
-              <a:ea typeface="微软雅黑" charset="-122"/>
+              <a:latin typeface="微软雅黑" panose="020B0503020204020204" charset="-122"/>
+              <a:ea typeface="微软雅黑" panose="020B0503020204020204" charset="-122"/>
               <a:sym typeface="+mn-ea"/>
             </a:endParaRPr>
           </a:p>
@@ -12778,8 +12818,8 @@
                 <a:solidFill>
                   <a:schemeClr val="tx1"/>
                 </a:solidFill>
-                <a:latin typeface="微软雅黑" charset="-122"/>
-                <a:ea typeface="微软雅黑" charset="-122"/>
+                <a:latin typeface="微软雅黑" panose="020B0503020204020204" charset="-122"/>
+                <a:ea typeface="微软雅黑" panose="020B0503020204020204" charset="-122"/>
                 <a:sym typeface="+mn-ea"/>
               </a:rPr>
               <a:t>d.</a:t>
@@ -12789,8 +12829,8 @@
                 <a:solidFill>
                   <a:srgbClr val="000000"/>
                 </a:solidFill>
-                <a:latin typeface="微软雅黑" charset="-122"/>
-                <a:ea typeface="微软雅黑" charset="-122"/>
+                <a:latin typeface="微软雅黑" panose="020B0503020204020204" charset="-122"/>
+                <a:ea typeface="微软雅黑" panose="020B0503020204020204" charset="-122"/>
                 <a:sym typeface="+mn-ea"/>
               </a:rPr>
               <a:t> </a:t>
@@ -12800,8 +12840,8 @@
                 <a:solidFill>
                   <a:srgbClr val="000000"/>
                 </a:solidFill>
-                <a:latin typeface="微软雅黑" charset="-122"/>
-                <a:ea typeface="微软雅黑" charset="-122"/>
+                <a:latin typeface="微软雅黑" panose="020B0503020204020204" charset="-122"/>
+                <a:ea typeface="微软雅黑" panose="020B0503020204020204" charset="-122"/>
                 <a:sym typeface="+mn-ea"/>
               </a:rPr>
               <a:t>按时间划分数据，验证覆盖估计效果。</a:t>
@@ -12811,8 +12851,8 @@
                 <a:solidFill>
                   <a:srgbClr val="000000"/>
                 </a:solidFill>
-                <a:latin typeface="微软雅黑" charset="-122"/>
-                <a:ea typeface="微软雅黑" charset="-122"/>
+                <a:latin typeface="微软雅黑" panose="020B0503020204020204" charset="-122"/>
+                <a:ea typeface="微软雅黑" panose="020B0503020204020204" charset="-122"/>
                 <a:sym typeface="+mn-ea"/>
               </a:rPr>
               <a:t>利用较早时期的数据建模，在后续时期的数据上验证，以精确率、召回率和</a:t>
@@ -12822,8 +12862,8 @@
                 <a:solidFill>
                   <a:srgbClr val="000000"/>
                 </a:solidFill>
-                <a:latin typeface="微软雅黑" charset="-122"/>
-                <a:ea typeface="微软雅黑" charset="-122"/>
+                <a:latin typeface="微软雅黑" panose="020B0503020204020204" charset="-122"/>
+                <a:ea typeface="微软雅黑" panose="020B0503020204020204" charset="-122"/>
                 <a:sym typeface="+mn-ea"/>
               </a:rPr>
               <a:t>F1</a:t>
@@ -12833,8 +12873,8 @@
                 <a:solidFill>
                   <a:srgbClr val="000000"/>
                 </a:solidFill>
-                <a:latin typeface="微软雅黑" charset="-122"/>
-                <a:ea typeface="微软雅黑" charset="-122"/>
+                <a:latin typeface="微软雅黑" panose="020B0503020204020204" charset="-122"/>
+                <a:ea typeface="微软雅黑" panose="020B0503020204020204" charset="-122"/>
                 <a:sym typeface="+mn-ea"/>
               </a:rPr>
               <a:t>分数进行比较。右图显示，在</a:t>
@@ -12844,8 +12884,8 @@
                 <a:solidFill>
                   <a:srgbClr val="000000"/>
                 </a:solidFill>
-                <a:latin typeface="微软雅黑" charset="-122"/>
-                <a:ea typeface="微软雅黑" charset="-122"/>
+                <a:latin typeface="微软雅黑" panose="020B0503020204020204" charset="-122"/>
+                <a:ea typeface="微软雅黑" panose="020B0503020204020204" charset="-122"/>
                 <a:sym typeface="+mn-ea"/>
               </a:rPr>
               <a:t>4,244</a:t>
@@ -12855,8 +12895,8 @@
                 <a:solidFill>
                   <a:srgbClr val="000000"/>
                 </a:solidFill>
-                <a:latin typeface="微软雅黑" charset="-122"/>
-                <a:ea typeface="微软雅黑" charset="-122"/>
+                <a:latin typeface="微软雅黑" panose="020B0503020204020204" charset="-122"/>
+                <a:ea typeface="微软雅黑" panose="020B0503020204020204" charset="-122"/>
                 <a:sym typeface="+mn-ea"/>
               </a:rPr>
               <a:t>个小区、五类信号条件的平均</a:t>
@@ -12866,8 +12906,8 @@
                 <a:solidFill>
                   <a:srgbClr val="000000"/>
                 </a:solidFill>
-                <a:latin typeface="微软雅黑" charset="-122"/>
-                <a:ea typeface="微软雅黑" charset="-122"/>
+                <a:latin typeface="微软雅黑" panose="020B0503020204020204" charset="-122"/>
+                <a:ea typeface="微软雅黑" panose="020B0503020204020204" charset="-122"/>
                 <a:sym typeface="+mn-ea"/>
               </a:rPr>
               <a:t>F1</a:t>
@@ -12877,8 +12917,8 @@
                 <a:solidFill>
                   <a:srgbClr val="000000"/>
                 </a:solidFill>
-                <a:latin typeface="微软雅黑" charset="-122"/>
-                <a:ea typeface="微软雅黑" charset="-122"/>
+                <a:latin typeface="微软雅黑" panose="020B0503020204020204" charset="-122"/>
+                <a:ea typeface="微软雅黑" panose="020B0503020204020204" charset="-122"/>
                 <a:sym typeface="+mn-ea"/>
               </a:rPr>
               <a:t>对比中，</a:t>
@@ -12888,8 +12928,8 @@
                 <a:solidFill>
                   <a:srgbClr val="000000"/>
                 </a:solidFill>
-                <a:latin typeface="微软雅黑" charset="-122"/>
-                <a:ea typeface="微软雅黑" charset="-122"/>
+                <a:latin typeface="微软雅黑" panose="020B0503020204020204" charset="-122"/>
+                <a:ea typeface="微软雅黑" panose="020B0503020204020204" charset="-122"/>
                 <a:sym typeface="+mn-ea"/>
               </a:rPr>
               <a:t>OC-SVM</a:t>
@@ -12899,8 +12939,8 @@
                 <a:solidFill>
                   <a:srgbClr val="000000"/>
                 </a:solidFill>
-                <a:latin typeface="微软雅黑" charset="-122"/>
-                <a:ea typeface="微软雅黑" charset="-122"/>
+                <a:latin typeface="微软雅黑" panose="020B0503020204020204" charset="-122"/>
+                <a:ea typeface="微软雅黑" panose="020B0503020204020204" charset="-122"/>
                 <a:sym typeface="+mn-ea"/>
               </a:rPr>
               <a:t>均优于凸包法；但绝对分数仍较低，实际应用还需结合场测复核。</a:t>
@@ -12909,8 +12949,8 @@
               <a:solidFill>
                 <a:srgbClr val="000000"/>
               </a:solidFill>
-              <a:latin typeface="微软雅黑" charset="-122"/>
-              <a:ea typeface="微软雅黑" charset="-122"/>
+              <a:latin typeface="微软雅黑" panose="020B0503020204020204" charset="-122"/>
+              <a:ea typeface="微软雅黑" panose="020B0503020204020204" charset="-122"/>
               <a:sym typeface="+mn-ea"/>
             </a:endParaRPr>
           </a:p>
@@ -12927,8 +12967,8 @@
                 <a:solidFill>
                   <a:srgbClr val="FF0000"/>
                 </a:solidFill>
-                <a:latin typeface="微软雅黑" charset="-122"/>
-                <a:ea typeface="微软雅黑" charset="-122"/>
+                <a:latin typeface="微软雅黑" panose="020B0503020204020204" charset="-122"/>
+                <a:ea typeface="微软雅黑" panose="020B0503020204020204" charset="-122"/>
                 <a:sym typeface="+mn-ea"/>
               </a:rPr>
               <a:t>成熟度与研究启示：</a:t>
@@ -12938,8 +12978,8 @@
                 <a:solidFill>
                   <a:schemeClr val="tx1"/>
                 </a:solidFill>
-                <a:latin typeface="微软雅黑" charset="-122"/>
-                <a:ea typeface="微软雅黑" charset="-122"/>
+                <a:latin typeface="微软雅黑" panose="020B0503020204020204" charset="-122"/>
+                <a:ea typeface="微软雅黑" panose="020B0503020204020204" charset="-122"/>
                 <a:sym typeface="+mn-ea"/>
               </a:rPr>
               <a:t>论文提供了建模方法与离线对比，公开了基于</a:t>
@@ -12949,8 +12989,8 @@
                 <a:solidFill>
                   <a:schemeClr val="tx1"/>
                 </a:solidFill>
-                <a:latin typeface="微软雅黑" charset="-122"/>
-                <a:ea typeface="微软雅黑" charset="-122"/>
+                <a:latin typeface="微软雅黑" panose="020B0503020204020204" charset="-122"/>
+                <a:ea typeface="微软雅黑" panose="020B0503020204020204" charset="-122"/>
                 <a:sym typeface="+mn-ea"/>
               </a:rPr>
               <a:t>NetPerform</a:t>
@@ -12960,8 +13000,8 @@
                 <a:solidFill>
                   <a:schemeClr val="tx1"/>
                 </a:solidFill>
-                <a:latin typeface="微软雅黑" charset="-122"/>
-                <a:ea typeface="微软雅黑" charset="-122"/>
+                <a:latin typeface="微软雅黑" panose="020B0503020204020204" charset="-122"/>
+                <a:ea typeface="微软雅黑" panose="020B0503020204020204" charset="-122"/>
                 <a:sym typeface="+mn-ea"/>
               </a:rPr>
               <a:t>生成的合成数据，尚未验证自动生成场测路线的完整流程。可借鉴其</a:t>
@@ -12971,8 +13011,8 @@
                 <a:solidFill>
                   <a:schemeClr val="tx1"/>
                 </a:solidFill>
-                <a:latin typeface="微软雅黑" charset="-122"/>
-                <a:ea typeface="微软雅黑" charset="-122"/>
+                <a:latin typeface="微软雅黑" panose="020B0503020204020204" charset="-122"/>
+                <a:ea typeface="微软雅黑" panose="020B0503020204020204" charset="-122"/>
                 <a:sym typeface="+mn-ea"/>
               </a:rPr>
               <a:t>“</a:t>
@@ -12982,8 +13022,8 @@
                 <a:solidFill>
                   <a:schemeClr val="tx1"/>
                 </a:solidFill>
-                <a:latin typeface="微软雅黑" charset="-122"/>
-                <a:ea typeface="微软雅黑" charset="-122"/>
+                <a:latin typeface="微软雅黑" panose="020B0503020204020204" charset="-122"/>
+                <a:ea typeface="微软雅黑" panose="020B0503020204020204" charset="-122"/>
                 <a:sym typeface="+mn-ea"/>
               </a:rPr>
               <a:t>测量整理</a:t>
@@ -12993,8 +13033,8 @@
                 <a:solidFill>
                   <a:schemeClr val="tx1"/>
                 </a:solidFill>
-                <a:latin typeface="微软雅黑" charset="-122"/>
-                <a:ea typeface="微软雅黑" charset="-122"/>
+                <a:latin typeface="微软雅黑" panose="020B0503020204020204" charset="-122"/>
+                <a:ea typeface="微软雅黑" panose="020B0503020204020204" charset="-122"/>
                 <a:sym typeface="+mn-ea"/>
               </a:rPr>
               <a:t>—</a:t>
@@ -13004,8 +13044,8 @@
                 <a:solidFill>
                   <a:schemeClr val="tx1"/>
                 </a:solidFill>
-                <a:latin typeface="微软雅黑" charset="-122"/>
-                <a:ea typeface="微软雅黑" charset="-122"/>
+                <a:latin typeface="微软雅黑" panose="020B0503020204020204" charset="-122"/>
+                <a:ea typeface="微软雅黑" panose="020B0503020204020204" charset="-122"/>
                 <a:sym typeface="+mn-ea"/>
               </a:rPr>
               <a:t>分级建图</a:t>
@@ -13015,8 +13055,8 @@
                 <a:solidFill>
                   <a:schemeClr val="tx1"/>
                 </a:solidFill>
-                <a:latin typeface="微软雅黑" charset="-122"/>
-                <a:ea typeface="微软雅黑" charset="-122"/>
+                <a:latin typeface="微软雅黑" panose="020B0503020204020204" charset="-122"/>
+                <a:ea typeface="微软雅黑" panose="020B0503020204020204" charset="-122"/>
                 <a:sym typeface="+mn-ea"/>
               </a:rPr>
               <a:t>—</a:t>
@@ -13026,8 +13066,8 @@
                 <a:solidFill>
                   <a:schemeClr val="tx1"/>
                 </a:solidFill>
-                <a:latin typeface="微软雅黑" charset="-122"/>
-                <a:ea typeface="微软雅黑" charset="-122"/>
+                <a:latin typeface="微软雅黑" panose="020B0503020204020204" charset="-122"/>
+                <a:ea typeface="微软雅黑" panose="020B0503020204020204" charset="-122"/>
                 <a:sym typeface="+mn-ea"/>
               </a:rPr>
               <a:t>筛选区域</a:t>
@@ -13037,8 +13077,8 @@
                 <a:solidFill>
                   <a:schemeClr val="tx1"/>
                 </a:solidFill>
-                <a:latin typeface="微软雅黑" charset="-122"/>
-                <a:ea typeface="微软雅黑" charset="-122"/>
+                <a:latin typeface="微软雅黑" panose="020B0503020204020204" charset="-122"/>
+                <a:ea typeface="微软雅黑" panose="020B0503020204020204" charset="-122"/>
                 <a:sym typeface="+mn-ea"/>
               </a:rPr>
               <a:t>”</a:t>
@@ -13048,8 +13088,8 @@
                 <a:solidFill>
                   <a:schemeClr val="tx1"/>
                 </a:solidFill>
-                <a:latin typeface="微软雅黑" charset="-122"/>
-                <a:ea typeface="微软雅黑" charset="-122"/>
+                <a:latin typeface="微软雅黑" panose="020B0503020204020204" charset="-122"/>
+                <a:ea typeface="微软雅黑" panose="020B0503020204020204" charset="-122"/>
                 <a:sym typeface="+mn-ea"/>
               </a:rPr>
               <a:t>的方法；采样不足的区域仍需补测，不能直接认定为弱覆盖。</a:t>
@@ -13058,8 +13098,8 @@
               <a:solidFill>
                 <a:schemeClr val="tx1"/>
               </a:solidFill>
-              <a:latin typeface="微软雅黑" charset="-122"/>
-              <a:ea typeface="微软雅黑" charset="-122"/>
+              <a:latin typeface="微软雅黑" panose="020B0503020204020204" charset="-122"/>
+              <a:ea typeface="微软雅黑" panose="020B0503020204020204" charset="-122"/>
               <a:sym typeface="+mn-ea"/>
             </a:endParaRPr>
           </a:p>
@@ -13236,8 +13276,8 @@
           <a:p>
             <a:r>
               <a:rPr lang="zh-CN" altLang="en-US" sz="2800" b="1" dirty="0">
-                <a:latin typeface="微软雅黑" charset="-122"/>
-                <a:ea typeface="微软雅黑" charset="-122"/>
+                <a:latin typeface="微软雅黑" panose="020B0503020204020204" charset="-122"/>
+                <a:ea typeface="微软雅黑" panose="020B0503020204020204" charset="-122"/>
                 <a:sym typeface="+mn-ea"/>
               </a:rPr>
               <a:t>方向二：</a:t>
@@ -13247,8 +13287,8 @@
                 <a:solidFill>
                   <a:schemeClr val="tx1"/>
                 </a:solidFill>
-                <a:latin typeface="微软雅黑" charset="0"/>
-                <a:ea typeface="微软雅黑" charset="0"/>
+                <a:latin typeface="微软雅黑" panose="020B0503020204020204" charset="-122"/>
+                <a:ea typeface="微软雅黑" panose="020B0503020204020204" charset="-122"/>
                 <a:sym typeface="+mn-ea"/>
               </a:rPr>
               <a:t>R</a:t>
@@ -13258,15 +13298,15 @@
                 <a:solidFill>
                   <a:schemeClr val="tx1"/>
                 </a:solidFill>
-                <a:latin typeface="微软雅黑" charset="0"/>
-                <a:ea typeface="微软雅黑" charset="0"/>
+                <a:latin typeface="微软雅黑" panose="020B0503020204020204" charset="-122"/>
+                <a:ea typeface="微软雅黑" panose="020B0503020204020204" charset="-122"/>
                 <a:sym typeface="+mn-ea"/>
               </a:rPr>
               <a:t>adio Map</a:t>
             </a:r>
             <a:endParaRPr lang="zh-CN" altLang="en-US">
-              <a:latin typeface="微软雅黑" charset="-122"/>
-              <a:ea typeface="微软雅黑" charset="-122"/>
+              <a:latin typeface="微软雅黑" panose="020B0503020204020204" charset="-122"/>
+              <a:ea typeface="微软雅黑" panose="020B0503020204020204" charset="-122"/>
               <a:sym typeface="+mn-ea"/>
             </a:endParaRPr>
           </a:p>
@@ -13308,8 +13348,8 @@
                 <a:solidFill>
                   <a:schemeClr val="tx1"/>
                 </a:solidFill>
-                <a:latin typeface="微软雅黑" charset="-122"/>
-                <a:ea typeface="微软雅黑" charset="-122"/>
+                <a:latin typeface="微软雅黑" panose="020B0503020204020204" charset="-122"/>
+                <a:ea typeface="微软雅黑" panose="020B0503020204020204" charset="-122"/>
                 <a:sym typeface="+mn-ea"/>
               </a:rPr>
               <a:t>2. TrajectoryDiff——</a:t>
@@ -13319,8 +13359,8 @@
                 <a:solidFill>
                   <a:schemeClr val="tx1"/>
                 </a:solidFill>
-                <a:latin typeface="微软雅黑" charset="-122"/>
-                <a:ea typeface="微软雅黑" charset="-122"/>
+                <a:latin typeface="微软雅黑" panose="020B0503020204020204" charset="-122"/>
+                <a:ea typeface="微软雅黑" panose="020B0503020204020204" charset="-122"/>
                 <a:sym typeface="+mn-ea"/>
               </a:rPr>
               <a:t>利用沿行走轨迹采集的零散测量，补全无线覆盖地图</a:t>
@@ -13330,8 +13370,8 @@
                 <a:solidFill>
                   <a:srgbClr val="000000"/>
                 </a:solidFill>
-                <a:latin typeface="微软雅黑" charset="-122"/>
-                <a:ea typeface="微软雅黑" charset="-122"/>
+                <a:latin typeface="微软雅黑" panose="020B0503020204020204" charset="-122"/>
+                <a:ea typeface="微软雅黑" panose="020B0503020204020204" charset="-122"/>
                 <a:cs typeface="+mn-ea"/>
                 <a:sym typeface="+mn-ea"/>
               </a:rPr>
@@ -13342,8 +13382,8 @@
                 <a:solidFill>
                   <a:srgbClr val="000000"/>
                 </a:solidFill>
-                <a:latin typeface="微软雅黑" charset="0"/>
-                <a:ea typeface="微软雅黑" charset="0"/>
+                <a:latin typeface="微软雅黑" panose="020B0503020204020204" charset="-122"/>
+                <a:ea typeface="微软雅黑" panose="020B0503020204020204" charset="-122"/>
                 <a:cs typeface="+mn-ea"/>
                 <a:sym typeface="+mn-ea"/>
               </a:rPr>
@@ -13354,8 +13394,8 @@
                 <a:solidFill>
                   <a:srgbClr val="000000"/>
                 </a:solidFill>
-                <a:latin typeface="微软雅黑" charset="-122"/>
-                <a:ea typeface="微软雅黑" charset="-122"/>
+                <a:latin typeface="微软雅黑" panose="020B0503020204020204" charset="-122"/>
+                <a:ea typeface="微软雅黑" panose="020B0503020204020204" charset="-122"/>
                 <a:cs typeface="+mn-ea"/>
                 <a:sym typeface="+mn-ea"/>
               </a:rPr>
@@ -13365,8 +13405,8 @@
               <a:solidFill>
                 <a:schemeClr val="tx1"/>
               </a:solidFill>
-              <a:latin typeface="微软雅黑" charset="-122"/>
-              <a:ea typeface="微软雅黑" charset="-122"/>
+              <a:latin typeface="微软雅黑" panose="020B0503020204020204" charset="-122"/>
+              <a:ea typeface="微软雅黑" panose="020B0503020204020204" charset="-122"/>
               <a:sym typeface="+mn-ea"/>
             </a:endParaRPr>
           </a:p>
@@ -13383,8 +13423,8 @@
                 <a:solidFill>
                   <a:srgbClr val="FF0000"/>
                 </a:solidFill>
-                <a:latin typeface="微软雅黑" charset="-122"/>
-                <a:ea typeface="微软雅黑" charset="-122"/>
+                <a:latin typeface="微软雅黑" panose="020B0503020204020204" charset="-122"/>
+                <a:ea typeface="微软雅黑" panose="020B0503020204020204" charset="-122"/>
                 <a:sym typeface="+mn-ea"/>
               </a:rPr>
               <a:t>研究问题与价值：</a:t>
@@ -13394,8 +13434,8 @@
                 <a:solidFill>
                   <a:srgbClr val="000000"/>
                 </a:solidFill>
-                <a:latin typeface="微软雅黑" charset="-122"/>
-                <a:ea typeface="微软雅黑" charset="-122"/>
+                <a:latin typeface="微软雅黑" panose="020B0503020204020204" charset="-122"/>
+                <a:ea typeface="微软雅黑" panose="020B0503020204020204" charset="-122"/>
                 <a:sym typeface="+mn-ea"/>
               </a:rPr>
               <a:t>手机采集的无线测量通常集中在用户经过的道路上，其他区域可能完全没有数据。直接展示测量点，只能看到</a:t>
@@ -13405,8 +13445,8 @@
                 <a:solidFill>
                   <a:srgbClr val="000000"/>
                 </a:solidFill>
-                <a:latin typeface="微软雅黑" charset="-122"/>
-                <a:ea typeface="微软雅黑" charset="-122"/>
+                <a:latin typeface="微软雅黑" panose="020B0503020204020204" charset="-122"/>
+                <a:ea typeface="微软雅黑" panose="020B0503020204020204" charset="-122"/>
                 <a:sym typeface="+mn-ea"/>
               </a:rPr>
               <a:t>“</a:t>
@@ -13416,8 +13456,8 @@
                 <a:solidFill>
                   <a:srgbClr val="000000"/>
                 </a:solidFill>
-                <a:latin typeface="微软雅黑" charset="-122"/>
-                <a:ea typeface="微软雅黑" charset="-122"/>
+                <a:latin typeface="微软雅黑" panose="020B0503020204020204" charset="-122"/>
+                <a:ea typeface="微软雅黑" panose="020B0503020204020204" charset="-122"/>
                 <a:sym typeface="+mn-ea"/>
               </a:rPr>
               <a:t>走过哪里、那里信号如何</a:t>
@@ -13427,8 +13467,8 @@
                 <a:solidFill>
                   <a:srgbClr val="000000"/>
                 </a:solidFill>
-                <a:latin typeface="微软雅黑" charset="-122"/>
-                <a:ea typeface="微软雅黑" charset="-122"/>
+                <a:latin typeface="微软雅黑" panose="020B0503020204020204" charset="-122"/>
+                <a:ea typeface="微软雅黑" panose="020B0503020204020204" charset="-122"/>
                 <a:sym typeface="+mn-ea"/>
               </a:rPr>
               <a:t>”</a:t>
@@ -13438,8 +13478,8 @@
                 <a:solidFill>
                   <a:srgbClr val="000000"/>
                 </a:solidFill>
-                <a:latin typeface="微软雅黑" charset="-122"/>
-                <a:ea typeface="微软雅黑" charset="-122"/>
+                <a:latin typeface="微软雅黑" panose="020B0503020204020204" charset="-122"/>
+                <a:ea typeface="微软雅黑" panose="020B0503020204020204" charset="-122"/>
                 <a:sym typeface="+mn-ea"/>
               </a:rPr>
               <a:t>，难以判断未经过区域的覆盖情况。本研究利用轨迹测量重建完整信号地图，</a:t>
@@ -13449,8 +13489,8 @@
                 <a:solidFill>
                   <a:srgbClr val="000000"/>
                 </a:solidFill>
-                <a:latin typeface="微软雅黑" charset="-122"/>
-                <a:ea typeface="微软雅黑" charset="-122"/>
+                <a:latin typeface="微软雅黑" panose="020B0503020204020204" charset="-122"/>
+                <a:ea typeface="微软雅黑" panose="020B0503020204020204" charset="-122"/>
                 <a:sym typeface="+mn-ea"/>
               </a:rPr>
               <a:t>为筛选疑似弱覆盖区域、确定需要补测的位置提供空间依据，减少对全区域逐点测量的依赖。</a:t>
@@ -13459,8 +13499,8 @@
               <a:solidFill>
                 <a:srgbClr val="000000"/>
               </a:solidFill>
-              <a:latin typeface="微软雅黑" charset="-122"/>
-              <a:ea typeface="微软雅黑" charset="-122"/>
+              <a:latin typeface="微软雅黑" panose="020B0503020204020204" charset="-122"/>
+              <a:ea typeface="微软雅黑" panose="020B0503020204020204" charset="-122"/>
               <a:sym typeface="+mn-ea"/>
             </a:endParaRPr>
           </a:p>
@@ -13477,8 +13517,8 @@
                 <a:solidFill>
                   <a:srgbClr val="FF0000"/>
                 </a:solidFill>
-                <a:latin typeface="微软雅黑" charset="-122"/>
-                <a:ea typeface="微软雅黑" charset="-122"/>
+                <a:latin typeface="微软雅黑" panose="020B0503020204020204" charset="-122"/>
+                <a:ea typeface="微软雅黑" panose="020B0503020204020204" charset="-122"/>
                 <a:sym typeface="+mn-ea"/>
               </a:rPr>
               <a:t>核心思路：</a:t>
@@ -13488,8 +13528,8 @@
                 <a:solidFill>
                   <a:srgbClr val="000000"/>
                 </a:solidFill>
-                <a:latin typeface="微软雅黑" charset="-122"/>
-                <a:ea typeface="微软雅黑" charset="-122"/>
+                <a:latin typeface="微软雅黑" panose="020B0503020204020204" charset="-122"/>
+                <a:ea typeface="微软雅黑" panose="020B0503020204020204" charset="-122"/>
                 <a:sym typeface="+mn-ea"/>
               </a:rPr>
               <a:t>将测到了什么、在哪里测到、周围采样是否充分</a:t>
@@ -13499,8 +13539,8 @@
                 <a:solidFill>
                   <a:srgbClr val="000000"/>
                 </a:solidFill>
-                <a:latin typeface="微软雅黑" charset="-122"/>
-                <a:ea typeface="微软雅黑" charset="-122"/>
+                <a:latin typeface="微软雅黑" panose="020B0503020204020204" charset="-122"/>
+                <a:ea typeface="微软雅黑" panose="020B0503020204020204" charset="-122"/>
                 <a:sym typeface="+mn-ea"/>
               </a:rPr>
               <a:t>共同作为建图条件，结合建筑分布和发射机位置，利用扩散模型逐步生成完整的接收信号强度地图。模型先通过完整地图学习传播规律，使用时再由稀疏测量约束重建结果。</a:t>
@@ -13510,8 +13550,8 @@
                 <a:solidFill>
                   <a:srgbClr val="000000"/>
                 </a:solidFill>
-                <a:latin typeface="微软雅黑" charset="-122"/>
-                <a:ea typeface="微软雅黑" charset="-122"/>
+                <a:latin typeface="微软雅黑" panose="020B0503020204020204" charset="-122"/>
+                <a:ea typeface="微软雅黑" panose="020B0503020204020204" charset="-122"/>
                 <a:sym typeface="+mn-ea"/>
               </a:rPr>
               <a:t>右图展示不同方法在未采样区域的重建误差对比。</a:t>
@@ -13520,8 +13560,8 @@
               <a:solidFill>
                 <a:srgbClr val="000000"/>
               </a:solidFill>
-              <a:latin typeface="微软雅黑" charset="-122"/>
-              <a:ea typeface="微软雅黑" charset="-122"/>
+              <a:latin typeface="微软雅黑" panose="020B0503020204020204" charset="-122"/>
+              <a:ea typeface="微软雅黑" panose="020B0503020204020204" charset="-122"/>
               <a:sym typeface="+mn-ea"/>
             </a:endParaRPr>
           </a:p>
@@ -13538,8 +13578,8 @@
                 <a:solidFill>
                   <a:srgbClr val="FF0000"/>
                 </a:solidFill>
-                <a:latin typeface="微软雅黑" charset="-122"/>
-                <a:ea typeface="微软雅黑" charset="-122"/>
+                <a:latin typeface="微软雅黑" panose="020B0503020204020204" charset="-122"/>
+                <a:ea typeface="微软雅黑" panose="020B0503020204020204" charset="-122"/>
                 <a:sym typeface="+mn-ea"/>
               </a:rPr>
               <a:t>研究方法：</a:t>
@@ -13548,8 +13588,8 @@
               <a:solidFill>
                 <a:srgbClr val="FF0000"/>
               </a:solidFill>
-              <a:latin typeface="微软雅黑" charset="-122"/>
-              <a:ea typeface="微软雅黑" charset="-122"/>
+              <a:latin typeface="微软雅黑" panose="020B0503020204020204" charset="-122"/>
+              <a:ea typeface="微软雅黑" panose="020B0503020204020204" charset="-122"/>
               <a:sym typeface="+mn-ea"/>
             </a:endParaRPr>
           </a:p>
@@ -13566,8 +13606,8 @@
                 <a:solidFill>
                   <a:schemeClr val="tx1"/>
                 </a:solidFill>
-                <a:latin typeface="微软雅黑" charset="-122"/>
-                <a:ea typeface="微软雅黑" charset="-122"/>
+                <a:latin typeface="微软雅黑" panose="020B0503020204020204" charset="-122"/>
+                <a:ea typeface="微软雅黑" panose="020B0503020204020204" charset="-122"/>
                 <a:sym typeface="+mn-ea"/>
               </a:rPr>
               <a:t>a. </a:t>
@@ -13577,8 +13617,8 @@
                 <a:solidFill>
                   <a:schemeClr val="tx1"/>
                 </a:solidFill>
-                <a:latin typeface="微软雅黑" charset="-122"/>
-                <a:ea typeface="微软雅黑" charset="-122"/>
+                <a:latin typeface="微软雅黑" panose="020B0503020204020204" charset="-122"/>
+                <a:ea typeface="微软雅黑" panose="020B0503020204020204" charset="-122"/>
                 <a:sym typeface="+mn-ea"/>
               </a:rPr>
               <a:t>整理轨迹测量，构造空间输入。</a:t>
@@ -13588,8 +13628,8 @@
                 <a:solidFill>
                   <a:schemeClr val="tx1"/>
                 </a:solidFill>
-                <a:latin typeface="微软雅黑" charset="-122"/>
-                <a:ea typeface="微软雅黑" charset="-122"/>
+                <a:latin typeface="微软雅黑" panose="020B0503020204020204" charset="-122"/>
+                <a:ea typeface="微软雅黑" panose="020B0503020204020204" charset="-122"/>
                 <a:sym typeface="+mn-ea"/>
               </a:rPr>
               <a:t>将带位置的接收信号强度（</a:t>
@@ -13599,8 +13639,8 @@
                 <a:solidFill>
                   <a:schemeClr val="tx1"/>
                 </a:solidFill>
-                <a:latin typeface="微软雅黑" charset="-122"/>
-                <a:ea typeface="微软雅黑" charset="-122"/>
+                <a:latin typeface="微软雅黑" panose="020B0503020204020204" charset="-122"/>
+                <a:ea typeface="微软雅黑" panose="020B0503020204020204" charset="-122"/>
                 <a:sym typeface="+mn-ea"/>
               </a:rPr>
               <a:t>RSS</a:t>
@@ -13610,8 +13650,8 @@
                 <a:solidFill>
                   <a:schemeClr val="tx1"/>
                 </a:solidFill>
-                <a:latin typeface="微软雅黑" charset="-122"/>
-                <a:ea typeface="微软雅黑" charset="-122"/>
+                <a:latin typeface="微软雅黑" panose="020B0503020204020204" charset="-122"/>
+                <a:ea typeface="微软雅黑" panose="020B0503020204020204" charset="-122"/>
                 <a:sym typeface="+mn-ea"/>
               </a:rPr>
               <a:t>）整理为稀疏测量图，并生成标记采样位置的轨迹掩码和表示局部采样疏密的密度图，再与建筑图、发射机位置共同输入模型。这样既保留测量值，也明确哪些位置没有数据。</a:t>
@@ -13620,8 +13660,8 @@
               <a:solidFill>
                 <a:schemeClr val="tx1"/>
               </a:solidFill>
-              <a:latin typeface="微软雅黑" charset="-122"/>
-              <a:ea typeface="微软雅黑" charset="-122"/>
+              <a:latin typeface="微软雅黑" panose="020B0503020204020204" charset="-122"/>
+              <a:ea typeface="微软雅黑" panose="020B0503020204020204" charset="-122"/>
               <a:sym typeface="+mn-ea"/>
             </a:endParaRPr>
           </a:p>
@@ -13638,8 +13678,8 @@
                 <a:solidFill>
                   <a:schemeClr val="tx1"/>
                 </a:solidFill>
-                <a:latin typeface="微软雅黑" charset="-122"/>
-                <a:ea typeface="微软雅黑" charset="-122"/>
+                <a:latin typeface="微软雅黑" panose="020B0503020204020204" charset="-122"/>
+                <a:ea typeface="微软雅黑" panose="020B0503020204020204" charset="-122"/>
                 <a:sym typeface="+mn-ea"/>
               </a:rPr>
               <a:t>b. </a:t>
@@ -13649,8 +13689,8 @@
                 <a:solidFill>
                   <a:schemeClr val="tx1"/>
                 </a:solidFill>
-                <a:latin typeface="微软雅黑" charset="-122"/>
-                <a:ea typeface="微软雅黑" charset="-122"/>
+                <a:latin typeface="微软雅黑" panose="020B0503020204020204" charset="-122"/>
+                <a:ea typeface="微软雅黑" panose="020B0503020204020204" charset="-122"/>
                 <a:sym typeface="+mn-ea"/>
               </a:rPr>
               <a:t>引入覆盖感知注意力，利用有效观测补全地图。</a:t>
@@ -13660,8 +13700,8 @@
                 <a:solidFill>
                   <a:schemeClr val="tx1"/>
                 </a:solidFill>
-                <a:latin typeface="微软雅黑" charset="-122"/>
-                <a:ea typeface="微软雅黑" charset="-122"/>
+                <a:latin typeface="微软雅黑" panose="020B0503020204020204" charset="-122"/>
+                <a:ea typeface="微软雅黑" panose="020B0503020204020204" charset="-122"/>
                 <a:sym typeface="+mn-ea"/>
               </a:rPr>
               <a:t>模型从噪声图开始，反复去噪，逐步生成完整</a:t>
@@ -13671,8 +13711,8 @@
                 <a:solidFill>
                   <a:schemeClr val="tx1"/>
                 </a:solidFill>
-                <a:latin typeface="微软雅黑" charset="-122"/>
-                <a:ea typeface="微软雅黑" charset="-122"/>
+                <a:latin typeface="微软雅黑" panose="020B0503020204020204" charset="-122"/>
+                <a:ea typeface="微软雅黑" panose="020B0503020204020204" charset="-122"/>
                 <a:sym typeface="+mn-ea"/>
               </a:rPr>
               <a:t>RSS</a:t>
@@ -13682,8 +13722,8 @@
                 <a:solidFill>
                   <a:schemeClr val="tx1"/>
                 </a:solidFill>
-                <a:latin typeface="微软雅黑" charset="-122"/>
-                <a:ea typeface="微软雅黑" charset="-122"/>
+                <a:latin typeface="微软雅黑" panose="020B0503020204020204" charset="-122"/>
+                <a:ea typeface="微软雅黑" panose="020B0503020204020204" charset="-122"/>
                 <a:sym typeface="+mn-ea"/>
               </a:rPr>
               <a:t>地图。去噪过程中，根据局部采样密度调整信息权重，使已有测量能够有效约束重建，同时利用训练中学到的传播规律估计未采样区域。</a:t>
@@ -13692,8 +13732,8 @@
               <a:solidFill>
                 <a:schemeClr val="tx1"/>
               </a:solidFill>
-              <a:latin typeface="微软雅黑" charset="-122"/>
-              <a:ea typeface="微软雅黑" charset="-122"/>
+              <a:latin typeface="微软雅黑" panose="020B0503020204020204" charset="-122"/>
+              <a:ea typeface="微软雅黑" panose="020B0503020204020204" charset="-122"/>
               <a:sym typeface="+mn-ea"/>
             </a:endParaRPr>
           </a:p>
@@ -13710,8 +13750,8 @@
                 <a:solidFill>
                   <a:schemeClr val="tx1"/>
                 </a:solidFill>
-                <a:latin typeface="微软雅黑" charset="-122"/>
-                <a:ea typeface="微软雅黑" charset="-122"/>
+                <a:latin typeface="微软雅黑" panose="020B0503020204020204" charset="-122"/>
+                <a:ea typeface="微软雅黑" panose="020B0503020204020204" charset="-122"/>
                 <a:sym typeface="+mn-ea"/>
               </a:rPr>
               <a:t>c. </a:t>
@@ -13721,8 +13761,8 @@
                 <a:solidFill>
                   <a:schemeClr val="tx1"/>
                 </a:solidFill>
-                <a:latin typeface="微软雅黑" charset="-122"/>
-                <a:ea typeface="微软雅黑" charset="-122"/>
+                <a:latin typeface="微软雅黑" panose="020B0503020204020204" charset="-122"/>
+                <a:ea typeface="微软雅黑" panose="020B0503020204020204" charset="-122"/>
                 <a:sym typeface="+mn-ea"/>
               </a:rPr>
               <a:t>加入传播约束，减少不合理的重建结果。</a:t>
@@ -13732,8 +13772,8 @@
                 <a:solidFill>
                   <a:schemeClr val="tx1"/>
                 </a:solidFill>
-                <a:latin typeface="微软雅黑" charset="-122"/>
-                <a:ea typeface="微软雅黑" charset="-122"/>
+                <a:latin typeface="微软雅黑" panose="020B0503020204020204" charset="-122"/>
+                <a:ea typeface="微软雅黑" panose="020B0503020204020204" charset="-122"/>
                 <a:sym typeface="+mn-ea"/>
               </a:rPr>
               <a:t>训练时，一方面要求采样位置的重建值与输入测量保持一致；另一方面约束远离发射机区域的平均信号强度，避免整体传播趋势失真。该约束允许遮挡、反射等因素造成局部信号变化，并非要求信号随距离处处单调下降。</a:t>
@@ -13742,8 +13782,8 @@
               <a:solidFill>
                 <a:schemeClr val="tx1"/>
               </a:solidFill>
-              <a:latin typeface="微软雅黑" charset="-122"/>
-              <a:ea typeface="微软雅黑" charset="-122"/>
+              <a:latin typeface="微软雅黑" panose="020B0503020204020204" charset="-122"/>
+              <a:ea typeface="微软雅黑" panose="020B0503020204020204" charset="-122"/>
               <a:sym typeface="+mn-ea"/>
             </a:endParaRPr>
           </a:p>
@@ -13760,8 +13800,8 @@
                 <a:solidFill>
                   <a:schemeClr val="tx1"/>
                 </a:solidFill>
-                <a:latin typeface="微软雅黑" charset="-122"/>
-                <a:ea typeface="微软雅黑" charset="-122"/>
+                <a:latin typeface="微软雅黑" panose="020B0503020204020204" charset="-122"/>
+                <a:ea typeface="微软雅黑" panose="020B0503020204020204" charset="-122"/>
                 <a:sym typeface="+mn-ea"/>
               </a:rPr>
               <a:t>d. </a:t>
@@ -13771,8 +13811,8 @@
                 <a:solidFill>
                   <a:srgbClr val="000000"/>
                 </a:solidFill>
-                <a:latin typeface="微软雅黑" charset="-122"/>
-                <a:ea typeface="微软雅黑" charset="-122"/>
+                <a:latin typeface="微软雅黑" panose="020B0503020204020204" charset="-122"/>
+                <a:ea typeface="微软雅黑" panose="020B0503020204020204" charset="-122"/>
                 <a:sym typeface="+mn-ea"/>
               </a:rPr>
               <a:t>多次生成取平均，同时输出不确定性。对相同输入生成多张地图，取逐位置平均值作为最终估计，以不同生成结果的离散程度表示不确定性。在轨迹仅覆盖可通行区域</a:t>
@@ -13782,8 +13822,8 @@
                 <a:solidFill>
                   <a:srgbClr val="000000"/>
                 </a:solidFill>
-                <a:latin typeface="微软雅黑" charset="-122"/>
-                <a:ea typeface="微软雅黑" charset="-122"/>
+                <a:latin typeface="微软雅黑" panose="020B0503020204020204" charset="-122"/>
+                <a:ea typeface="微软雅黑" panose="020B0503020204020204" charset="-122"/>
                 <a:sym typeface="+mn-ea"/>
               </a:rPr>
               <a:t>1.6%</a:t>
@@ -13793,8 +13833,8 @@
                 <a:solidFill>
                   <a:srgbClr val="000000"/>
                 </a:solidFill>
-                <a:latin typeface="微软雅黑" charset="-122"/>
-                <a:ea typeface="微软雅黑" charset="-122"/>
+                <a:latin typeface="微软雅黑" panose="020B0503020204020204" charset="-122"/>
+                <a:ea typeface="微软雅黑" panose="020B0503020204020204" charset="-122"/>
                 <a:sym typeface="+mn-ea"/>
               </a:rPr>
               <a:t>的实验中，单次生成的未采样区域</a:t>
@@ -13804,8 +13844,8 @@
                 <a:solidFill>
                   <a:srgbClr val="000000"/>
                 </a:solidFill>
-                <a:latin typeface="微软雅黑" charset="-122"/>
-                <a:ea typeface="微软雅黑" charset="-122"/>
+                <a:latin typeface="微软雅黑" panose="020B0503020204020204" charset="-122"/>
+                <a:ea typeface="微软雅黑" panose="020B0503020204020204" charset="-122"/>
                 <a:sym typeface="+mn-ea"/>
               </a:rPr>
               <a:t>RMSE</a:t>
@@ -13815,8 +13855,8 @@
                 <a:solidFill>
                   <a:srgbClr val="000000"/>
                 </a:solidFill>
-                <a:latin typeface="微软雅黑" charset="-122"/>
-                <a:ea typeface="微软雅黑" charset="-122"/>
+                <a:latin typeface="微软雅黑" panose="020B0503020204020204" charset="-122"/>
+                <a:ea typeface="微软雅黑" panose="020B0503020204020204" charset="-122"/>
                 <a:sym typeface="+mn-ea"/>
               </a:rPr>
               <a:t>为</a:t>
@@ -13826,8 +13866,8 @@
                 <a:solidFill>
                   <a:srgbClr val="000000"/>
                 </a:solidFill>
-                <a:latin typeface="微软雅黑" charset="-122"/>
-                <a:ea typeface="微软雅黑" charset="-122"/>
+                <a:latin typeface="微软雅黑" panose="020B0503020204020204" charset="-122"/>
+                <a:ea typeface="微软雅黑" panose="020B0503020204020204" charset="-122"/>
                 <a:sym typeface="+mn-ea"/>
               </a:rPr>
               <a:t>7.33</a:t>
@@ -13837,8 +13877,8 @@
                 <a:solidFill>
                   <a:srgbClr val="000000"/>
                 </a:solidFill>
-                <a:latin typeface="微软雅黑" charset="-122"/>
-                <a:ea typeface="微软雅黑" charset="-122"/>
+                <a:latin typeface="微软雅黑" panose="020B0503020204020204" charset="-122"/>
+                <a:ea typeface="微软雅黑" panose="020B0503020204020204" charset="-122"/>
                 <a:sym typeface="+mn-ea"/>
               </a:rPr>
               <a:t>，</a:t>
@@ -13848,8 +13888,8 @@
                 <a:solidFill>
                   <a:srgbClr val="000000"/>
                 </a:solidFill>
-                <a:latin typeface="微软雅黑" charset="-122"/>
-                <a:ea typeface="微软雅黑" charset="-122"/>
+                <a:latin typeface="微软雅黑" panose="020B0503020204020204" charset="-122"/>
+                <a:ea typeface="微软雅黑" panose="020B0503020204020204" charset="-122"/>
                 <a:sym typeface="+mn-ea"/>
               </a:rPr>
               <a:t>10</a:t>
@@ -13859,8 +13899,8 @@
                 <a:solidFill>
                   <a:srgbClr val="000000"/>
                 </a:solidFill>
-                <a:latin typeface="微软雅黑" charset="-122"/>
-                <a:ea typeface="微软雅黑" charset="-122"/>
+                <a:latin typeface="微软雅黑" panose="020B0503020204020204" charset="-122"/>
+                <a:ea typeface="微软雅黑" panose="020B0503020204020204" charset="-122"/>
                 <a:sym typeface="+mn-ea"/>
               </a:rPr>
               <a:t>次集成后降至</a:t>
@@ -13870,8 +13910,8 @@
                 <a:solidFill>
                   <a:srgbClr val="000000"/>
                 </a:solidFill>
-                <a:latin typeface="微软雅黑" charset="-122"/>
-                <a:ea typeface="微软雅黑" charset="-122"/>
+                <a:latin typeface="微软雅黑" panose="020B0503020204020204" charset="-122"/>
+                <a:ea typeface="微软雅黑" panose="020B0503020204020204" charset="-122"/>
                 <a:sym typeface="+mn-ea"/>
               </a:rPr>
               <a:t>5.68</a:t>
@@ -13881,8 +13921,8 @@
                 <a:solidFill>
                   <a:srgbClr val="000000"/>
                 </a:solidFill>
-                <a:latin typeface="微软雅黑" charset="-122"/>
-                <a:ea typeface="微软雅黑" charset="-122"/>
+                <a:latin typeface="微软雅黑" panose="020B0503020204020204" charset="-122"/>
+                <a:ea typeface="微软雅黑" panose="020B0503020204020204" charset="-122"/>
                 <a:sym typeface="+mn-ea"/>
               </a:rPr>
               <a:t>。</a:t>
@@ -13891,8 +13931,8 @@
               <a:solidFill>
                 <a:srgbClr val="000000"/>
               </a:solidFill>
-              <a:latin typeface="微软雅黑" charset="-122"/>
-              <a:ea typeface="微软雅黑" charset="-122"/>
+              <a:latin typeface="微软雅黑" panose="020B0503020204020204" charset="-122"/>
+              <a:ea typeface="微软雅黑" panose="020B0503020204020204" charset="-122"/>
               <a:sym typeface="+mn-ea"/>
             </a:endParaRPr>
           </a:p>
@@ -13909,8 +13949,8 @@
                 <a:solidFill>
                   <a:srgbClr val="FF0000"/>
                 </a:solidFill>
-                <a:latin typeface="微软雅黑" charset="-122"/>
-                <a:ea typeface="微软雅黑" charset="-122"/>
+                <a:latin typeface="微软雅黑" panose="020B0503020204020204" charset="-122"/>
+                <a:ea typeface="微软雅黑" panose="020B0503020204020204" charset="-122"/>
                 <a:sym typeface="+mn-ea"/>
               </a:rPr>
               <a:t>成熟度与研究启示：</a:t>
@@ -13920,8 +13960,8 @@
                 <a:solidFill>
                   <a:schemeClr val="tx1"/>
                 </a:solidFill>
-                <a:latin typeface="微软雅黑" charset="-122"/>
-                <a:ea typeface="微软雅黑" charset="-122"/>
+                <a:latin typeface="微软雅黑" panose="020B0503020204020204" charset="-122"/>
+                <a:ea typeface="微软雅黑" panose="020B0503020204020204" charset="-122"/>
                 <a:sym typeface="+mn-ea"/>
               </a:rPr>
               <a:t>已有公开代码及仿真数据上的离线验证，实验使用</a:t>
@@ -13931,8 +13971,8 @@
                 <a:solidFill>
                   <a:schemeClr val="tx1"/>
                 </a:solidFill>
-                <a:latin typeface="微软雅黑" charset="-122"/>
-                <a:ea typeface="微软雅黑" charset="-122"/>
+                <a:latin typeface="微软雅黑" panose="020B0503020204020204" charset="-122"/>
+                <a:ea typeface="微软雅黑" panose="020B0503020204020204" charset="-122"/>
                 <a:sym typeface="+mn-ea"/>
               </a:rPr>
               <a:t>RadioMapSeer</a:t>
@@ -13942,8 +13982,8 @@
                 <a:solidFill>
                   <a:schemeClr val="tx1"/>
                 </a:solidFill>
-                <a:latin typeface="微软雅黑" charset="-122"/>
-                <a:ea typeface="微软雅黑" charset="-122"/>
+                <a:latin typeface="微软雅黑" panose="020B0503020204020204" charset="-122"/>
+                <a:ea typeface="微软雅黑" panose="020B0503020204020204" charset="-122"/>
                 <a:sym typeface="+mn-ea"/>
               </a:rPr>
               <a:t>射线追踪地图与模拟行走轨迹；可借鉴</a:t>
@@ -13953,8 +13993,8 @@
                 <a:solidFill>
                   <a:schemeClr val="tx1"/>
                 </a:solidFill>
-                <a:latin typeface="微软雅黑" charset="-122"/>
-                <a:ea typeface="微软雅黑" charset="-122"/>
+                <a:latin typeface="微软雅黑" panose="020B0503020204020204" charset="-122"/>
+                <a:ea typeface="微软雅黑" panose="020B0503020204020204" charset="-122"/>
                 <a:sym typeface="+mn-ea"/>
               </a:rPr>
               <a:t>“</a:t>
@@ -13964,8 +14004,8 @@
                 <a:solidFill>
                   <a:schemeClr val="tx1"/>
                 </a:solidFill>
-                <a:latin typeface="微软雅黑" charset="-122"/>
-                <a:ea typeface="微软雅黑" charset="-122"/>
+                <a:latin typeface="微软雅黑" panose="020B0503020204020204" charset="-122"/>
+                <a:ea typeface="微软雅黑" panose="020B0503020204020204" charset="-122"/>
                 <a:sym typeface="+mn-ea"/>
               </a:rPr>
               <a:t>预测弱信号位置＋标记不确定区域</a:t>
@@ -13975,8 +14015,8 @@
                 <a:solidFill>
                   <a:schemeClr val="tx1"/>
                 </a:solidFill>
-                <a:latin typeface="微软雅黑" charset="-122"/>
-                <a:ea typeface="微软雅黑" charset="-122"/>
+                <a:latin typeface="微软雅黑" panose="020B0503020204020204" charset="-122"/>
+                <a:ea typeface="微软雅黑" panose="020B0503020204020204" charset="-122"/>
                 <a:sym typeface="+mn-ea"/>
               </a:rPr>
               <a:t>”</a:t>
@@ -13986,8 +14026,8 @@
                 <a:solidFill>
                   <a:schemeClr val="tx1"/>
                 </a:solidFill>
-                <a:latin typeface="微软雅黑" charset="-122"/>
-                <a:ea typeface="微软雅黑" charset="-122"/>
+                <a:latin typeface="微软雅黑" panose="020B0503020204020204" charset="-122"/>
+                <a:ea typeface="微软雅黑" panose="020B0503020204020204" charset="-122"/>
                 <a:sym typeface="+mn-ea"/>
               </a:rPr>
               <a:t>的思路，为后续补测选点提供依据。</a:t>
@@ -13996,8 +14036,8 @@
               <a:solidFill>
                 <a:schemeClr val="tx1"/>
               </a:solidFill>
-              <a:latin typeface="微软雅黑" charset="-122"/>
-              <a:ea typeface="微软雅黑" charset="-122"/>
+              <a:latin typeface="微软雅黑" panose="020B0503020204020204" charset="-122"/>
+              <a:ea typeface="微软雅黑" panose="020B0503020204020204" charset="-122"/>
               <a:sym typeface="+mn-ea"/>
             </a:endParaRPr>
           </a:p>
@@ -14164,8 +14204,8 @@
           <a:p>
             <a:r>
               <a:rPr lang="zh-CN" altLang="en-US" sz="2800" b="1" dirty="0">
-                <a:latin typeface="微软雅黑" charset="-122"/>
-                <a:ea typeface="微软雅黑" charset="-122"/>
+                <a:latin typeface="微软雅黑" panose="020B0503020204020204" charset="-122"/>
+                <a:ea typeface="微软雅黑" panose="020B0503020204020204" charset="-122"/>
                 <a:sym typeface="+mn-ea"/>
               </a:rPr>
               <a:t>方向二：</a:t>
@@ -14175,8 +14215,8 @@
                 <a:solidFill>
                   <a:schemeClr val="tx1"/>
                 </a:solidFill>
-                <a:latin typeface="微软雅黑" charset="0"/>
-                <a:ea typeface="微软雅黑" charset="0"/>
+                <a:latin typeface="微软雅黑" panose="020B0503020204020204" charset="-122"/>
+                <a:ea typeface="微软雅黑" panose="020B0503020204020204" charset="-122"/>
                 <a:sym typeface="+mn-ea"/>
               </a:rPr>
               <a:t>R</a:t>
@@ -14186,15 +14226,15 @@
                 <a:solidFill>
                   <a:schemeClr val="tx1"/>
                 </a:solidFill>
-                <a:latin typeface="微软雅黑" charset="0"/>
-                <a:ea typeface="微软雅黑" charset="0"/>
+                <a:latin typeface="微软雅黑" panose="020B0503020204020204" charset="-122"/>
+                <a:ea typeface="微软雅黑" panose="020B0503020204020204" charset="-122"/>
                 <a:sym typeface="+mn-ea"/>
               </a:rPr>
               <a:t>adio Map</a:t>
             </a:r>
             <a:endParaRPr lang="zh-CN" altLang="en-US">
-              <a:latin typeface="微软雅黑" charset="-122"/>
-              <a:ea typeface="微软雅黑" charset="-122"/>
+              <a:latin typeface="微软雅黑" panose="020B0503020204020204" charset="-122"/>
+              <a:ea typeface="微软雅黑" panose="020B0503020204020204" charset="-122"/>
               <a:sym typeface="+mn-ea"/>
             </a:endParaRPr>
           </a:p>
@@ -14236,8 +14276,8 @@
                 <a:solidFill>
                   <a:schemeClr val="tx1"/>
                 </a:solidFill>
-                <a:latin typeface="微软雅黑" charset="-122"/>
-                <a:ea typeface="微软雅黑" charset="-122"/>
+                <a:latin typeface="微软雅黑" panose="020B0503020204020204" charset="-122"/>
+                <a:ea typeface="微软雅黑" panose="020B0503020204020204" charset="-122"/>
                 <a:sym typeface="+mn-ea"/>
               </a:rPr>
               <a:t>3. </a:t>
@@ -14247,8 +14287,8 @@
                 <a:solidFill>
                   <a:schemeClr val="tx1"/>
                 </a:solidFill>
-                <a:latin typeface="微软雅黑" charset="-122"/>
-                <a:ea typeface="微软雅黑" charset="-122"/>
+                <a:latin typeface="微软雅黑" panose="020B0503020204020204" charset="-122"/>
+                <a:ea typeface="微软雅黑" panose="020B0503020204020204" charset="-122"/>
                 <a:sym typeface="+mn-ea"/>
               </a:rPr>
               <a:t>基于稀疏测量的高效率城市三维无线电地图估计</a:t>
@@ -14258,8 +14298,8 @@
                 <a:solidFill>
                   <a:schemeClr val="tx1"/>
                 </a:solidFill>
-                <a:latin typeface="微软雅黑" charset="-122"/>
-                <a:ea typeface="微软雅黑" charset="-122"/>
+                <a:latin typeface="微软雅黑" panose="020B0503020204020204" charset="-122"/>
+                <a:ea typeface="微软雅黑" panose="020B0503020204020204" charset="-122"/>
                 <a:sym typeface="+mn-ea"/>
               </a:rPr>
               <a:t>[</a:t>
@@ -14269,8 +14309,8 @@
                 <a:solidFill>
                   <a:srgbClr val="000000"/>
                 </a:solidFill>
-                <a:latin typeface="微软雅黑" charset="-122"/>
-                <a:ea typeface="微软雅黑" charset="-122"/>
+                <a:latin typeface="微软雅黑" panose="020B0503020204020204" charset="-122"/>
+                <a:ea typeface="微软雅黑" panose="020B0503020204020204" charset="-122"/>
                 <a:cs typeface="+mn-ea"/>
                 <a:sym typeface="+mn-ea"/>
               </a:rPr>
@@ -14281,8 +14321,8 @@
                 <a:solidFill>
                   <a:srgbClr val="000000"/>
                 </a:solidFill>
-                <a:latin typeface="微软雅黑" charset="0"/>
-                <a:ea typeface="微软雅黑" charset="0"/>
+                <a:latin typeface="微软雅黑" panose="020B0503020204020204" charset="-122"/>
+                <a:ea typeface="微软雅黑" panose="020B0503020204020204" charset="-122"/>
                 <a:cs typeface="+mn-ea"/>
                 <a:sym typeface="+mn-ea"/>
               </a:rPr>
@@ -14293,8 +14333,8 @@
                 <a:solidFill>
                   <a:srgbClr val="000000"/>
                 </a:solidFill>
-                <a:latin typeface="微软雅黑" charset="-122"/>
-                <a:ea typeface="微软雅黑" charset="-122"/>
+                <a:latin typeface="微软雅黑" panose="020B0503020204020204" charset="-122"/>
+                <a:ea typeface="微软雅黑" panose="020B0503020204020204" charset="-122"/>
                 <a:cs typeface="+mn-ea"/>
                 <a:sym typeface="+mn-ea"/>
               </a:rPr>
@@ -14304,8 +14344,8 @@
               <a:solidFill>
                 <a:schemeClr val="tx1"/>
               </a:solidFill>
-              <a:latin typeface="微软雅黑" charset="-122"/>
-              <a:ea typeface="微软雅黑" charset="-122"/>
+              <a:latin typeface="微软雅黑" panose="020B0503020204020204" charset="-122"/>
+              <a:ea typeface="微软雅黑" panose="020B0503020204020204" charset="-122"/>
               <a:sym typeface="+mn-ea"/>
             </a:endParaRPr>
           </a:p>
@@ -14322,8 +14362,8 @@
                 <a:solidFill>
                   <a:srgbClr val="FF0000"/>
                 </a:solidFill>
-                <a:latin typeface="微软雅黑" charset="-122"/>
-                <a:ea typeface="微软雅黑" charset="-122"/>
+                <a:latin typeface="微软雅黑" panose="020B0503020204020204" charset="-122"/>
+                <a:ea typeface="微软雅黑" panose="020B0503020204020204" charset="-122"/>
                 <a:sym typeface="+mn-ea"/>
               </a:rPr>
               <a:t>研究问题与价值：</a:t>
@@ -14333,19 +14373,19 @@
                 <a:solidFill>
                   <a:srgbClr val="000000"/>
                 </a:solidFill>
-                <a:latin typeface="微软雅黑" charset="-122"/>
-                <a:ea typeface="微软雅黑" charset="-122"/>
-                <a:sym typeface="+mn-ea"/>
-              </a:rPr>
-              <a:t>城市中的信号强弱会随位置、高度和建筑遮挡发生变化，逐点测量整个三维空间，成本很高。本文研究如何利用少量外场测量，估计未测位置的信号强度。</a:t>
+                <a:latin typeface="微软雅黑" panose="020B0503020204020204" charset="-122"/>
+                <a:ea typeface="微软雅黑" panose="020B0503020204020204" charset="-122"/>
+                <a:sym typeface="+mn-ea"/>
+              </a:rPr>
+              <a:t>城市中的信号强弱会随位置、高度和建筑遮挡发生变化，逐点测量整个三维空间，成本很高。本文研究如何利用少量实测测量，估计未测位置的信号强度。</a:t>
             </a:r>
             <a:r>
               <a:rPr lang="zh-CN" altLang="en-US" sz="1400" b="1" dirty="0">
                 <a:solidFill>
                   <a:srgbClr val="000000"/>
                 </a:solidFill>
-                <a:latin typeface="微软雅黑" charset="-122"/>
-                <a:ea typeface="微软雅黑" charset="-122"/>
+                <a:latin typeface="微软雅黑" panose="020B0503020204020204" charset="-122"/>
+                <a:ea typeface="微软雅黑" panose="020B0503020204020204" charset="-122"/>
                 <a:sym typeface="+mn-ea"/>
               </a:rPr>
               <a:t>价值包括两部分：一是补全未测位置的覆盖信息，二是选择更有代表性、更值得测量的位置，减少建图所需的采集量。</a:t>
@@ -14354,8 +14394,8 @@
               <a:solidFill>
                 <a:srgbClr val="000000"/>
               </a:solidFill>
-              <a:latin typeface="微软雅黑" charset="-122"/>
-              <a:ea typeface="微软雅黑" charset="-122"/>
+              <a:latin typeface="微软雅黑" panose="020B0503020204020204" charset="-122"/>
+              <a:ea typeface="微软雅黑" panose="020B0503020204020204" charset="-122"/>
               <a:sym typeface="+mn-ea"/>
             </a:endParaRPr>
           </a:p>
@@ -14372,8 +14412,8 @@
                 <a:solidFill>
                   <a:srgbClr val="FF0000"/>
                 </a:solidFill>
-                <a:latin typeface="微软雅黑" charset="-122"/>
-                <a:ea typeface="微软雅黑" charset="-122"/>
+                <a:latin typeface="微软雅黑" panose="020B0503020204020204" charset="-122"/>
+                <a:ea typeface="微软雅黑" panose="020B0503020204020204" charset="-122"/>
                 <a:sym typeface="+mn-ea"/>
               </a:rPr>
               <a:t>核心思路：</a:t>
@@ -14383,8 +14423,8 @@
                 <a:solidFill>
                   <a:srgbClr val="000000"/>
                 </a:solidFill>
-                <a:latin typeface="微软雅黑" charset="-122"/>
-                <a:ea typeface="微软雅黑" charset="-122"/>
+                <a:latin typeface="微软雅黑" panose="020B0503020204020204" charset="-122"/>
+                <a:ea typeface="微软雅黑" panose="020B0503020204020204" charset="-122"/>
                 <a:sym typeface="+mn-ea"/>
               </a:rPr>
               <a:t>依据建筑和基站信息，通过射线追踪生成初步覆盖地图，再利用实测数据学习仿真误差，并将修正结果推广到未测位置：</a:t>
@@ -14394,8 +14434,8 @@
                 <a:solidFill>
                   <a:srgbClr val="000000"/>
                 </a:solidFill>
-                <a:latin typeface="微软雅黑" charset="-122"/>
-                <a:ea typeface="微软雅黑" charset="-122"/>
+                <a:latin typeface="微软雅黑" panose="020B0503020204020204" charset="-122"/>
+                <a:ea typeface="微软雅黑" panose="020B0503020204020204" charset="-122"/>
                 <a:sym typeface="+mn-ea"/>
               </a:rPr>
               <a:t>最终信号估计＝仿真信号强度＋模型预测的修正量。</a:t>
@@ -14404,8 +14444,8 @@
               <a:solidFill>
                 <a:srgbClr val="000000"/>
               </a:solidFill>
-              <a:latin typeface="微软雅黑" charset="-122"/>
-              <a:ea typeface="微软雅黑" charset="-122"/>
+              <a:latin typeface="微软雅黑" panose="020B0503020204020204" charset="-122"/>
+              <a:ea typeface="微软雅黑" panose="020B0503020204020204" charset="-122"/>
               <a:sym typeface="+mn-ea"/>
             </a:endParaRPr>
           </a:p>
@@ -14422,8 +14462,8 @@
                 <a:solidFill>
                   <a:srgbClr val="000000"/>
                 </a:solidFill>
-                <a:latin typeface="微软雅黑" charset="-122"/>
-                <a:ea typeface="微软雅黑" charset="-122"/>
+                <a:latin typeface="微软雅黑" panose="020B0503020204020204" charset="-122"/>
+                <a:ea typeface="微软雅黑" panose="020B0503020204020204" charset="-122"/>
                 <a:sym typeface="+mn-ea"/>
               </a:rPr>
               <a:t>这里使用的高斯过程回归（</a:t>
@@ -14433,8 +14473,8 @@
                 <a:solidFill>
                   <a:srgbClr val="000000"/>
                 </a:solidFill>
-                <a:latin typeface="微软雅黑" charset="-122"/>
-                <a:ea typeface="微软雅黑" charset="-122"/>
+                <a:latin typeface="微软雅黑" panose="020B0503020204020204" charset="-122"/>
+                <a:ea typeface="微软雅黑" panose="020B0503020204020204" charset="-122"/>
                 <a:sym typeface="+mn-ea"/>
               </a:rPr>
               <a:t>GPR</a:t>
@@ -14444,8 +14484,8 @@
                 <a:solidFill>
                   <a:srgbClr val="000000"/>
                 </a:solidFill>
-                <a:latin typeface="微软雅黑" charset="-122"/>
-                <a:ea typeface="微软雅黑" charset="-122"/>
+                <a:latin typeface="微软雅黑" panose="020B0503020204020204" charset="-122"/>
+                <a:ea typeface="微软雅黑" panose="020B0503020204020204" charset="-122"/>
                 <a:sym typeface="+mn-ea"/>
               </a:rPr>
               <a:t>），可以根据已测位置之间的相关性估计其他位置的修正量，同时给出预测的不确定性。模型输入包括三维坐标和该位置的仿真</a:t>
@@ -14455,8 +14495,8 @@
                 <a:solidFill>
                   <a:srgbClr val="000000"/>
                 </a:solidFill>
-                <a:latin typeface="微软雅黑" charset="-122"/>
-                <a:ea typeface="微软雅黑" charset="-122"/>
+                <a:latin typeface="微软雅黑" panose="020B0503020204020204" charset="-122"/>
+                <a:ea typeface="微软雅黑" panose="020B0503020204020204" charset="-122"/>
                 <a:sym typeface="+mn-ea"/>
               </a:rPr>
               <a:t>RSRP</a:t>
@@ -14466,8 +14506,8 @@
                 <a:solidFill>
                   <a:srgbClr val="000000"/>
                 </a:solidFill>
-                <a:latin typeface="微软雅黑" charset="-122"/>
-                <a:ea typeface="微软雅黑" charset="-122"/>
+                <a:latin typeface="微软雅黑" panose="020B0503020204020204" charset="-122"/>
+                <a:ea typeface="微软雅黑" panose="020B0503020204020204" charset="-122"/>
                 <a:sym typeface="+mn-ea"/>
               </a:rPr>
               <a:t>。</a:t>
@@ -14476,8 +14516,8 @@
               <a:solidFill>
                 <a:srgbClr val="000000"/>
               </a:solidFill>
-              <a:latin typeface="微软雅黑" charset="-122"/>
-              <a:ea typeface="微软雅黑" charset="-122"/>
+              <a:latin typeface="微软雅黑" panose="020B0503020204020204" charset="-122"/>
+              <a:ea typeface="微软雅黑" panose="020B0503020204020204" charset="-122"/>
               <a:sym typeface="+mn-ea"/>
             </a:endParaRPr>
           </a:p>
@@ -14494,8 +14534,8 @@
                 <a:solidFill>
                   <a:srgbClr val="FF0000"/>
                 </a:solidFill>
-                <a:latin typeface="微软雅黑" charset="-122"/>
-                <a:ea typeface="微软雅黑" charset="-122"/>
+                <a:latin typeface="微软雅黑" panose="020B0503020204020204" charset="-122"/>
+                <a:ea typeface="微软雅黑" panose="020B0503020204020204" charset="-122"/>
                 <a:sym typeface="+mn-ea"/>
               </a:rPr>
               <a:t>研究方法：</a:t>
@@ -14504,8 +14544,8 @@
               <a:solidFill>
                 <a:srgbClr val="FF0000"/>
               </a:solidFill>
-              <a:latin typeface="微软雅黑" charset="-122"/>
-              <a:ea typeface="微软雅黑" charset="-122"/>
+              <a:latin typeface="微软雅黑" panose="020B0503020204020204" charset="-122"/>
+              <a:ea typeface="微软雅黑" panose="020B0503020204020204" charset="-122"/>
               <a:sym typeface="+mn-ea"/>
             </a:endParaRPr>
           </a:p>
@@ -14522,8 +14562,8 @@
                 <a:solidFill>
                   <a:schemeClr val="tx1"/>
                 </a:solidFill>
-                <a:latin typeface="微软雅黑" charset="-122"/>
-                <a:ea typeface="微软雅黑" charset="-122"/>
+                <a:latin typeface="微软雅黑" panose="020B0503020204020204" charset="-122"/>
+                <a:ea typeface="微软雅黑" panose="020B0503020204020204" charset="-122"/>
                 <a:sym typeface="+mn-ea"/>
               </a:rPr>
               <a:t>a. </a:t>
@@ -14533,8 +14573,8 @@
                 <a:solidFill>
                   <a:schemeClr val="tx1"/>
                 </a:solidFill>
-                <a:latin typeface="微软雅黑" charset="-122"/>
-                <a:ea typeface="微软雅黑" charset="-122"/>
+                <a:latin typeface="微软雅黑" panose="020B0503020204020204" charset="-122"/>
+                <a:ea typeface="微软雅黑" panose="020B0503020204020204" charset="-122"/>
                 <a:sym typeface="+mn-ea"/>
               </a:rPr>
               <a:t>获取实测与环境信息，建立初步覆盖地图。</a:t>
@@ -14544,8 +14584,8 @@
                 <a:solidFill>
                   <a:schemeClr val="tx1"/>
                 </a:solidFill>
-                <a:latin typeface="微软雅黑" charset="-122"/>
-                <a:ea typeface="微软雅黑" charset="-122"/>
+                <a:latin typeface="微软雅黑" panose="020B0503020204020204" charset="-122"/>
+                <a:ea typeface="微软雅黑" panose="020B0503020204020204" charset="-122"/>
                 <a:sym typeface="+mn-ea"/>
               </a:rPr>
               <a:t>输入包括测量点的三维位置、参考信号接收功率（</a:t>
@@ -14555,8 +14595,8 @@
                 <a:solidFill>
                   <a:schemeClr val="tx1"/>
                 </a:solidFill>
-                <a:latin typeface="微软雅黑" charset="-122"/>
-                <a:ea typeface="微软雅黑" charset="-122"/>
+                <a:latin typeface="微软雅黑" panose="020B0503020204020204" charset="-122"/>
+                <a:ea typeface="微软雅黑" panose="020B0503020204020204" charset="-122"/>
                 <a:sym typeface="+mn-ea"/>
               </a:rPr>
               <a:t>RSRP</a:t>
@@ -14566,8 +14606,8 @@
                 <a:solidFill>
                   <a:schemeClr val="tx1"/>
                 </a:solidFill>
-                <a:latin typeface="微软雅黑" charset="-122"/>
-                <a:ea typeface="微软雅黑" charset="-122"/>
+                <a:latin typeface="微软雅黑" panose="020B0503020204020204" charset="-122"/>
+                <a:ea typeface="微软雅黑" panose="020B0503020204020204" charset="-122"/>
                 <a:sym typeface="+mn-ea"/>
               </a:rPr>
               <a:t>），以及建筑和基站信息。利用射线追踪获得各位置的仿真</a:t>
@@ -14577,8 +14617,8 @@
                 <a:solidFill>
                   <a:schemeClr val="tx1"/>
                 </a:solidFill>
-                <a:latin typeface="微软雅黑" charset="-122"/>
-                <a:ea typeface="微软雅黑" charset="-122"/>
+                <a:latin typeface="微软雅黑" panose="020B0503020204020204" charset="-122"/>
+                <a:ea typeface="微软雅黑" panose="020B0503020204020204" charset="-122"/>
                 <a:sym typeface="+mn-ea"/>
               </a:rPr>
               <a:t>RSRP</a:t>
@@ -14588,8 +14628,8 @@
                 <a:solidFill>
                   <a:schemeClr val="tx1"/>
                 </a:solidFill>
-                <a:latin typeface="微软雅黑" charset="-122"/>
-                <a:ea typeface="微软雅黑" charset="-122"/>
+                <a:latin typeface="微软雅黑" panose="020B0503020204020204" charset="-122"/>
+                <a:ea typeface="微软雅黑" panose="020B0503020204020204" charset="-122"/>
                 <a:sym typeface="+mn-ea"/>
               </a:rPr>
               <a:t>，为少量实测条件下的建图提供初始参考。</a:t>
@@ -14598,8 +14638,8 @@
               <a:solidFill>
                 <a:schemeClr val="tx1"/>
               </a:solidFill>
-              <a:latin typeface="微软雅黑" charset="-122"/>
-              <a:ea typeface="微软雅黑" charset="-122"/>
+              <a:latin typeface="微软雅黑" panose="020B0503020204020204" charset="-122"/>
+              <a:ea typeface="微软雅黑" panose="020B0503020204020204" charset="-122"/>
               <a:sym typeface="+mn-ea"/>
             </a:endParaRPr>
           </a:p>
@@ -14616,8 +14656,8 @@
                 <a:solidFill>
                   <a:schemeClr val="tx1"/>
                 </a:solidFill>
-                <a:latin typeface="微软雅黑" charset="-122"/>
-                <a:ea typeface="微软雅黑" charset="-122"/>
+                <a:latin typeface="微软雅黑" panose="020B0503020204020204" charset="-122"/>
+                <a:ea typeface="微软雅黑" panose="020B0503020204020204" charset="-122"/>
                 <a:sym typeface="+mn-ea"/>
               </a:rPr>
               <a:t>b.</a:t>
@@ -14627,8 +14667,8 @@
                 <a:solidFill>
                   <a:schemeClr val="tx1"/>
                 </a:solidFill>
-                <a:latin typeface="微软雅黑" charset="-122"/>
-                <a:ea typeface="微软雅黑" charset="-122"/>
+                <a:latin typeface="微软雅黑" panose="020B0503020204020204" charset="-122"/>
+                <a:ea typeface="微软雅黑" panose="020B0503020204020204" charset="-122"/>
                 <a:sym typeface="+mn-ea"/>
               </a:rPr>
               <a:t>学习仿真误差，补全未测位置的信号强度。</a:t>
@@ -14638,8 +14678,8 @@
                 <a:solidFill>
                   <a:schemeClr val="tx1"/>
                 </a:solidFill>
-                <a:latin typeface="微软雅黑" charset="-122"/>
-                <a:ea typeface="微软雅黑" charset="-122"/>
+                <a:latin typeface="微软雅黑" panose="020B0503020204020204" charset="-122"/>
+                <a:ea typeface="微软雅黑" panose="020B0503020204020204" charset="-122"/>
                 <a:sym typeface="+mn-ea"/>
               </a:rPr>
               <a:t>计算已测位置的</a:t>
@@ -14649,8 +14689,8 @@
                 <a:solidFill>
                   <a:schemeClr val="tx1"/>
                 </a:solidFill>
-                <a:latin typeface="微软雅黑" charset="-122"/>
-                <a:ea typeface="微软雅黑" charset="-122"/>
+                <a:latin typeface="微软雅黑" panose="020B0503020204020204" charset="-122"/>
+                <a:ea typeface="微软雅黑" panose="020B0503020204020204" charset="-122"/>
                 <a:sym typeface="+mn-ea"/>
               </a:rPr>
               <a:t>“</a:t>
@@ -14660,8 +14700,8 @@
                 <a:solidFill>
                   <a:schemeClr val="tx1"/>
                 </a:solidFill>
-                <a:latin typeface="微软雅黑" charset="-122"/>
-                <a:ea typeface="微软雅黑" charset="-122"/>
+                <a:latin typeface="微软雅黑" panose="020B0503020204020204" charset="-122"/>
+                <a:ea typeface="微软雅黑" panose="020B0503020204020204" charset="-122"/>
                 <a:sym typeface="+mn-ea"/>
               </a:rPr>
               <a:t>实测值－仿真值</a:t>
@@ -14671,8 +14711,8 @@
                 <a:solidFill>
                   <a:schemeClr val="tx1"/>
                 </a:solidFill>
-                <a:latin typeface="微软雅黑" charset="-122"/>
-                <a:ea typeface="微软雅黑" charset="-122"/>
+                <a:latin typeface="微软雅黑" panose="020B0503020204020204" charset="-122"/>
+                <a:ea typeface="微软雅黑" panose="020B0503020204020204" charset="-122"/>
                 <a:sym typeface="+mn-ea"/>
               </a:rPr>
               <a:t>”</a:t>
@@ -14682,8 +14722,8 @@
                 <a:solidFill>
                   <a:schemeClr val="tx1"/>
                 </a:solidFill>
-                <a:latin typeface="微软雅黑" charset="-122"/>
-                <a:ea typeface="微软雅黑" charset="-122"/>
+                <a:latin typeface="微软雅黑" panose="020B0503020204020204" charset="-122"/>
+                <a:ea typeface="微软雅黑" panose="020B0503020204020204" charset="-122"/>
                 <a:sym typeface="+mn-ea"/>
               </a:rPr>
               <a:t>，以三维坐标和仿真</a:t>
@@ -14693,8 +14733,8 @@
                 <a:solidFill>
                   <a:schemeClr val="tx1"/>
                 </a:solidFill>
-                <a:latin typeface="微软雅黑" charset="-122"/>
-                <a:ea typeface="微软雅黑" charset="-122"/>
+                <a:latin typeface="微软雅黑" panose="020B0503020204020204" charset="-122"/>
+                <a:ea typeface="微软雅黑" panose="020B0503020204020204" charset="-122"/>
                 <a:sym typeface="+mn-ea"/>
               </a:rPr>
               <a:t>RSRP</a:t>
@@ -14704,8 +14744,8 @@
                 <a:solidFill>
                   <a:schemeClr val="tx1"/>
                 </a:solidFill>
-                <a:latin typeface="微软雅黑" charset="-122"/>
-                <a:ea typeface="微软雅黑" charset="-122"/>
+                <a:latin typeface="微软雅黑" panose="020B0503020204020204" charset="-122"/>
+                <a:ea typeface="微软雅黑" panose="020B0503020204020204" charset="-122"/>
                 <a:sym typeface="+mn-ea"/>
               </a:rPr>
               <a:t>为模型输入，预测其他位置的修正量，再与仿真值相加，输出补全后的三维</a:t>
@@ -14715,8 +14755,8 @@
                 <a:solidFill>
                   <a:schemeClr val="tx1"/>
                 </a:solidFill>
-                <a:latin typeface="微软雅黑" charset="-122"/>
-                <a:ea typeface="微软雅黑" charset="-122"/>
+                <a:latin typeface="微软雅黑" panose="020B0503020204020204" charset="-122"/>
+                <a:ea typeface="微软雅黑" panose="020B0503020204020204" charset="-122"/>
                 <a:sym typeface="+mn-ea"/>
               </a:rPr>
               <a:t>RSRP</a:t>
@@ -14726,8 +14766,8 @@
                 <a:solidFill>
                   <a:schemeClr val="tx1"/>
                 </a:solidFill>
-                <a:latin typeface="微软雅黑" charset="-122"/>
-                <a:ea typeface="微软雅黑" charset="-122"/>
+                <a:latin typeface="微软雅黑" panose="020B0503020204020204" charset="-122"/>
+                <a:ea typeface="微软雅黑" panose="020B0503020204020204" charset="-122"/>
                 <a:sym typeface="+mn-ea"/>
               </a:rPr>
               <a:t>地图及预测不确定性。</a:t>
@@ -14736,8 +14776,8 @@
               <a:solidFill>
                 <a:schemeClr val="tx1"/>
               </a:solidFill>
-              <a:latin typeface="微软雅黑" charset="-122"/>
-              <a:ea typeface="微软雅黑" charset="-122"/>
+              <a:latin typeface="微软雅黑" panose="020B0503020204020204" charset="-122"/>
+              <a:ea typeface="微软雅黑" panose="020B0503020204020204" charset="-122"/>
               <a:sym typeface="+mn-ea"/>
             </a:endParaRPr>
           </a:p>
@@ -14754,8 +14794,8 @@
                 <a:solidFill>
                   <a:schemeClr val="tx1"/>
                 </a:solidFill>
-                <a:latin typeface="微软雅黑" charset="-122"/>
-                <a:ea typeface="微软雅黑" charset="-122"/>
+                <a:latin typeface="微软雅黑" panose="020B0503020204020204" charset="-122"/>
+                <a:ea typeface="微软雅黑" panose="020B0503020204020204" charset="-122"/>
                 <a:sym typeface="+mn-ea"/>
               </a:rPr>
               <a:t>c. </a:t>
@@ -14765,8 +14805,8 @@
                 <a:solidFill>
                   <a:schemeClr val="tx1"/>
                 </a:solidFill>
-                <a:latin typeface="微软雅黑" charset="-122"/>
-                <a:ea typeface="微软雅黑" charset="-122"/>
+                <a:latin typeface="微软雅黑" panose="020B0503020204020204" charset="-122"/>
+                <a:ea typeface="微软雅黑" panose="020B0503020204020204" charset="-122"/>
                 <a:sym typeface="+mn-ea"/>
               </a:rPr>
               <a:t>选择代表性或高不确定性位置，减少重复采集。</a:t>
@@ -14776,8 +14816,8 @@
                 <a:solidFill>
                   <a:schemeClr val="tx1"/>
                 </a:solidFill>
-                <a:latin typeface="微软雅黑" charset="-122"/>
-                <a:ea typeface="微软雅黑" charset="-122"/>
+                <a:latin typeface="微软雅黑" panose="020B0503020204020204" charset="-122"/>
+                <a:ea typeface="微软雅黑" panose="020B0503020204020204" charset="-122"/>
                 <a:sym typeface="+mn-ea"/>
               </a:rPr>
               <a:t>在线方式根据当前模型，逐轮选择预测不确定性最高的位置补测；离线方式按照位置与仿真信号强度聚类，一次选出一批代表点。两种方式分别适用于动态补测和预先安排采集任务。</a:t>
@@ -14786,8 +14826,8 @@
               <a:solidFill>
                 <a:schemeClr val="tx1"/>
               </a:solidFill>
-              <a:latin typeface="微软雅黑" charset="-122"/>
-              <a:ea typeface="微软雅黑" charset="-122"/>
+              <a:latin typeface="微软雅黑" panose="020B0503020204020204" charset="-122"/>
+              <a:ea typeface="微软雅黑" panose="020B0503020204020204" charset="-122"/>
               <a:sym typeface="+mn-ea"/>
             </a:endParaRPr>
           </a:p>
@@ -14804,8 +14844,8 @@
                 <a:solidFill>
                   <a:schemeClr val="tx1"/>
                 </a:solidFill>
-                <a:latin typeface="微软雅黑" charset="-122"/>
-                <a:ea typeface="微软雅黑" charset="-122"/>
+                <a:latin typeface="微软雅黑" panose="020B0503020204020204" charset="-122"/>
+                <a:ea typeface="微软雅黑" panose="020B0503020204020204" charset="-122"/>
                 <a:sym typeface="+mn-ea"/>
               </a:rPr>
               <a:t>d. </a:t>
@@ -14815,19 +14855,19 @@
                 <a:solidFill>
                   <a:srgbClr val="000000"/>
                 </a:solidFill>
-                <a:latin typeface="微软雅黑" charset="-122"/>
-                <a:ea typeface="微软雅黑" charset="-122"/>
-                <a:sym typeface="+mn-ea"/>
-              </a:rPr>
-              <a:t>利用外场数据，验证估计精度与采样效率。</a:t>
+                <a:latin typeface="微软雅黑" panose="020B0503020204020204" charset="-122"/>
+                <a:ea typeface="微软雅黑" panose="020B0503020204020204" charset="-122"/>
+                <a:sym typeface="+mn-ea"/>
+              </a:rPr>
+              <a:t>利用实测数据，验证估计精度与采样效率。</a:t>
             </a:r>
             <a:r>
               <a:rPr lang="zh-CN" altLang="en-US" sz="1400" dirty="0">
                 <a:solidFill>
                   <a:srgbClr val="000000"/>
                 </a:solidFill>
-                <a:latin typeface="微软雅黑" charset="-122"/>
-                <a:ea typeface="微软雅黑" charset="-122"/>
+                <a:latin typeface="微软雅黑" panose="020B0503020204020204" charset="-122"/>
+                <a:ea typeface="微软雅黑" panose="020B0503020204020204" charset="-122"/>
                 <a:sym typeface="+mn-ea"/>
               </a:rPr>
               <a:t>作者通过无人机获得</a:t>
@@ -14837,8 +14877,8 @@
                 <a:solidFill>
                   <a:srgbClr val="000000"/>
                 </a:solidFill>
-                <a:latin typeface="微软雅黑" charset="-122"/>
-                <a:ea typeface="微软雅黑" charset="-122"/>
+                <a:latin typeface="微软雅黑" panose="020B0503020204020204" charset="-122"/>
+                <a:ea typeface="微软雅黑" panose="020B0503020204020204" charset="-122"/>
                 <a:sym typeface="+mn-ea"/>
               </a:rPr>
               <a:t>4,274</a:t>
@@ -14848,8 +14888,8 @@
                 <a:solidFill>
                   <a:srgbClr val="000000"/>
                 </a:solidFill>
-                <a:latin typeface="微软雅黑" charset="-122"/>
-                <a:ea typeface="微软雅黑" charset="-122"/>
+                <a:latin typeface="微软雅黑" panose="020B0503020204020204" charset="-122"/>
+                <a:ea typeface="微软雅黑" panose="020B0503020204020204" charset="-122"/>
                 <a:sym typeface="+mn-ea"/>
               </a:rPr>
               <a:t>个实测点，使用部分数据建模、其余数据验证。</a:t>
@@ -14859,8 +14899,8 @@
                 <a:solidFill>
                   <a:srgbClr val="000000"/>
                 </a:solidFill>
-                <a:latin typeface="微软雅黑" charset="-122"/>
-                <a:ea typeface="微软雅黑" charset="-122"/>
+                <a:latin typeface="微软雅黑" panose="020B0503020204020204" charset="-122"/>
+                <a:ea typeface="微软雅黑" panose="020B0503020204020204" charset="-122"/>
                 <a:sym typeface="+mn-ea"/>
               </a:rPr>
               <a:t>右图显示，两种选点方案使用约</a:t>
@@ -14870,8 +14910,8 @@
                 <a:solidFill>
                   <a:srgbClr val="000000"/>
                 </a:solidFill>
-                <a:latin typeface="微软雅黑" charset="-122"/>
-                <a:ea typeface="微软雅黑" charset="-122"/>
+                <a:latin typeface="微软雅黑" panose="020B0503020204020204" charset="-122"/>
+                <a:ea typeface="微软雅黑" panose="020B0503020204020204" charset="-122"/>
                 <a:sym typeface="+mn-ea"/>
               </a:rPr>
               <a:t>2%</a:t>
@@ -14881,8 +14921,8 @@
                 <a:solidFill>
                   <a:srgbClr val="000000"/>
                 </a:solidFill>
-                <a:latin typeface="微软雅黑" charset="-122"/>
-                <a:ea typeface="微软雅黑" charset="-122"/>
+                <a:latin typeface="微软雅黑" panose="020B0503020204020204" charset="-122"/>
+                <a:ea typeface="微软雅黑" panose="020B0503020204020204" charset="-122"/>
                 <a:sym typeface="+mn-ea"/>
               </a:rPr>
               <a:t>的测量点，可达到约</a:t>
@@ -14892,8 +14932,8 @@
                 <a:solidFill>
                   <a:srgbClr val="000000"/>
                 </a:solidFill>
-                <a:latin typeface="微软雅黑" charset="-122"/>
-                <a:ea typeface="微软雅黑" charset="-122"/>
+                <a:latin typeface="微软雅黑" panose="020B0503020204020204" charset="-122"/>
+                <a:ea typeface="微软雅黑" panose="020B0503020204020204" charset="-122"/>
                 <a:sym typeface="+mn-ea"/>
               </a:rPr>
               <a:t>10 dB</a:t>
@@ -14903,8 +14943,8 @@
                 <a:solidFill>
                   <a:srgbClr val="000000"/>
                 </a:solidFill>
-                <a:latin typeface="微软雅黑" charset="-122"/>
-                <a:ea typeface="微软雅黑" charset="-122"/>
+                <a:latin typeface="微软雅黑" panose="020B0503020204020204" charset="-122"/>
+                <a:ea typeface="微软雅黑" panose="020B0503020204020204" charset="-122"/>
                 <a:sym typeface="+mn-ea"/>
               </a:rPr>
               <a:t>的</a:t>
@@ -14914,8 +14954,8 @@
                 <a:solidFill>
                   <a:srgbClr val="000000"/>
                 </a:solidFill>
-                <a:latin typeface="微软雅黑" charset="-122"/>
-                <a:ea typeface="微软雅黑" charset="-122"/>
+                <a:latin typeface="微软雅黑" panose="020B0503020204020204" charset="-122"/>
+                <a:ea typeface="微软雅黑" panose="020B0503020204020204" charset="-122"/>
                 <a:sym typeface="+mn-ea"/>
               </a:rPr>
               <a:t>RMSE</a:t>
@@ -14925,8 +14965,8 @@
                 <a:solidFill>
                   <a:srgbClr val="000000"/>
                 </a:solidFill>
-                <a:latin typeface="微软雅黑" charset="-122"/>
-                <a:ea typeface="微软雅黑" charset="-122"/>
+                <a:latin typeface="微软雅黑" panose="020B0503020204020204" charset="-122"/>
+                <a:ea typeface="微软雅黑" panose="020B0503020204020204" charset="-122"/>
                 <a:sym typeface="+mn-ea"/>
               </a:rPr>
               <a:t>，而部分对比方案需要超过</a:t>
@@ -14936,8 +14976,8 @@
                 <a:solidFill>
                   <a:srgbClr val="000000"/>
                 </a:solidFill>
-                <a:latin typeface="微软雅黑" charset="-122"/>
-                <a:ea typeface="微软雅黑" charset="-122"/>
+                <a:latin typeface="微软雅黑" panose="020B0503020204020204" charset="-122"/>
+                <a:ea typeface="微软雅黑" panose="020B0503020204020204" charset="-122"/>
                 <a:sym typeface="+mn-ea"/>
               </a:rPr>
               <a:t>14%</a:t>
@@ -14947,8 +14987,8 @@
                 <a:solidFill>
                   <a:srgbClr val="000000"/>
                 </a:solidFill>
-                <a:latin typeface="微软雅黑" charset="-122"/>
-                <a:ea typeface="微软雅黑" charset="-122"/>
+                <a:latin typeface="微软雅黑" panose="020B0503020204020204" charset="-122"/>
+                <a:ea typeface="微软雅黑" panose="020B0503020204020204" charset="-122"/>
                 <a:sym typeface="+mn-ea"/>
               </a:rPr>
               <a:t>的测量点，</a:t>
@@ -14958,8 +14998,8 @@
                 <a:solidFill>
                   <a:srgbClr val="000000"/>
                 </a:solidFill>
-                <a:latin typeface="微软雅黑" charset="-122"/>
-                <a:ea typeface="微软雅黑" charset="-122"/>
+                <a:latin typeface="微软雅黑" panose="020B0503020204020204" charset="-122"/>
+                <a:ea typeface="微软雅黑" panose="020B0503020204020204" charset="-122"/>
                 <a:sym typeface="+mn-ea"/>
               </a:rPr>
               <a:t>体现了减少测量量的效果。</a:t>
@@ -14968,8 +15008,8 @@
               <a:solidFill>
                 <a:srgbClr val="000000"/>
               </a:solidFill>
-              <a:latin typeface="微软雅黑" charset="-122"/>
-              <a:ea typeface="微软雅黑" charset="-122"/>
+              <a:latin typeface="微软雅黑" panose="020B0503020204020204" charset="-122"/>
+              <a:ea typeface="微软雅黑" panose="020B0503020204020204" charset="-122"/>
               <a:sym typeface="+mn-ea"/>
             </a:endParaRPr>
           </a:p>
@@ -14986,8 +15026,8 @@
                 <a:solidFill>
                   <a:srgbClr val="FF0000"/>
                 </a:solidFill>
-                <a:latin typeface="微软雅黑" charset="-122"/>
-                <a:ea typeface="微软雅黑" charset="-122"/>
+                <a:latin typeface="微软雅黑" panose="020B0503020204020204" charset="-122"/>
+                <a:ea typeface="微软雅黑" panose="020B0503020204020204" charset="-122"/>
                 <a:sym typeface="+mn-ea"/>
               </a:rPr>
               <a:t>成熟度与研究启示：</a:t>
@@ -14997,8 +15037,8 @@
                 <a:solidFill>
                   <a:schemeClr val="tx1"/>
                 </a:solidFill>
-                <a:latin typeface="微软雅黑" charset="-122"/>
-                <a:ea typeface="微软雅黑" charset="-122"/>
+                <a:latin typeface="微软雅黑" panose="020B0503020204020204" charset="-122"/>
+                <a:ea typeface="微软雅黑" panose="020B0503020204020204" charset="-122"/>
                 <a:sym typeface="+mn-ea"/>
               </a:rPr>
               <a:t>具备真实外场采集与建图精度对比。可借鉴其</a:t>
@@ -15008,8 +15048,8 @@
                 <a:solidFill>
                   <a:schemeClr val="tx1"/>
                 </a:solidFill>
-                <a:latin typeface="微软雅黑" charset="-122"/>
-                <a:ea typeface="微软雅黑" charset="-122"/>
+                <a:latin typeface="微软雅黑" panose="020B0503020204020204" charset="-122"/>
+                <a:ea typeface="微软雅黑" panose="020B0503020204020204" charset="-122"/>
                 <a:sym typeface="+mn-ea"/>
               </a:rPr>
               <a:t>“</a:t>
@@ -15019,8 +15059,8 @@
                 <a:solidFill>
                   <a:schemeClr val="tx1"/>
                 </a:solidFill>
-                <a:latin typeface="微软雅黑" charset="-122"/>
-                <a:ea typeface="微软雅黑" charset="-122"/>
+                <a:latin typeface="微软雅黑" panose="020B0503020204020204" charset="-122"/>
+                <a:ea typeface="微软雅黑" panose="020B0503020204020204" charset="-122"/>
                 <a:sym typeface="+mn-ea"/>
               </a:rPr>
               <a:t>仿真辅助建图</a:t>
@@ -15030,8 +15070,8 @@
                 <a:solidFill>
                   <a:schemeClr val="tx1"/>
                 </a:solidFill>
-                <a:latin typeface="微软雅黑" charset="-122"/>
-                <a:ea typeface="微软雅黑" charset="-122"/>
+                <a:latin typeface="微软雅黑" panose="020B0503020204020204" charset="-122"/>
+                <a:ea typeface="微软雅黑" panose="020B0503020204020204" charset="-122"/>
                 <a:sym typeface="+mn-ea"/>
               </a:rPr>
               <a:t>—</a:t>
@@ -15041,8 +15081,8 @@
                 <a:solidFill>
                   <a:schemeClr val="tx1"/>
                 </a:solidFill>
-                <a:latin typeface="微软雅黑" charset="-122"/>
-                <a:ea typeface="微软雅黑" charset="-122"/>
+                <a:latin typeface="微软雅黑" panose="020B0503020204020204" charset="-122"/>
+                <a:ea typeface="微软雅黑" panose="020B0503020204020204" charset="-122"/>
                 <a:sym typeface="+mn-ea"/>
               </a:rPr>
               <a:t>实测修正</a:t>
@@ -15052,8 +15092,8 @@
                 <a:solidFill>
                   <a:schemeClr val="tx1"/>
                 </a:solidFill>
-                <a:latin typeface="微软雅黑" charset="-122"/>
-                <a:ea typeface="微软雅黑" charset="-122"/>
+                <a:latin typeface="微软雅黑" panose="020B0503020204020204" charset="-122"/>
+                <a:ea typeface="微软雅黑" panose="020B0503020204020204" charset="-122"/>
                 <a:sym typeface="+mn-ea"/>
               </a:rPr>
               <a:t>—</a:t>
@@ -15063,8 +15103,8 @@
                 <a:solidFill>
                   <a:schemeClr val="tx1"/>
                 </a:solidFill>
-                <a:latin typeface="微软雅黑" charset="-122"/>
-                <a:ea typeface="微软雅黑" charset="-122"/>
+                <a:latin typeface="微软雅黑" panose="020B0503020204020204" charset="-122"/>
+                <a:ea typeface="微软雅黑" panose="020B0503020204020204" charset="-122"/>
                 <a:sym typeface="+mn-ea"/>
               </a:rPr>
               <a:t>选择位置补测</a:t>
@@ -15074,8 +15114,8 @@
                 <a:solidFill>
                   <a:schemeClr val="tx1"/>
                 </a:solidFill>
-                <a:latin typeface="微软雅黑" charset="-122"/>
-                <a:ea typeface="微软雅黑" charset="-122"/>
+                <a:latin typeface="微软雅黑" panose="020B0503020204020204" charset="-122"/>
+                <a:ea typeface="微软雅黑" panose="020B0503020204020204" charset="-122"/>
                 <a:sym typeface="+mn-ea"/>
               </a:rPr>
               <a:t>”</a:t>
@@ -15085,8 +15125,8 @@
                 <a:solidFill>
                   <a:schemeClr val="tx1"/>
                 </a:solidFill>
-                <a:latin typeface="微软雅黑" charset="-122"/>
-                <a:ea typeface="微软雅黑" charset="-122"/>
+                <a:latin typeface="微软雅黑" panose="020B0503020204020204" charset="-122"/>
+                <a:ea typeface="微软雅黑" panose="020B0503020204020204" charset="-122"/>
                 <a:sym typeface="+mn-ea"/>
               </a:rPr>
               <a:t>的方法。</a:t>
@@ -15095,8 +15135,8 @@
               <a:solidFill>
                 <a:schemeClr val="tx1"/>
               </a:solidFill>
-              <a:latin typeface="微软雅黑" charset="-122"/>
-              <a:ea typeface="微软雅黑" charset="-122"/>
+              <a:latin typeface="微软雅黑" panose="020B0503020204020204" charset="-122"/>
+              <a:ea typeface="微软雅黑" panose="020B0503020204020204" charset="-122"/>
               <a:sym typeface="+mn-ea"/>
             </a:endParaRPr>
           </a:p>
